--- a/ER Operations & Analytics Report.pptx
+++ b/ER Operations & Analytics Report.pptx
@@ -5,25 +5,23 @@
     <p:sldMasterId id="2147483648" r:id="rId1"/>
   </p:sldMasterIdLst>
   <p:sldIdLst>
-    <p:sldId id="256" r:id="rId7"/>
-    <p:sldId id="257" r:id="rId8"/>
-    <p:sldId id="258" r:id="rId9"/>
-    <p:sldId id="259" r:id="rId10"/>
-    <p:sldId id="260" r:id="rId11"/>
-    <p:sldId id="261" r:id="rId12"/>
-    <p:sldId id="262" r:id="rId13"/>
-    <p:sldId id="263" r:id="rId14"/>
-    <p:sldId id="264" r:id="rId15"/>
-    <p:sldId id="265" r:id="rId16"/>
-    <p:sldId id="266" r:id="rId17"/>
-    <p:sldId id="267" r:id="rId18"/>
-    <p:sldId id="268" r:id="rId19"/>
-    <p:sldId id="269" r:id="rId20"/>
-    <p:sldId id="270" r:id="rId21"/>
-    <p:sldId id="271" r:id="rId22"/>
-    <p:sldId id="272" r:id="rId23"/>
+    <p:sldId id="256" r:id="rId2"/>
+    <p:sldId id="257" r:id="rId3"/>
+    <p:sldId id="258" r:id="rId4"/>
+    <p:sldId id="259" r:id="rId5"/>
+    <p:sldId id="260" r:id="rId6"/>
+    <p:sldId id="261" r:id="rId7"/>
+    <p:sldId id="262" r:id="rId8"/>
+    <p:sldId id="263" r:id="rId9"/>
+    <p:sldId id="264" r:id="rId10"/>
+    <p:sldId id="265" r:id="rId11"/>
+    <p:sldId id="266" r:id="rId12"/>
+    <p:sldId id="267" r:id="rId13"/>
+    <p:sldId id="268" r:id="rId14"/>
+    <p:sldId id="269" r:id="rId15"/>
+    <p:sldId id="270" r:id="rId16"/>
   </p:sldIdLst>
-  <p:sldSz cx="12192000" cy="6858000" type="screen4x3"/>
+  <p:sldSz cx="12192000" cy="6858000"/>
   <p:notesSz cx="6858000" cy="9144000"/>
   <p:defaultTextStyle>
     <a:defPPr>
@@ -120,6 +118,22 @@
       </a:defRPr>
     </a:lvl9pPr>
   </p:defaultTextStyle>
+  <p:extLst>
+    <p:ext uri="{EFAFB233-063F-42B5-8137-9DF3F51BA10A}">
+      <p15:sldGuideLst xmlns:p15="http://schemas.microsoft.com/office/powerpoint/2012/main">
+        <p15:guide id="1" orient="horz" pos="2160">
+          <p15:clr>
+            <a:srgbClr val="A4A3A4"/>
+          </p15:clr>
+        </p15:guide>
+        <p15:guide id="2" pos="2880">
+          <p15:clr>
+            <a:srgbClr val="A4A3A4"/>
+          </p15:clr>
+        </p15:guide>
+      </p15:sldGuideLst>
+    </p:ext>
+  </p:extLst>
 </p:presentation>
 </file>
 
@@ -161,10 +175,9 @@
           <a:lstStyle/>
           <a:p>
             <a:r>
-              <a:rPr lang="en-US" smtClean="0"/>
+              <a:rPr lang="en-US"/>
               <a:t>Click to edit Master title style</a:t>
             </a:r>
-            <a:endParaRPr lang="en-US"/>
           </a:p>
         </p:txBody>
       </p:sp>
@@ -280,10 +293,9 @@
           </a:lstStyle>
           <a:p>
             <a:r>
-              <a:rPr lang="en-US" smtClean="0"/>
+              <a:rPr lang="en-US"/>
               <a:t>Click to edit Master subtitle style</a:t>
             </a:r>
-            <a:endParaRPr lang="en-US"/>
           </a:p>
         </p:txBody>
       </p:sp>
@@ -304,7 +316,7 @@
           <a:p>
             <a:fld id="{5BCAD085-E8A6-8845-BD4E-CB4CCA059FC4}" type="datetimeFigureOut">
               <a:rPr lang="en-US" smtClean="0"/>
-              <a:t>1/27/13</a:t>
+              <a:t>8/31/2026</a:t>
             </a:fld>
             <a:endParaRPr lang="en-US"/>
           </a:p>
@@ -398,10 +410,9 @@
           <a:lstStyle/>
           <a:p>
             <a:r>
-              <a:rPr lang="en-US" smtClean="0"/>
+              <a:rPr lang="en-US"/>
               <a:t>Click to edit Master title style</a:t>
             </a:r>
-            <a:endParaRPr lang="en-US"/>
           </a:p>
         </p:txBody>
       </p:sp>
@@ -422,38 +433,37 @@
           <a:p>
             <a:pPr lvl="0"/>
             <a:r>
-              <a:rPr lang="en-US" smtClean="0"/>
+              <a:rPr lang="en-US"/>
               <a:t>Click to edit Master text styles</a:t>
             </a:r>
           </a:p>
           <a:p>
             <a:pPr lvl="1"/>
             <a:r>
-              <a:rPr lang="en-US" smtClean="0"/>
+              <a:rPr lang="en-US"/>
               <a:t>Second level</a:t>
             </a:r>
           </a:p>
           <a:p>
             <a:pPr lvl="2"/>
             <a:r>
-              <a:rPr lang="en-US" smtClean="0"/>
+              <a:rPr lang="en-US"/>
               <a:t>Third level</a:t>
             </a:r>
           </a:p>
           <a:p>
             <a:pPr lvl="3"/>
             <a:r>
-              <a:rPr lang="en-US" smtClean="0"/>
+              <a:rPr lang="en-US"/>
               <a:t>Fourth level</a:t>
             </a:r>
           </a:p>
           <a:p>
             <a:pPr lvl="4"/>
             <a:r>
-              <a:rPr lang="en-US" smtClean="0"/>
+              <a:rPr lang="en-US"/>
               <a:t>Fifth level</a:t>
             </a:r>
-            <a:endParaRPr lang="en-US"/>
           </a:p>
         </p:txBody>
       </p:sp>
@@ -474,7 +484,7 @@
           <a:p>
             <a:fld id="{5BCAD085-E8A6-8845-BD4E-CB4CCA059FC4}" type="datetimeFigureOut">
               <a:rPr lang="en-US" smtClean="0"/>
-              <a:t>1/27/13</a:t>
+              <a:t>8/31/2026</a:t>
             </a:fld>
             <a:endParaRPr lang="en-US"/>
           </a:p>
@@ -573,10 +583,9 @@
           <a:lstStyle/>
           <a:p>
             <a:r>
-              <a:rPr lang="en-US" smtClean="0"/>
+              <a:rPr lang="en-US"/>
               <a:t>Click to edit Master title style</a:t>
             </a:r>
-            <a:endParaRPr lang="en-US"/>
           </a:p>
         </p:txBody>
       </p:sp>
@@ -602,38 +611,37 @@
           <a:p>
             <a:pPr lvl="0"/>
             <a:r>
-              <a:rPr lang="en-US" smtClean="0"/>
+              <a:rPr lang="en-US"/>
               <a:t>Click to edit Master text styles</a:t>
             </a:r>
           </a:p>
           <a:p>
             <a:pPr lvl="1"/>
             <a:r>
-              <a:rPr lang="en-US" smtClean="0"/>
+              <a:rPr lang="en-US"/>
               <a:t>Second level</a:t>
             </a:r>
           </a:p>
           <a:p>
             <a:pPr lvl="2"/>
             <a:r>
-              <a:rPr lang="en-US" smtClean="0"/>
+              <a:rPr lang="en-US"/>
               <a:t>Third level</a:t>
             </a:r>
           </a:p>
           <a:p>
             <a:pPr lvl="3"/>
             <a:r>
-              <a:rPr lang="en-US" smtClean="0"/>
+              <a:rPr lang="en-US"/>
               <a:t>Fourth level</a:t>
             </a:r>
           </a:p>
           <a:p>
             <a:pPr lvl="4"/>
             <a:r>
-              <a:rPr lang="en-US" smtClean="0"/>
+              <a:rPr lang="en-US"/>
               <a:t>Fifth level</a:t>
             </a:r>
-            <a:endParaRPr lang="en-US"/>
           </a:p>
         </p:txBody>
       </p:sp>
@@ -654,7 +662,7 @@
           <a:p>
             <a:fld id="{5BCAD085-E8A6-8845-BD4E-CB4CCA059FC4}" type="datetimeFigureOut">
               <a:rPr lang="en-US" smtClean="0"/>
-              <a:t>1/27/13</a:t>
+              <a:t>8/31/2026</a:t>
             </a:fld>
             <a:endParaRPr lang="en-US"/>
           </a:p>
@@ -748,10 +756,9 @@
           <a:lstStyle/>
           <a:p>
             <a:r>
-              <a:rPr lang="en-US" smtClean="0"/>
+              <a:rPr lang="en-US"/>
               <a:t>Click to edit Master title style</a:t>
             </a:r>
-            <a:endParaRPr lang="en-US"/>
           </a:p>
         </p:txBody>
       </p:sp>
@@ -772,38 +779,37 @@
           <a:p>
             <a:pPr lvl="0"/>
             <a:r>
-              <a:rPr lang="en-US" smtClean="0"/>
+              <a:rPr lang="en-US"/>
               <a:t>Click to edit Master text styles</a:t>
             </a:r>
           </a:p>
           <a:p>
             <a:pPr lvl="1"/>
             <a:r>
-              <a:rPr lang="en-US" smtClean="0"/>
+              <a:rPr lang="en-US"/>
               <a:t>Second level</a:t>
             </a:r>
           </a:p>
           <a:p>
             <a:pPr lvl="2"/>
             <a:r>
-              <a:rPr lang="en-US" smtClean="0"/>
+              <a:rPr lang="en-US"/>
               <a:t>Third level</a:t>
             </a:r>
           </a:p>
           <a:p>
             <a:pPr lvl="3"/>
             <a:r>
-              <a:rPr lang="en-US" smtClean="0"/>
+              <a:rPr lang="en-US"/>
               <a:t>Fourth level</a:t>
             </a:r>
           </a:p>
           <a:p>
             <a:pPr lvl="4"/>
             <a:r>
-              <a:rPr lang="en-US" smtClean="0"/>
+              <a:rPr lang="en-US"/>
               <a:t>Fifth level</a:t>
             </a:r>
-            <a:endParaRPr lang="en-US"/>
           </a:p>
         </p:txBody>
       </p:sp>
@@ -824,7 +830,7 @@
           <a:p>
             <a:fld id="{5BCAD085-E8A6-8845-BD4E-CB4CCA059FC4}" type="datetimeFigureOut">
               <a:rPr lang="en-US" smtClean="0"/>
-              <a:t>1/27/13</a:t>
+              <a:t>8/31/2026</a:t>
             </a:fld>
             <a:endParaRPr lang="en-US"/>
           </a:p>
@@ -927,10 +933,9 @@
           </a:lstStyle>
           <a:p>
             <a:r>
-              <a:rPr lang="en-US" smtClean="0"/>
+              <a:rPr lang="en-US"/>
               <a:t>Click to edit Master title style</a:t>
             </a:r>
-            <a:endParaRPr lang="en-US"/>
           </a:p>
         </p:txBody>
       </p:sp>
@@ -1047,7 +1052,7 @@
           <a:p>
             <a:pPr lvl="0"/>
             <a:r>
-              <a:rPr lang="en-US" smtClean="0"/>
+              <a:rPr lang="en-US"/>
               <a:t>Click to edit Master text styles</a:t>
             </a:r>
           </a:p>
@@ -1070,7 +1075,7 @@
           <a:p>
             <a:fld id="{5BCAD085-E8A6-8845-BD4E-CB4CCA059FC4}" type="datetimeFigureOut">
               <a:rPr lang="en-US" smtClean="0"/>
-              <a:t>1/27/13</a:t>
+              <a:t>8/31/2026</a:t>
             </a:fld>
             <a:endParaRPr lang="en-US"/>
           </a:p>
@@ -1164,10 +1169,9 @@
           <a:lstStyle/>
           <a:p>
             <a:r>
-              <a:rPr lang="en-US" smtClean="0"/>
+              <a:rPr lang="en-US"/>
               <a:t>Click to edit Master title style</a:t>
             </a:r>
-            <a:endParaRPr lang="en-US"/>
           </a:p>
         </p:txBody>
       </p:sp>
@@ -1221,38 +1225,37 @@
           <a:p>
             <a:pPr lvl="0"/>
             <a:r>
-              <a:rPr lang="en-US" smtClean="0"/>
+              <a:rPr lang="en-US"/>
               <a:t>Click to edit Master text styles</a:t>
             </a:r>
           </a:p>
           <a:p>
             <a:pPr lvl="1"/>
             <a:r>
-              <a:rPr lang="en-US" smtClean="0"/>
+              <a:rPr lang="en-US"/>
               <a:t>Second level</a:t>
             </a:r>
           </a:p>
           <a:p>
             <a:pPr lvl="2"/>
             <a:r>
-              <a:rPr lang="en-US" smtClean="0"/>
+              <a:rPr lang="en-US"/>
               <a:t>Third level</a:t>
             </a:r>
           </a:p>
           <a:p>
             <a:pPr lvl="3"/>
             <a:r>
-              <a:rPr lang="en-US" smtClean="0"/>
+              <a:rPr lang="en-US"/>
               <a:t>Fourth level</a:t>
             </a:r>
           </a:p>
           <a:p>
             <a:pPr lvl="4"/>
             <a:r>
-              <a:rPr lang="en-US" smtClean="0"/>
+              <a:rPr lang="en-US"/>
               <a:t>Fifth level</a:t>
             </a:r>
-            <a:endParaRPr lang="en-US"/>
           </a:p>
         </p:txBody>
       </p:sp>
@@ -1306,38 +1309,37 @@
           <a:p>
             <a:pPr lvl="0"/>
             <a:r>
-              <a:rPr lang="en-US" smtClean="0"/>
+              <a:rPr lang="en-US"/>
               <a:t>Click to edit Master text styles</a:t>
             </a:r>
           </a:p>
           <a:p>
             <a:pPr lvl="1"/>
             <a:r>
-              <a:rPr lang="en-US" smtClean="0"/>
+              <a:rPr lang="en-US"/>
               <a:t>Second level</a:t>
             </a:r>
           </a:p>
           <a:p>
             <a:pPr lvl="2"/>
             <a:r>
-              <a:rPr lang="en-US" smtClean="0"/>
+              <a:rPr lang="en-US"/>
               <a:t>Third level</a:t>
             </a:r>
           </a:p>
           <a:p>
             <a:pPr lvl="3"/>
             <a:r>
-              <a:rPr lang="en-US" smtClean="0"/>
+              <a:rPr lang="en-US"/>
               <a:t>Fourth level</a:t>
             </a:r>
           </a:p>
           <a:p>
             <a:pPr lvl="4"/>
             <a:r>
-              <a:rPr lang="en-US" smtClean="0"/>
+              <a:rPr lang="en-US"/>
               <a:t>Fifth level</a:t>
             </a:r>
-            <a:endParaRPr lang="en-US"/>
           </a:p>
         </p:txBody>
       </p:sp>
@@ -1358,7 +1360,7 @@
           <a:p>
             <a:fld id="{5BCAD085-E8A6-8845-BD4E-CB4CCA059FC4}" type="datetimeFigureOut">
               <a:rPr lang="en-US" smtClean="0"/>
-              <a:t>1/27/13</a:t>
+              <a:t>8/31/2026</a:t>
             </a:fld>
             <a:endParaRPr lang="en-US"/>
           </a:p>
@@ -1456,10 +1458,9 @@
           </a:lstStyle>
           <a:p>
             <a:r>
-              <a:rPr lang="en-US" smtClean="0"/>
+              <a:rPr lang="en-US"/>
               <a:t>Click to edit Master title style</a:t>
             </a:r>
-            <a:endParaRPr lang="en-US"/>
           </a:p>
         </p:txBody>
       </p:sp>
@@ -1522,7 +1523,7 @@
           <a:p>
             <a:pPr lvl="0"/>
             <a:r>
-              <a:rPr lang="en-US" smtClean="0"/>
+              <a:rPr lang="en-US"/>
               <a:t>Click to edit Master text styles</a:t>
             </a:r>
           </a:p>
@@ -1578,38 +1579,37 @@
           <a:p>
             <a:pPr lvl="0"/>
             <a:r>
-              <a:rPr lang="en-US" smtClean="0"/>
+              <a:rPr lang="en-US"/>
               <a:t>Click to edit Master text styles</a:t>
             </a:r>
           </a:p>
           <a:p>
             <a:pPr lvl="1"/>
             <a:r>
-              <a:rPr lang="en-US" smtClean="0"/>
+              <a:rPr lang="en-US"/>
               <a:t>Second level</a:t>
             </a:r>
           </a:p>
           <a:p>
             <a:pPr lvl="2"/>
             <a:r>
-              <a:rPr lang="en-US" smtClean="0"/>
+              <a:rPr lang="en-US"/>
               <a:t>Third level</a:t>
             </a:r>
           </a:p>
           <a:p>
             <a:pPr lvl="3"/>
             <a:r>
-              <a:rPr lang="en-US" smtClean="0"/>
+              <a:rPr lang="en-US"/>
               <a:t>Fourth level</a:t>
             </a:r>
           </a:p>
           <a:p>
             <a:pPr lvl="4"/>
             <a:r>
-              <a:rPr lang="en-US" smtClean="0"/>
+              <a:rPr lang="en-US"/>
               <a:t>Fifth level</a:t>
             </a:r>
-            <a:endParaRPr lang="en-US"/>
           </a:p>
         </p:txBody>
       </p:sp>
@@ -1672,7 +1672,7 @@
           <a:p>
             <a:pPr lvl="0"/>
             <a:r>
-              <a:rPr lang="en-US" smtClean="0"/>
+              <a:rPr lang="en-US"/>
               <a:t>Click to edit Master text styles</a:t>
             </a:r>
           </a:p>
@@ -1728,38 +1728,37 @@
           <a:p>
             <a:pPr lvl="0"/>
             <a:r>
-              <a:rPr lang="en-US" smtClean="0"/>
+              <a:rPr lang="en-US"/>
               <a:t>Click to edit Master text styles</a:t>
             </a:r>
           </a:p>
           <a:p>
             <a:pPr lvl="1"/>
             <a:r>
-              <a:rPr lang="en-US" smtClean="0"/>
+              <a:rPr lang="en-US"/>
               <a:t>Second level</a:t>
             </a:r>
           </a:p>
           <a:p>
             <a:pPr lvl="2"/>
             <a:r>
-              <a:rPr lang="en-US" smtClean="0"/>
+              <a:rPr lang="en-US"/>
               <a:t>Third level</a:t>
             </a:r>
           </a:p>
           <a:p>
             <a:pPr lvl="3"/>
             <a:r>
-              <a:rPr lang="en-US" smtClean="0"/>
+              <a:rPr lang="en-US"/>
               <a:t>Fourth level</a:t>
             </a:r>
           </a:p>
           <a:p>
             <a:pPr lvl="4"/>
             <a:r>
-              <a:rPr lang="en-US" smtClean="0"/>
+              <a:rPr lang="en-US"/>
               <a:t>Fifth level</a:t>
             </a:r>
-            <a:endParaRPr lang="en-US"/>
           </a:p>
         </p:txBody>
       </p:sp>
@@ -1780,7 +1779,7 @@
           <a:p>
             <a:fld id="{5BCAD085-E8A6-8845-BD4E-CB4CCA059FC4}" type="datetimeFigureOut">
               <a:rPr lang="en-US" smtClean="0"/>
-              <a:t>1/27/13</a:t>
+              <a:t>8/31/2026</a:t>
             </a:fld>
             <a:endParaRPr lang="en-US"/>
           </a:p>
@@ -1874,10 +1873,9 @@
           <a:lstStyle/>
           <a:p>
             <a:r>
-              <a:rPr lang="en-US" smtClean="0"/>
+              <a:rPr lang="en-US"/>
               <a:t>Click to edit Master title style</a:t>
             </a:r>
-            <a:endParaRPr lang="en-US"/>
           </a:p>
         </p:txBody>
       </p:sp>
@@ -1898,7 +1896,7 @@
           <a:p>
             <a:fld id="{5BCAD085-E8A6-8845-BD4E-CB4CCA059FC4}" type="datetimeFigureOut">
               <a:rPr lang="en-US" smtClean="0"/>
-              <a:t>1/27/13</a:t>
+              <a:t>8/31/2026</a:t>
             </a:fld>
             <a:endParaRPr lang="en-US"/>
           </a:p>
@@ -1993,7 +1991,7 @@
           <a:p>
             <a:fld id="{5BCAD085-E8A6-8845-BD4E-CB4CCA059FC4}" type="datetimeFigureOut">
               <a:rPr lang="en-US" smtClean="0"/>
-              <a:t>1/27/13</a:t>
+              <a:t>8/31/2026</a:t>
             </a:fld>
             <a:endParaRPr lang="en-US"/>
           </a:p>
@@ -2096,10 +2094,9 @@
           </a:lstStyle>
           <a:p>
             <a:r>
-              <a:rPr lang="en-US" smtClean="0"/>
+              <a:rPr lang="en-US"/>
               <a:t>Click to edit Master title style</a:t>
             </a:r>
-            <a:endParaRPr lang="en-US"/>
           </a:p>
         </p:txBody>
       </p:sp>
@@ -2153,38 +2150,37 @@
           <a:p>
             <a:pPr lvl="0"/>
             <a:r>
-              <a:rPr lang="en-US" smtClean="0"/>
+              <a:rPr lang="en-US"/>
               <a:t>Click to edit Master text styles</a:t>
             </a:r>
           </a:p>
           <a:p>
             <a:pPr lvl="1"/>
             <a:r>
-              <a:rPr lang="en-US" smtClean="0"/>
+              <a:rPr lang="en-US"/>
               <a:t>Second level</a:t>
             </a:r>
           </a:p>
           <a:p>
             <a:pPr lvl="2"/>
             <a:r>
-              <a:rPr lang="en-US" smtClean="0"/>
+              <a:rPr lang="en-US"/>
               <a:t>Third level</a:t>
             </a:r>
           </a:p>
           <a:p>
             <a:pPr lvl="3"/>
             <a:r>
-              <a:rPr lang="en-US" smtClean="0"/>
+              <a:rPr lang="en-US"/>
               <a:t>Fourth level</a:t>
             </a:r>
           </a:p>
           <a:p>
             <a:pPr lvl="4"/>
             <a:r>
-              <a:rPr lang="en-US" smtClean="0"/>
+              <a:rPr lang="en-US"/>
               <a:t>Fifth level</a:t>
             </a:r>
-            <a:endParaRPr lang="en-US"/>
           </a:p>
         </p:txBody>
       </p:sp>
@@ -2247,7 +2243,7 @@
           <a:p>
             <a:pPr lvl="0"/>
             <a:r>
-              <a:rPr lang="en-US" smtClean="0"/>
+              <a:rPr lang="en-US"/>
               <a:t>Click to edit Master text styles</a:t>
             </a:r>
           </a:p>
@@ -2270,7 +2266,7 @@
           <a:p>
             <a:fld id="{5BCAD085-E8A6-8845-BD4E-CB4CCA059FC4}" type="datetimeFigureOut">
               <a:rPr lang="en-US" smtClean="0"/>
-              <a:t>1/27/13</a:t>
+              <a:t>8/31/2026</a:t>
             </a:fld>
             <a:endParaRPr lang="en-US"/>
           </a:p>
@@ -2373,10 +2369,9 @@
           </a:lstStyle>
           <a:p>
             <a:r>
-              <a:rPr lang="en-US" smtClean="0"/>
+              <a:rPr lang="en-US"/>
               <a:t>Click to edit Master title style</a:t>
             </a:r>
-            <a:endParaRPr lang="en-US"/>
           </a:p>
         </p:txBody>
       </p:sp>
@@ -2500,7 +2495,7 @@
           <a:p>
             <a:pPr lvl="0"/>
             <a:r>
-              <a:rPr lang="en-US" smtClean="0"/>
+              <a:rPr lang="en-US"/>
               <a:t>Click to edit Master text styles</a:t>
             </a:r>
           </a:p>
@@ -2523,7 +2518,7 @@
           <a:p>
             <a:fld id="{5BCAD085-E8A6-8845-BD4E-CB4CCA059FC4}" type="datetimeFigureOut">
               <a:rPr lang="en-US" smtClean="0"/>
-              <a:t>1/27/13</a:t>
+              <a:t>8/31/2026</a:t>
             </a:fld>
             <a:endParaRPr lang="en-US"/>
           </a:p>
@@ -2632,10 +2627,9 @@
           <a:lstStyle/>
           <a:p>
             <a:r>
-              <a:rPr lang="en-US" smtClean="0"/>
+              <a:rPr lang="en-US"/>
               <a:t>Click to edit Master title style</a:t>
             </a:r>
-            <a:endParaRPr lang="en-US"/>
           </a:p>
         </p:txBody>
       </p:sp>
@@ -2666,38 +2660,37 @@
           <a:p>
             <a:pPr lvl="0"/>
             <a:r>
-              <a:rPr lang="en-US" smtClean="0"/>
+              <a:rPr lang="en-US"/>
               <a:t>Click to edit Master text styles</a:t>
             </a:r>
           </a:p>
           <a:p>
             <a:pPr lvl="1"/>
             <a:r>
-              <a:rPr lang="en-US" smtClean="0"/>
+              <a:rPr lang="en-US"/>
               <a:t>Second level</a:t>
             </a:r>
           </a:p>
           <a:p>
             <a:pPr lvl="2"/>
             <a:r>
-              <a:rPr lang="en-US" smtClean="0"/>
+              <a:rPr lang="en-US"/>
               <a:t>Third level</a:t>
             </a:r>
           </a:p>
           <a:p>
             <a:pPr lvl="3"/>
             <a:r>
-              <a:rPr lang="en-US" smtClean="0"/>
+              <a:rPr lang="en-US"/>
               <a:t>Fourth level</a:t>
             </a:r>
           </a:p>
           <a:p>
             <a:pPr lvl="4"/>
             <a:r>
-              <a:rPr lang="en-US" smtClean="0"/>
+              <a:rPr lang="en-US"/>
               <a:t>Fifth level</a:t>
             </a:r>
-            <a:endParaRPr lang="en-US"/>
           </a:p>
         </p:txBody>
       </p:sp>
@@ -2736,7 +2729,7 @@
           <a:p>
             <a:fld id="{5BCAD085-E8A6-8845-BD4E-CB4CCA059FC4}" type="datetimeFigureOut">
               <a:rPr lang="en-US" smtClean="0"/>
-              <a:t>1/27/13</a:t>
+              <a:t>8/31/2026</a:t>
             </a:fld>
             <a:endParaRPr lang="en-US"/>
           </a:p>
@@ -3095,7 +3088,7 @@
 </file>
 
 <file path=ppt/slides/slide1.xml><?xml version="1.0" encoding="utf-8"?>
-<p:sld xmlns:a="http://schemas.openxmlformats.org/drawingml/2006/main" xmlns:p="http://schemas.openxmlformats.org/presentationml/2006/main" xmlns:r="http://schemas.openxmlformats.org/officeDocument/2006/relationships">
+<p:sld xmlns:a="http://schemas.openxmlformats.org/drawingml/2006/main" xmlns:r="http://schemas.openxmlformats.org/officeDocument/2006/relationships" xmlns:p="http://schemas.openxmlformats.org/presentationml/2006/main">
   <p:cSld>
     <p:spTree>
       <p:nvGrpSpPr>
@@ -3103,7 +3096,14 @@
         <p:cNvGrpSpPr/>
         <p:nvPr/>
       </p:nvGrpSpPr>
-      <p:grpSpPr/>
+      <p:grpSpPr>
+        <a:xfrm>
+          <a:off x="0" y="0"/>
+          <a:ext cx="0" cy="0"/>
+          <a:chOff x="0" y="0"/>
+          <a:chExt cx="0" cy="0"/>
+        </a:xfrm>
+      </p:grpSpPr>
       <p:pic>
         <p:nvPicPr>
           <p:cNvPr id="2" name="Picture 1" descr="image.png"/>
@@ -3145,7 +3145,7 @@
           <a:noFill/>
         </p:spPr>
         <p:txBody>
-          <a:bodyPr wrap="square" lIns="0" rIns="0" tIns="0" bIns="0" anchor="t">
+          <a:bodyPr wrap="square" lIns="0" tIns="0" rIns="0" bIns="0" anchor="t">
             <a:spAutoFit/>
           </a:bodyPr>
           <a:lstStyle/>
@@ -3156,7 +3156,7 @@
               </a:lnSpc>
             </a:pPr>
             <a:r>
-              <a:rPr b="1" sz="5400" i="0" u="none">
+              <a:rPr sz="5400" b="1" i="0" u="none">
                 <a:solidFill>
                   <a:srgbClr val="FFFFFF"/>
                 </a:solidFill>
@@ -3165,7 +3165,7 @@
               <a:t>Hospital ER </a:t>
             </a:r>
             <a:r>
-              <a:rPr b="1" sz="5400" i="0" u="none">
+              <a:rPr sz="5400" b="1" i="0" u="none">
                 <a:solidFill>
                   <a:srgbClr val="F59E0B"/>
                 </a:solidFill>
@@ -3193,7 +3193,7 @@
           <a:noFill/>
         </p:spPr>
         <p:txBody>
-          <a:bodyPr wrap="square" lIns="0" rIns="0" tIns="0" bIns="0" anchor="t">
+          <a:bodyPr wrap="square" lIns="0" tIns="0" rIns="0" bIns="0" anchor="t">
             <a:spAutoFit/>
           </a:bodyPr>
           <a:lstStyle/>
@@ -3204,7 +3204,7 @@
               </a:lnSpc>
             </a:pPr>
             <a:r>
-              <a:rPr b="0" sz="1800" i="0" u="none">
+              <a:rPr sz="1800" b="0" i="0" u="none">
                 <a:solidFill>
                   <a:srgbClr val="D1D5DB"/>
                 </a:solidFill>
@@ -3224,7 +3224,7 @@
 </file>
 
 <file path=ppt/slides/slide10.xml><?xml version="1.0" encoding="utf-8"?>
-<p:sld xmlns:a="http://schemas.openxmlformats.org/drawingml/2006/main" xmlns:p="http://schemas.openxmlformats.org/presentationml/2006/main" xmlns:r="http://schemas.openxmlformats.org/officeDocument/2006/relationships">
+<p:sld xmlns:a="http://schemas.openxmlformats.org/drawingml/2006/main" xmlns:r="http://schemas.openxmlformats.org/officeDocument/2006/relationships" xmlns:p="http://schemas.openxmlformats.org/presentationml/2006/main">
   <p:cSld>
     <p:spTree>
       <p:nvGrpSpPr>
@@ -3232,7 +3232,14 @@
         <p:cNvGrpSpPr/>
         <p:nvPr/>
       </p:nvGrpSpPr>
-      <p:grpSpPr/>
+      <p:grpSpPr>
+        <a:xfrm>
+          <a:off x="0" y="0"/>
+          <a:ext cx="0" cy="0"/>
+          <a:chOff x="0" y="0"/>
+          <a:chExt cx="0" cy="0"/>
+        </a:xfrm>
+      </p:grpSpPr>
       <p:pic>
         <p:nvPicPr>
           <p:cNvPr id="2" name="Picture 1" descr="image.png"/>
@@ -3274,14 +3281,14 @@
           <a:noFill/>
         </p:spPr>
         <p:txBody>
-          <a:bodyPr wrap="square" lIns="0" rIns="0" tIns="0" bIns="0" anchor="t">
+          <a:bodyPr wrap="square" lIns="0" tIns="0" rIns="0" bIns="0" anchor="t">
             <a:spAutoFit/>
           </a:bodyPr>
           <a:lstStyle/>
           <a:p>
             <a:pPr algn="ctr"/>
             <a:r>
-              <a:rPr b="1" sz="6000" i="0" u="none">
+              <a:rPr sz="6000" b="1" i="0" u="none">
                 <a:solidFill>
                   <a:srgbClr val="FFFFFF"/>
                 </a:solidFill>
@@ -3309,7 +3316,7 @@
           <a:noFill/>
         </p:spPr>
         <p:txBody>
-          <a:bodyPr wrap="square" lIns="0" rIns="0" tIns="0" bIns="0" anchor="t">
+          <a:bodyPr wrap="square" lIns="0" tIns="0" rIns="0" bIns="0" anchor="t">
             <a:spAutoFit/>
           </a:bodyPr>
           <a:lstStyle/>
@@ -3320,7 +3327,7 @@
               </a:lnSpc>
             </a:pPr>
             <a:r>
-              <a:rPr b="0" sz="1500" i="0" u="none">
+              <a:rPr sz="1500" b="0" i="0" u="none">
                 <a:solidFill>
                   <a:srgbClr val="9CA3AF"/>
                 </a:solidFill>
@@ -3340,7 +3347,7 @@
 </file>
 
 <file path=ppt/slides/slide11.xml><?xml version="1.0" encoding="utf-8"?>
-<p:sld xmlns:a="http://schemas.openxmlformats.org/drawingml/2006/main" xmlns:p="http://schemas.openxmlformats.org/presentationml/2006/main" xmlns:r="http://schemas.openxmlformats.org/officeDocument/2006/relationships">
+<p:sld xmlns:a="http://schemas.openxmlformats.org/drawingml/2006/main" xmlns:r="http://schemas.openxmlformats.org/officeDocument/2006/relationships" xmlns:p="http://schemas.openxmlformats.org/presentationml/2006/main">
   <p:cSld>
     <p:spTree>
       <p:nvGrpSpPr>
@@ -3348,7 +3355,14 @@
         <p:cNvGrpSpPr/>
         <p:nvPr/>
       </p:nvGrpSpPr>
-      <p:grpSpPr/>
+      <p:grpSpPr>
+        <a:xfrm>
+          <a:off x="0" y="0"/>
+          <a:ext cx="0" cy="0"/>
+          <a:chOff x="0" y="0"/>
+          <a:chExt cx="0" cy="0"/>
+        </a:xfrm>
+      </p:grpSpPr>
       <p:pic>
         <p:nvPicPr>
           <p:cNvPr id="2" name="Picture 1" descr="image.png"/>
@@ -3414,14 +3428,14 @@
           <a:noFill/>
         </p:spPr>
         <p:txBody>
-          <a:bodyPr wrap="square" lIns="0" rIns="0" tIns="0" bIns="0" anchor="t">
+          <a:bodyPr wrap="square" lIns="0" tIns="0" rIns="0" bIns="0" anchor="t">
             <a:spAutoFit/>
           </a:bodyPr>
           <a:lstStyle/>
           <a:p>
             <a:pPr algn="l"/>
             <a:r>
-              <a:rPr b="1" sz="2100" i="0" u="none">
+              <a:rPr sz="2100" b="1" i="0" u="none">
                 <a:solidFill>
                   <a:srgbClr val="E5E7EB"/>
                 </a:solidFill>
@@ -3449,7 +3463,7 @@
           <a:noFill/>
         </p:spPr>
         <p:txBody>
-          <a:bodyPr wrap="square" lIns="0" rIns="0" tIns="0" bIns="0" anchor="t">
+          <a:bodyPr wrap="square" lIns="0" tIns="0" rIns="0" bIns="0" anchor="t">
             <a:spAutoFit/>
           </a:bodyPr>
           <a:lstStyle/>
@@ -3460,7 +3474,7 @@
               </a:lnSpc>
             </a:pPr>
             <a:r>
-              <a:rPr b="0" sz="1500" i="0" u="none">
+              <a:rPr sz="1500" b="0" i="0" u="none">
                 <a:solidFill>
                   <a:srgbClr val="9CA3AF"/>
                 </a:solidFill>
@@ -3469,7 +3483,7 @@
               <a:t>The referral data clearly illustrates that the vast majority of ER patients </a:t>
             </a:r>
             <a:r>
-              <a:rPr b="1" sz="1500" i="0" u="none">
+              <a:rPr sz="1500" b="1" i="0" u="none">
                 <a:solidFill>
                   <a:srgbClr val="9CA3AF"/>
                 </a:solidFill>
@@ -3478,7 +3492,7 @@
               <a:t>(263 patients) arrived with "None"</a:t>
             </a:r>
             <a:r>
-              <a:rPr b="0" sz="1500" i="0" u="none">
+              <a:rPr sz="1500" b="0" i="0" u="none">
                 <a:solidFill>
                   <a:srgbClr val="9CA3AF"/>
                 </a:solidFill>
@@ -3506,7 +3520,7 @@
           <a:noFill/>
         </p:spPr>
         <p:txBody>
-          <a:bodyPr wrap="square" lIns="0" rIns="0" tIns="0" bIns="0" anchor="t">
+          <a:bodyPr wrap="square" lIns="0" tIns="0" rIns="0" bIns="0" anchor="t">
             <a:spAutoFit/>
           </a:bodyPr>
           <a:lstStyle/>
@@ -3517,7 +3531,7 @@
               </a:lnSpc>
             </a:pPr>
             <a:r>
-              <a:rPr b="0" sz="1500" i="0" u="none">
+              <a:rPr sz="1500" b="0" i="0" u="none">
                 <a:solidFill>
                   <a:srgbClr val="9CA3AF"/>
                 </a:solidFill>
@@ -3545,14 +3559,14 @@
           <a:noFill/>
         </p:spPr>
         <p:txBody>
-          <a:bodyPr wrap="square" lIns="0" rIns="0" tIns="0" bIns="0" anchor="t">
+          <a:bodyPr wrap="square" lIns="0" tIns="0" rIns="0" bIns="0" anchor="t">
             <a:spAutoFit/>
           </a:bodyPr>
           <a:lstStyle/>
           <a:p>
             <a:pPr algn="l"/>
             <a:r>
-              <a:rPr b="1" sz="3450" i="0" u="none">
+              <a:rPr sz="3450" b="1" i="0" u="none">
                 <a:solidFill>
                   <a:srgbClr val="FFFFFF"/>
                 </a:solidFill>
@@ -3561,7 +3575,7 @@
               <a:t>Department </a:t>
             </a:r>
             <a:r>
-              <a:rPr b="1" sz="3450" i="0" u="none">
+              <a:rPr sz="3450" b="1" i="0" u="none">
                 <a:solidFill>
                   <a:srgbClr val="38BDF8"/>
                 </a:solidFill>
@@ -3613,6 +3627,7 @@
           <a:lstStyle/>
           <a:p>
             <a:pPr algn="ctr"/>
+            <a:endParaRPr/>
           </a:p>
         </p:txBody>
       </p:sp>
@@ -3625,7 +3640,7 @@
 </file>
 
 <file path=ppt/slides/slide12.xml><?xml version="1.0" encoding="utf-8"?>
-<p:sld xmlns:a="http://schemas.openxmlformats.org/drawingml/2006/main" xmlns:p="http://schemas.openxmlformats.org/presentationml/2006/main" xmlns:r="http://schemas.openxmlformats.org/officeDocument/2006/relationships">
+<p:sld xmlns:a="http://schemas.openxmlformats.org/drawingml/2006/main" xmlns:r="http://schemas.openxmlformats.org/officeDocument/2006/relationships" xmlns:p="http://schemas.openxmlformats.org/presentationml/2006/main">
   <p:cSld>
     <p:spTree>
       <p:nvGrpSpPr>
@@ -3633,7 +3648,14 @@
         <p:cNvGrpSpPr/>
         <p:nvPr/>
       </p:nvGrpSpPr>
-      <p:grpSpPr/>
+      <p:grpSpPr>
+        <a:xfrm>
+          <a:off x="0" y="0"/>
+          <a:ext cx="0" cy="0"/>
+          <a:chOff x="0" y="0"/>
+          <a:chExt cx="0" cy="0"/>
+        </a:xfrm>
+      </p:grpSpPr>
       <p:pic>
         <p:nvPicPr>
           <p:cNvPr id="2" name="Picture 1" descr="image.png"/>
@@ -3699,14 +3721,14 @@
           <a:noFill/>
         </p:spPr>
         <p:txBody>
-          <a:bodyPr wrap="square" lIns="0" rIns="0" tIns="0" bIns="0" anchor="t">
+          <a:bodyPr wrap="square" lIns="0" tIns="0" rIns="0" bIns="0" anchor="t">
             <a:spAutoFit/>
           </a:bodyPr>
           <a:lstStyle/>
           <a:p>
             <a:pPr algn="l"/>
             <a:r>
-              <a:rPr b="1" sz="3450" i="0" u="none">
+              <a:rPr sz="3450" b="1" i="0" u="none">
                 <a:solidFill>
                   <a:srgbClr val="FFFFFF"/>
                 </a:solidFill>
@@ -3715,7 +3737,7 @@
               <a:t>Demographic Volume </a:t>
             </a:r>
             <a:r>
-              <a:rPr b="1" sz="3450" i="0" u="none">
+              <a:rPr sz="3450" b="1" i="0" u="none">
                 <a:solidFill>
                   <a:srgbClr val="38BDF8"/>
                 </a:solidFill>
@@ -3767,6 +3789,7 @@
           <a:lstStyle/>
           <a:p>
             <a:pPr algn="ctr"/>
+            <a:endParaRPr/>
           </a:p>
         </p:txBody>
       </p:sp>
@@ -3779,7 +3802,7 @@
 </file>
 
 <file path=ppt/slides/slide13.xml><?xml version="1.0" encoding="utf-8"?>
-<p:sld xmlns:a="http://schemas.openxmlformats.org/drawingml/2006/main" xmlns:p="http://schemas.openxmlformats.org/presentationml/2006/main" xmlns:r="http://schemas.openxmlformats.org/officeDocument/2006/relationships">
+<p:sld xmlns:a="http://schemas.openxmlformats.org/drawingml/2006/main" xmlns:r="http://schemas.openxmlformats.org/officeDocument/2006/relationships" xmlns:p="http://schemas.openxmlformats.org/presentationml/2006/main">
   <p:cSld>
     <p:spTree>
       <p:nvGrpSpPr>
@@ -3787,7 +3810,14 @@
         <p:cNvGrpSpPr/>
         <p:nvPr/>
       </p:nvGrpSpPr>
-      <p:grpSpPr/>
+      <p:grpSpPr>
+        <a:xfrm>
+          <a:off x="0" y="0"/>
+          <a:ext cx="0" cy="0"/>
+          <a:chOff x="0" y="0"/>
+          <a:chExt cx="0" cy="0"/>
+        </a:xfrm>
+      </p:grpSpPr>
       <p:pic>
         <p:nvPicPr>
           <p:cNvPr id="2" name="Picture 1" descr="image.png"/>
@@ -3853,14 +3883,14 @@
           <a:noFill/>
         </p:spPr>
         <p:txBody>
-          <a:bodyPr wrap="square" lIns="0" rIns="0" tIns="0" bIns="0" anchor="t">
+          <a:bodyPr wrap="square" lIns="0" tIns="0" rIns="0" bIns="0" anchor="t">
             <a:spAutoFit/>
           </a:bodyPr>
           <a:lstStyle/>
           <a:p>
             <a:pPr algn="l"/>
             <a:r>
-              <a:rPr b="1" sz="2100" i="0" u="none">
+              <a:rPr sz="2100" b="1" i="0" u="none">
                 <a:solidFill>
                   <a:srgbClr val="E5E7EB"/>
                 </a:solidFill>
@@ -3888,7 +3918,7 @@
           <a:noFill/>
         </p:spPr>
         <p:txBody>
-          <a:bodyPr wrap="square" lIns="0" rIns="0" tIns="0" bIns="0" anchor="t">
+          <a:bodyPr wrap="square" lIns="0" tIns="0" rIns="0" bIns="0" anchor="t">
             <a:spAutoFit/>
           </a:bodyPr>
           <a:lstStyle/>
@@ -3899,7 +3929,7 @@
               </a:lnSpc>
             </a:pPr>
             <a:r>
-              <a:rPr b="0" sz="1500" i="0" u="none">
+              <a:rPr sz="1500" b="0" i="0" u="none">
                 <a:solidFill>
                   <a:srgbClr val="9CA3AF"/>
                 </a:solidFill>
@@ -3927,7 +3957,7 @@
           <a:noFill/>
         </p:spPr>
         <p:txBody>
-          <a:bodyPr wrap="square" lIns="0" rIns="0" tIns="0" bIns="0" anchor="t">
+          <a:bodyPr wrap="square" lIns="0" tIns="0" rIns="0" bIns="0" anchor="t">
             <a:spAutoFit/>
           </a:bodyPr>
           <a:lstStyle/>
@@ -3938,7 +3968,7 @@
               </a:lnSpc>
             </a:pPr>
             <a:r>
-              <a:rPr b="0" sz="1500" i="0" u="none">
+              <a:rPr sz="1500" b="0" i="0" u="none">
                 <a:solidFill>
                   <a:srgbClr val="9CA3AF"/>
                 </a:solidFill>
@@ -3966,14 +3996,14 @@
           <a:noFill/>
         </p:spPr>
         <p:txBody>
-          <a:bodyPr wrap="square" lIns="0" rIns="0" tIns="0" bIns="0" anchor="t">
+          <a:bodyPr wrap="square" lIns="0" tIns="0" rIns="0" bIns="0" anchor="t">
             <a:spAutoFit/>
           </a:bodyPr>
           <a:lstStyle/>
           <a:p>
             <a:pPr algn="l"/>
             <a:r>
-              <a:rPr b="1" sz="3450" i="0" u="none">
+              <a:rPr sz="3450" b="1" i="0" u="none">
                 <a:solidFill>
                   <a:srgbClr val="FFFFFF"/>
                 </a:solidFill>
@@ -3982,7 +4012,7 @@
               <a:t>Gender-Wise </a:t>
             </a:r>
             <a:r>
-              <a:rPr b="1" sz="3450" i="0" u="none">
+              <a:rPr sz="3450" b="1" i="0" u="none">
                 <a:solidFill>
                   <a:srgbClr val="38BDF8"/>
                 </a:solidFill>
@@ -4034,6 +4064,7 @@
           <a:lstStyle/>
           <a:p>
             <a:pPr algn="ctr"/>
+            <a:endParaRPr/>
           </a:p>
         </p:txBody>
       </p:sp>
@@ -4046,7 +4077,7 @@
 </file>
 
 <file path=ppt/slides/slide14.xml><?xml version="1.0" encoding="utf-8"?>
-<p:sld xmlns:a="http://schemas.openxmlformats.org/drawingml/2006/main" xmlns:p="http://schemas.openxmlformats.org/presentationml/2006/main" xmlns:r="http://schemas.openxmlformats.org/officeDocument/2006/relationships">
+<p:sld xmlns:a="http://schemas.openxmlformats.org/drawingml/2006/main" xmlns:r="http://schemas.openxmlformats.org/officeDocument/2006/relationships" xmlns:p="http://schemas.openxmlformats.org/presentationml/2006/main">
   <p:cSld>
     <p:spTree>
       <p:nvGrpSpPr>
@@ -4054,7 +4085,14 @@
         <p:cNvGrpSpPr/>
         <p:nvPr/>
       </p:nvGrpSpPr>
-      <p:grpSpPr/>
+      <p:grpSpPr>
+        <a:xfrm>
+          <a:off x="0" y="0"/>
+          <a:ext cx="0" cy="0"/>
+          <a:chOff x="0" y="0"/>
+          <a:chExt cx="0" cy="0"/>
+        </a:xfrm>
+      </p:grpSpPr>
       <p:pic>
         <p:nvPicPr>
           <p:cNvPr id="2" name="Picture 1" descr="image.png"/>
@@ -4096,14 +4134,14 @@
           <a:noFill/>
         </p:spPr>
         <p:txBody>
-          <a:bodyPr wrap="square" lIns="0" rIns="0" tIns="0" bIns="0" anchor="t">
+          <a:bodyPr wrap="square" lIns="0" tIns="0" rIns="0" bIns="0" anchor="t">
             <a:spAutoFit/>
           </a:bodyPr>
           <a:lstStyle/>
           <a:p>
             <a:pPr algn="l"/>
             <a:r>
-              <a:rPr b="1" sz="3450" i="0" u="none">
+              <a:rPr sz="3450" b="1" i="0" u="none">
                 <a:solidFill>
                   <a:srgbClr val="FFFFFF"/>
                 </a:solidFill>
@@ -4112,7 +4150,7 @@
               <a:t>Strategic </a:t>
             </a:r>
             <a:r>
-              <a:rPr b="1" sz="3450" i="0" u="none">
+              <a:rPr sz="3450" b="1" i="0" u="none">
                 <a:solidFill>
                   <a:srgbClr val="38BDF8"/>
                 </a:solidFill>
@@ -4164,6 +4202,7 @@
           <a:lstStyle/>
           <a:p>
             <a:pPr algn="ctr"/>
+            <a:endParaRPr/>
           </a:p>
         </p:txBody>
       </p:sp>
@@ -4208,14 +4247,14 @@
           <a:noFill/>
         </p:spPr>
         <p:txBody>
-          <a:bodyPr wrap="square" lIns="0" rIns="0" tIns="0" bIns="0" anchor="t">
+          <a:bodyPr wrap="square" lIns="0" tIns="0" rIns="0" bIns="0" anchor="t">
             <a:spAutoFit/>
           </a:bodyPr>
           <a:lstStyle/>
           <a:p>
             <a:pPr algn="l"/>
             <a:r>
-              <a:rPr b="1" sz="2100" i="0" u="none">
+              <a:rPr sz="2100" b="1" i="0" u="none">
                 <a:solidFill>
                   <a:srgbClr val="E5E7EB"/>
                 </a:solidFill>
@@ -4243,7 +4282,7 @@
           <a:noFill/>
         </p:spPr>
         <p:txBody>
-          <a:bodyPr wrap="square" lIns="0" rIns="0" tIns="0" bIns="0" anchor="t">
+          <a:bodyPr wrap="square" lIns="0" tIns="0" rIns="0" bIns="0" anchor="t">
             <a:spAutoFit/>
           </a:bodyPr>
           <a:lstStyle/>
@@ -4254,7 +4293,7 @@
               </a:lnSpc>
             </a:pPr>
             <a:r>
-              <a:rPr b="0" sz="1500" i="0" u="none">
+              <a:rPr sz="1500" b="0" i="0" u="none">
                 <a:solidFill>
                   <a:srgbClr val="9CA3AF"/>
                 </a:solidFill>
@@ -4282,7 +4321,7 @@
           <a:noFill/>
         </p:spPr>
         <p:txBody>
-          <a:bodyPr wrap="square" lIns="0" rIns="0" tIns="0" bIns="0" anchor="t">
+          <a:bodyPr wrap="square" lIns="0" tIns="0" rIns="0" bIns="0" anchor="t">
             <a:spAutoFit/>
           </a:bodyPr>
           <a:lstStyle/>
@@ -4293,7 +4332,7 @@
               </a:lnSpc>
             </a:pPr>
             <a:r>
-              <a:rPr b="1" sz="1500" i="0" u="none">
+              <a:rPr sz="1500" b="1" i="0" u="none">
                 <a:solidFill>
                   <a:srgbClr val="9CA3AF"/>
                 </a:solidFill>
@@ -4302,7 +4341,7 @@
               <a:t>Fast-Track Triage:</a:t>
             </a:r>
             <a:r>
-              <a:rPr b="0" sz="1500" i="0" u="none">
+              <a:rPr sz="1500" b="0" i="0" u="none">
                 <a:solidFill>
                   <a:srgbClr val="9CA3AF"/>
                 </a:solidFill>
@@ -4330,7 +4369,7 @@
           <a:noFill/>
         </p:spPr>
         <p:txBody>
-          <a:bodyPr wrap="square" lIns="0" rIns="0" tIns="0" bIns="0" anchor="t">
+          <a:bodyPr wrap="square" lIns="0" tIns="0" rIns="0" bIns="0" anchor="t">
             <a:spAutoFit/>
           </a:bodyPr>
           <a:lstStyle/>
@@ -4341,7 +4380,7 @@
               </a:lnSpc>
             </a:pPr>
             <a:r>
-              <a:rPr b="1" sz="1500" i="0" u="none">
+              <a:rPr sz="1500" b="1" i="0" u="none">
                 <a:solidFill>
                   <a:srgbClr val="9CA3AF"/>
                 </a:solidFill>
@@ -4350,7 +4389,7 @@
               <a:t>Specialized Staffing:</a:t>
             </a:r>
             <a:r>
-              <a:rPr b="0" sz="1500" i="0" u="none">
+              <a:rPr sz="1500" b="0" i="0" u="none">
                 <a:solidFill>
                   <a:srgbClr val="9CA3AF"/>
                 </a:solidFill>
@@ -4378,7 +4417,7 @@
           <a:noFill/>
         </p:spPr>
         <p:txBody>
-          <a:bodyPr wrap="square" lIns="0" rIns="0" tIns="0" bIns="0" anchor="t">
+          <a:bodyPr wrap="square" lIns="0" tIns="0" rIns="0" bIns="0" anchor="t">
             <a:spAutoFit/>
           </a:bodyPr>
           <a:lstStyle/>
@@ -4389,7 +4428,7 @@
               </a:lnSpc>
             </a:pPr>
             <a:r>
-              <a:rPr b="1" sz="1500" i="0" u="none">
+              <a:rPr sz="1500" b="1" i="0" u="none">
                 <a:solidFill>
                   <a:srgbClr val="9CA3AF"/>
                 </a:solidFill>
@@ -4398,7 +4437,7 @@
               <a:t>Admission Streamlining:</a:t>
             </a:r>
             <a:r>
-              <a:rPr b="0" sz="1500" i="0" u="none">
+              <a:rPr sz="1500" b="0" i="0" u="none">
                 <a:solidFill>
                   <a:srgbClr val="9CA3AF"/>
                 </a:solidFill>
@@ -4426,7 +4465,7 @@
           <a:noFill/>
         </p:spPr>
         <p:txBody>
-          <a:bodyPr wrap="square" lIns="0" rIns="0" tIns="0" bIns="0" anchor="t">
+          <a:bodyPr wrap="square" lIns="0" tIns="0" rIns="0" bIns="0" anchor="t">
             <a:spAutoFit/>
           </a:bodyPr>
           <a:lstStyle/>
@@ -4437,7 +4476,7 @@
               </a:lnSpc>
             </a:pPr>
             <a:r>
-              <a:rPr b="1" sz="1500" i="0" u="none">
+              <a:rPr sz="1500" b="1" i="0" u="none">
                 <a:solidFill>
                   <a:srgbClr val="F59E0B"/>
                 </a:solidFill>
@@ -4465,7 +4504,7 @@
           <a:noFill/>
         </p:spPr>
         <p:txBody>
-          <a:bodyPr wrap="square" lIns="0" rIns="0" tIns="0" bIns="0" anchor="t">
+          <a:bodyPr wrap="square" lIns="0" tIns="0" rIns="0" bIns="0" anchor="t">
             <a:spAutoFit/>
           </a:bodyPr>
           <a:lstStyle/>
@@ -4476,7 +4515,7 @@
               </a:lnSpc>
             </a:pPr>
             <a:r>
-              <a:rPr b="1" sz="1500" i="0" u="none">
+              <a:rPr sz="1500" b="1" i="0" u="none">
                 <a:solidFill>
                   <a:srgbClr val="F59E0B"/>
                 </a:solidFill>
@@ -4504,7 +4543,7 @@
           <a:noFill/>
         </p:spPr>
         <p:txBody>
-          <a:bodyPr wrap="square" lIns="0" rIns="0" tIns="0" bIns="0" anchor="t">
+          <a:bodyPr wrap="square" lIns="0" tIns="0" rIns="0" bIns="0" anchor="t">
             <a:spAutoFit/>
           </a:bodyPr>
           <a:lstStyle/>
@@ -4515,7 +4554,7 @@
               </a:lnSpc>
             </a:pPr>
             <a:r>
-              <a:rPr b="1" sz="1500" i="0" u="none">
+              <a:rPr sz="1500" b="1" i="0" u="none">
                 <a:solidFill>
                   <a:srgbClr val="F59E0B"/>
                 </a:solidFill>
@@ -4535,7 +4574,7 @@
 </file>
 
 <file path=ppt/slides/slide15.xml><?xml version="1.0" encoding="utf-8"?>
-<p:sld xmlns:a="http://schemas.openxmlformats.org/drawingml/2006/main" xmlns:p="http://schemas.openxmlformats.org/presentationml/2006/main" xmlns:r="http://schemas.openxmlformats.org/officeDocument/2006/relationships">
+<p:sld xmlns:a="http://schemas.openxmlformats.org/drawingml/2006/main" xmlns:r="http://schemas.openxmlformats.org/officeDocument/2006/relationships" xmlns:p="http://schemas.openxmlformats.org/presentationml/2006/main">
   <p:cSld>
     <p:spTree>
       <p:nvGrpSpPr>
@@ -4543,7 +4582,14 @@
         <p:cNvGrpSpPr/>
         <p:nvPr/>
       </p:nvGrpSpPr>
-      <p:grpSpPr/>
+      <p:grpSpPr>
+        <a:xfrm>
+          <a:off x="0" y="0"/>
+          <a:ext cx="0" cy="0"/>
+          <a:chOff x="0" y="0"/>
+          <a:chExt cx="0" cy="0"/>
+        </a:xfrm>
+      </p:grpSpPr>
       <p:pic>
         <p:nvPicPr>
           <p:cNvPr id="2" name="Picture 1" descr="image.png"/>
@@ -4609,14 +4655,14 @@
           <a:noFill/>
         </p:spPr>
         <p:txBody>
-          <a:bodyPr wrap="square" lIns="0" rIns="0" tIns="0" bIns="0" anchor="t">
+          <a:bodyPr wrap="square" lIns="0" tIns="0" rIns="0" bIns="0" anchor="t">
             <a:spAutoFit/>
           </a:bodyPr>
           <a:lstStyle/>
           <a:p>
             <a:pPr algn="ctr"/>
             <a:r>
-              <a:rPr b="1" sz="6750" i="0" u="none">
+              <a:rPr sz="6750" b="1" i="0" u="none">
                 <a:solidFill>
                   <a:srgbClr val="38BDF8"/>
                 </a:solidFill>
@@ -4644,7 +4690,7 @@
           <a:noFill/>
         </p:spPr>
         <p:txBody>
-          <a:bodyPr wrap="square" lIns="0" rIns="0" tIns="0" bIns="0" anchor="t">
+          <a:bodyPr wrap="square" lIns="0" tIns="0" rIns="0" bIns="0" anchor="t">
             <a:spAutoFit/>
           </a:bodyPr>
           <a:lstStyle/>
@@ -4655,7 +4701,7 @@
               </a:lnSpc>
             </a:pPr>
             <a:r>
-              <a:rPr b="0" sz="1500" i="0" u="none">
+              <a:rPr sz="1500" b="0" i="0" u="none">
                 <a:solidFill>
                   <a:srgbClr val="9CA3AF"/>
                 </a:solidFill>
@@ -4674,8 +4720,8 @@
 </p:sld>
 </file>
 
-<file path=ppt/slides/slide16.xml><?xml version="1.0" encoding="utf-8"?>
-<p:sld xmlns:a="http://schemas.openxmlformats.org/drawingml/2006/main" xmlns:p="http://schemas.openxmlformats.org/presentationml/2006/main" xmlns:r="http://schemas.openxmlformats.org/officeDocument/2006/relationships">
+<file path=ppt/slides/slide2.xml><?xml version="1.0" encoding="utf-8"?>
+<p:sld xmlns:a="http://schemas.openxmlformats.org/drawingml/2006/main" xmlns:r="http://schemas.openxmlformats.org/officeDocument/2006/relationships" xmlns:p="http://schemas.openxmlformats.org/presentationml/2006/main">
   <p:cSld>
     <p:spTree>
       <p:nvGrpSpPr>
@@ -4683,7 +4729,14 @@
         <p:cNvGrpSpPr/>
         <p:nvPr/>
       </p:nvGrpSpPr>
-      <p:grpSpPr/>
+      <p:grpSpPr>
+        <a:xfrm>
+          <a:off x="0" y="0"/>
+          <a:ext cx="0" cy="0"/>
+          <a:chOff x="0" y="0"/>
+          <a:chExt cx="0" cy="0"/>
+        </a:xfrm>
+      </p:grpSpPr>
       <p:pic>
         <p:nvPicPr>
           <p:cNvPr id="2" name="Picture 1" descr="image.png"/>
@@ -4710,19 +4763,589 @@
       </p:pic>
       <p:sp>
         <p:nvSpPr>
-          <p:cNvPr id="3" name="Rectangle 2"/>
+          <p:cNvPr id="3" name="TextBox 2"/>
+          <p:cNvSpPr txBox="1"/>
+          <p:nvPr/>
+        </p:nvSpPr>
+        <p:spPr>
+          <a:xfrm>
+            <a:off x="295275" y="2005012"/>
+            <a:ext cx="11601450" cy="1943100"/>
+          </a:xfrm>
+          <a:prstGeom prst="rect">
+            <a:avLst/>
+          </a:prstGeom>
+          <a:noFill/>
+        </p:spPr>
+        <p:txBody>
+          <a:bodyPr wrap="square" lIns="0" tIns="0" rIns="0" bIns="0" anchor="t">
+            <a:spAutoFit/>
+          </a:bodyPr>
+          <a:lstStyle/>
+          <a:p>
+            <a:pPr algn="ctr"/>
+            <a:r>
+              <a:rPr sz="6000" b="1" i="0" u="none">
+                <a:solidFill>
+                  <a:srgbClr val="FFFFFF"/>
+                </a:solidFill>
+                <a:latin typeface="Space Grotesk"/>
+              </a:rPr>
+              <a:t>Project Overview &amp; Methodology</a:t>
+            </a:r>
+          </a:p>
+        </p:txBody>
+      </p:sp>
+      <p:sp>
+        <p:nvSpPr>
+          <p:cNvPr id="4" name="TextBox 3"/>
+          <p:cNvSpPr txBox="1"/>
+          <p:nvPr/>
+        </p:nvSpPr>
+        <p:spPr>
+          <a:xfrm>
+            <a:off x="571500" y="4548187"/>
+            <a:ext cx="11049000" cy="304800"/>
+          </a:xfrm>
+          <a:prstGeom prst="rect">
+            <a:avLst/>
+          </a:prstGeom>
+          <a:noFill/>
+        </p:spPr>
+        <p:txBody>
+          <a:bodyPr wrap="square" lIns="0" tIns="0" rIns="0" bIns="0" anchor="t">
+            <a:spAutoFit/>
+          </a:bodyPr>
+          <a:lstStyle/>
+          <a:p>
+            <a:pPr algn="ctr">
+              <a:lnSpc>
+                <a:spcPts val="2400"/>
+              </a:lnSpc>
+            </a:pPr>
+            <a:r>
+              <a:rPr sz="1500" b="0" i="0" u="none">
+                <a:solidFill>
+                  <a:srgbClr val="9CA3AF"/>
+                </a:solidFill>
+                <a:latin typeface="Outfit"/>
+              </a:rPr>
+              <a:t>Defining the scope and objectives of our ER data analysis.</a:t>
+            </a:r>
+          </a:p>
+        </p:txBody>
+      </p:sp>
+    </p:spTree>
+  </p:cSld>
+  <p:clrMapOvr>
+    <a:masterClrMapping/>
+  </p:clrMapOvr>
+</p:sld>
+</file>
+
+<file path=ppt/slides/slide3.xml><?xml version="1.0" encoding="utf-8"?>
+<p:sld xmlns:a="http://schemas.openxmlformats.org/drawingml/2006/main" xmlns:r="http://schemas.openxmlformats.org/officeDocument/2006/relationships" xmlns:p="http://schemas.openxmlformats.org/presentationml/2006/main">
+  <p:cSld>
+    <p:spTree>
+      <p:nvGrpSpPr>
+        <p:cNvPr id="1" name=""/>
+        <p:cNvGrpSpPr/>
+        <p:nvPr/>
+      </p:nvGrpSpPr>
+      <p:grpSpPr>
+        <a:xfrm>
+          <a:off x="0" y="0"/>
+          <a:ext cx="0" cy="0"/>
+          <a:chOff x="0" y="0"/>
+          <a:chExt cx="0" cy="0"/>
+        </a:xfrm>
+      </p:grpSpPr>
+      <p:pic>
+        <p:nvPicPr>
+          <p:cNvPr id="2" name="Picture 1" descr="image.png"/>
+          <p:cNvPicPr>
+            <a:picLocks noChangeAspect="1"/>
+          </p:cNvPicPr>
+          <p:nvPr/>
+        </p:nvPicPr>
+        <p:blipFill>
+          <a:blip r:embed="rId2"/>
+          <a:stretch>
+            <a:fillRect/>
+          </a:stretch>
+        </p:blipFill>
+        <p:spPr>
+          <a:xfrm>
+            <a:off x="0" y="0"/>
+            <a:ext cx="12192000" cy="6858000"/>
+          </a:xfrm>
+          <a:prstGeom prst="rect">
+            <a:avLst/>
+          </a:prstGeom>
+        </p:spPr>
+      </p:pic>
+      <p:pic>
+        <p:nvPicPr>
+          <p:cNvPr id="3" name="Picture 2" descr="image.png"/>
+          <p:cNvPicPr>
+            <a:picLocks noChangeAspect="1"/>
+          </p:cNvPicPr>
+          <p:nvPr/>
+        </p:nvPicPr>
+        <p:blipFill>
+          <a:blip r:embed="rId3"/>
+          <a:stretch>
+            <a:fillRect/>
+          </a:stretch>
+        </p:blipFill>
+        <p:spPr>
+          <a:xfrm>
+            <a:off x="6381750" y="2066925"/>
+            <a:ext cx="5238750" cy="3810000"/>
+          </a:xfrm>
+          <a:prstGeom prst="rect">
+            <a:avLst/>
+          </a:prstGeom>
+        </p:spPr>
+      </p:pic>
+      <p:sp>
+        <p:nvSpPr>
+          <p:cNvPr id="4" name="TextBox 3"/>
+          <p:cNvSpPr txBox="1"/>
+          <p:nvPr/>
+        </p:nvSpPr>
+        <p:spPr>
+          <a:xfrm>
+            <a:off x="571500" y="2047875"/>
+            <a:ext cx="5500687" cy="342900"/>
+          </a:xfrm>
+          <a:prstGeom prst="rect">
+            <a:avLst/>
+          </a:prstGeom>
+          <a:noFill/>
+        </p:spPr>
+        <p:txBody>
+          <a:bodyPr wrap="square" lIns="0" tIns="0" rIns="0" bIns="0" anchor="t">
+            <a:spAutoFit/>
+          </a:bodyPr>
+          <a:lstStyle/>
+          <a:p>
+            <a:pPr algn="l"/>
+            <a:r>
+              <a:rPr sz="2100" b="1" i="0" u="none">
+                <a:solidFill>
+                  <a:srgbClr val="E5E7EB"/>
+                </a:solidFill>
+                <a:latin typeface="Space Grotesk"/>
+              </a:rPr>
+              <a:t>Data-Driven Healthcare</a:t>
+            </a:r>
+          </a:p>
+        </p:txBody>
+      </p:sp>
+      <p:sp>
+        <p:nvSpPr>
+          <p:cNvPr id="5" name="TextBox 4"/>
+          <p:cNvSpPr txBox="1"/>
+          <p:nvPr/>
+        </p:nvSpPr>
+        <p:spPr>
+          <a:xfrm>
+            <a:off x="571500" y="2533650"/>
+            <a:ext cx="5238750" cy="914400"/>
+          </a:xfrm>
+          <a:prstGeom prst="rect">
+            <a:avLst/>
+          </a:prstGeom>
+          <a:noFill/>
+        </p:spPr>
+        <p:txBody>
+          <a:bodyPr wrap="square" lIns="0" tIns="0" rIns="0" bIns="0" anchor="t">
+            <a:spAutoFit/>
+          </a:bodyPr>
+          <a:lstStyle/>
+          <a:p>
+            <a:pPr algn="l">
+              <a:lnSpc>
+                <a:spcPts val="2400"/>
+              </a:lnSpc>
+            </a:pPr>
+            <a:r>
+              <a:rPr sz="1500" b="0" i="0" u="none">
+                <a:solidFill>
+                  <a:srgbClr val="9CA3AF"/>
+                </a:solidFill>
+                <a:latin typeface="Outfit"/>
+              </a:rPr>
+              <a:t>This initiative leverages a comprehensive dataset of Emergency Room records to identify critical bottlenecks in patient care and operational throughput.</a:t>
+            </a:r>
+          </a:p>
+        </p:txBody>
+      </p:sp>
+      <p:pic>
+        <p:nvPicPr>
+          <p:cNvPr id="6" name="Picture 5" descr="image.png"/>
+          <p:cNvPicPr>
+            <a:picLocks noChangeAspect="1"/>
+          </p:cNvPicPr>
+          <p:nvPr/>
+        </p:nvPicPr>
+        <p:blipFill>
+          <a:blip r:embed="rId4"/>
+          <a:stretch>
+            <a:fillRect/>
+          </a:stretch>
+        </p:blipFill>
+        <p:spPr>
+          <a:xfrm>
+            <a:off x="6391275" y="2076450"/>
+            <a:ext cx="5219700" cy="3790950"/>
+          </a:xfrm>
+          <a:prstGeom prst="rect">
+            <a:avLst/>
+          </a:prstGeom>
+        </p:spPr>
+      </p:pic>
+      <p:sp>
+        <p:nvSpPr>
+          <p:cNvPr id="7" name="TextBox 6"/>
+          <p:cNvSpPr txBox="1"/>
+          <p:nvPr/>
+        </p:nvSpPr>
+        <p:spPr>
+          <a:xfrm>
+            <a:off x="857250" y="3638550"/>
+            <a:ext cx="4953000" cy="609600"/>
+          </a:xfrm>
+          <a:prstGeom prst="rect">
+            <a:avLst/>
+          </a:prstGeom>
+          <a:noFill/>
+        </p:spPr>
+        <p:txBody>
+          <a:bodyPr wrap="square" lIns="0" tIns="0" rIns="0" bIns="0" anchor="t">
+            <a:spAutoFit/>
+          </a:bodyPr>
+          <a:lstStyle/>
+          <a:p>
+            <a:pPr algn="l">
+              <a:lnSpc>
+                <a:spcPts val="2400"/>
+              </a:lnSpc>
+            </a:pPr>
+            <a:r>
+              <a:rPr sz="1500" b="1" i="0" u="none">
+                <a:solidFill>
+                  <a:srgbClr val="9CA3AF"/>
+                </a:solidFill>
+                <a:latin typeface="Outfit"/>
+              </a:rPr>
+              <a:t>Dataset Scope:</a:t>
+            </a:r>
+            <a:r>
+              <a:rPr sz="1500" b="0" i="0" u="none">
+                <a:solidFill>
+                  <a:srgbClr val="9CA3AF"/>
+                </a:solidFill>
+                <a:latin typeface="Outfit"/>
+              </a:rPr>
+              <a:t> Analyzing 952 distinct patient interactions from 2023-2024.</a:t>
+            </a:r>
+          </a:p>
+        </p:txBody>
+      </p:sp>
+      <p:sp>
+        <p:nvSpPr>
+          <p:cNvPr id="8" name="TextBox 7"/>
+          <p:cNvSpPr txBox="1"/>
+          <p:nvPr/>
+        </p:nvSpPr>
+        <p:spPr>
+          <a:xfrm>
+            <a:off x="857250" y="4391025"/>
+            <a:ext cx="4953000" cy="609600"/>
+          </a:xfrm>
+          <a:prstGeom prst="rect">
+            <a:avLst/>
+          </a:prstGeom>
+          <a:noFill/>
+        </p:spPr>
+        <p:txBody>
+          <a:bodyPr wrap="square" lIns="0" tIns="0" rIns="0" bIns="0" anchor="t">
+            <a:spAutoFit/>
+          </a:bodyPr>
+          <a:lstStyle/>
+          <a:p>
+            <a:pPr algn="l">
+              <a:lnSpc>
+                <a:spcPts val="2400"/>
+              </a:lnSpc>
+            </a:pPr>
+            <a:r>
+              <a:rPr sz="1500" b="1" i="0" u="none">
+                <a:solidFill>
+                  <a:srgbClr val="9CA3AF"/>
+                </a:solidFill>
+                <a:latin typeface="Outfit"/>
+              </a:rPr>
+              <a:t>Dashboard Filtering:</a:t>
+            </a:r>
+            <a:r>
+              <a:rPr sz="1500" b="0" i="0" u="none">
+                <a:solidFill>
+                  <a:srgbClr val="9CA3AF"/>
+                </a:solidFill>
+                <a:latin typeface="Outfit"/>
+              </a:rPr>
+              <a:t> The current analytical view isolates </a:t>
+            </a:r>
+            <a:r>
+              <a:rPr sz="1500" b="1" i="0" u="none">
+                <a:solidFill>
+                  <a:srgbClr val="9CA3AF"/>
+                </a:solidFill>
+                <a:latin typeface="Outfit"/>
+              </a:rPr>
+              <a:t>479 specific records</a:t>
+            </a:r>
+            <a:r>
+              <a:rPr sz="1500" b="0" i="0" u="none">
+                <a:solidFill>
+                  <a:srgbClr val="9CA3AF"/>
+                </a:solidFill>
+                <a:latin typeface="Outfit"/>
+              </a:rPr>
+              <a:t> for targeted review.</a:t>
+            </a:r>
+          </a:p>
+        </p:txBody>
+      </p:sp>
+      <p:sp>
+        <p:nvSpPr>
+          <p:cNvPr id="9" name="TextBox 8"/>
+          <p:cNvSpPr txBox="1"/>
+          <p:nvPr/>
+        </p:nvSpPr>
+        <p:spPr>
+          <a:xfrm>
+            <a:off x="857250" y="5143500"/>
+            <a:ext cx="4953000" cy="609600"/>
+          </a:xfrm>
+          <a:prstGeom prst="rect">
+            <a:avLst/>
+          </a:prstGeom>
+          <a:noFill/>
+        </p:spPr>
+        <p:txBody>
+          <a:bodyPr wrap="square" lIns="0" tIns="0" rIns="0" bIns="0" anchor="t">
+            <a:spAutoFit/>
+          </a:bodyPr>
+          <a:lstStyle/>
+          <a:p>
+            <a:pPr algn="l">
+              <a:lnSpc>
+                <a:spcPts val="2400"/>
+              </a:lnSpc>
+            </a:pPr>
+            <a:r>
+              <a:rPr sz="1500" b="1" i="0" u="none">
+                <a:solidFill>
+                  <a:srgbClr val="9CA3AF"/>
+                </a:solidFill>
+                <a:latin typeface="Outfit"/>
+              </a:rPr>
+              <a:t>Primary Goal:</a:t>
+            </a:r>
+            <a:r>
+              <a:rPr sz="1500" b="0" i="0" u="none">
+                <a:solidFill>
+                  <a:srgbClr val="9CA3AF"/>
+                </a:solidFill>
+                <a:latin typeface="Outfit"/>
+              </a:rPr>
+              <a:t> Improve SLA compliance for wait times and elevate overall patient satisfaction scores.</a:t>
+            </a:r>
+          </a:p>
+        </p:txBody>
+      </p:sp>
+      <p:sp>
+        <p:nvSpPr>
+          <p:cNvPr id="10" name="TextBox 9"/>
+          <p:cNvSpPr txBox="1"/>
+          <p:nvPr/>
+        </p:nvSpPr>
+        <p:spPr>
+          <a:xfrm>
+            <a:off x="571500" y="3638550"/>
+            <a:ext cx="190500" cy="304800"/>
+          </a:xfrm>
+          <a:prstGeom prst="rect">
+            <a:avLst/>
+          </a:prstGeom>
+          <a:noFill/>
+        </p:spPr>
+        <p:txBody>
+          <a:bodyPr wrap="square" lIns="0" tIns="0" rIns="0" bIns="0" anchor="t">
+            <a:spAutoFit/>
+          </a:bodyPr>
+          <a:lstStyle/>
+          <a:p>
+            <a:pPr algn="l">
+              <a:lnSpc>
+                <a:spcPts val="2400"/>
+              </a:lnSpc>
+            </a:pPr>
+            <a:r>
+              <a:rPr sz="1500" b="1" i="0" u="none">
+                <a:solidFill>
+                  <a:srgbClr val="F59E0B"/>
+                </a:solidFill>
+                <a:latin typeface="Outfit"/>
+              </a:rPr>
+              <a:t>→</a:t>
+            </a:r>
+          </a:p>
+        </p:txBody>
+      </p:sp>
+      <p:sp>
+        <p:nvSpPr>
+          <p:cNvPr id="11" name="TextBox 10"/>
+          <p:cNvSpPr txBox="1"/>
+          <p:nvPr/>
+        </p:nvSpPr>
+        <p:spPr>
+          <a:xfrm>
+            <a:off x="571500" y="4391025"/>
+            <a:ext cx="190500" cy="304800"/>
+          </a:xfrm>
+          <a:prstGeom prst="rect">
+            <a:avLst/>
+          </a:prstGeom>
+          <a:noFill/>
+        </p:spPr>
+        <p:txBody>
+          <a:bodyPr wrap="square" lIns="0" tIns="0" rIns="0" bIns="0" anchor="t">
+            <a:spAutoFit/>
+          </a:bodyPr>
+          <a:lstStyle/>
+          <a:p>
+            <a:pPr algn="l">
+              <a:lnSpc>
+                <a:spcPts val="2400"/>
+              </a:lnSpc>
+            </a:pPr>
+            <a:r>
+              <a:rPr sz="1500" b="1" i="0" u="none">
+                <a:solidFill>
+                  <a:srgbClr val="F59E0B"/>
+                </a:solidFill>
+                <a:latin typeface="Outfit"/>
+              </a:rPr>
+              <a:t>→</a:t>
+            </a:r>
+          </a:p>
+        </p:txBody>
+      </p:sp>
+      <p:sp>
+        <p:nvSpPr>
+          <p:cNvPr id="12" name="TextBox 11"/>
+          <p:cNvSpPr txBox="1"/>
+          <p:nvPr/>
+        </p:nvSpPr>
+        <p:spPr>
+          <a:xfrm>
+            <a:off x="571500" y="5143500"/>
+            <a:ext cx="190500" cy="304800"/>
+          </a:xfrm>
+          <a:prstGeom prst="rect">
+            <a:avLst/>
+          </a:prstGeom>
+          <a:noFill/>
+        </p:spPr>
+        <p:txBody>
+          <a:bodyPr wrap="square" lIns="0" tIns="0" rIns="0" bIns="0" anchor="t">
+            <a:spAutoFit/>
+          </a:bodyPr>
+          <a:lstStyle/>
+          <a:p>
+            <a:pPr algn="l">
+              <a:lnSpc>
+                <a:spcPts val="2400"/>
+              </a:lnSpc>
+            </a:pPr>
+            <a:r>
+              <a:rPr sz="1500" b="1" i="0" u="none">
+                <a:solidFill>
+                  <a:srgbClr val="F59E0B"/>
+                </a:solidFill>
+                <a:latin typeface="Outfit"/>
+              </a:rPr>
+              <a:t>→</a:t>
+            </a:r>
+          </a:p>
+        </p:txBody>
+      </p:sp>
+      <p:sp>
+        <p:nvSpPr>
+          <p:cNvPr id="13" name="TextBox 12"/>
+          <p:cNvSpPr txBox="1"/>
+          <p:nvPr/>
+        </p:nvSpPr>
+        <p:spPr>
+          <a:xfrm>
+            <a:off x="571500" y="571500"/>
+            <a:ext cx="11601450" cy="561975"/>
+          </a:xfrm>
+          <a:prstGeom prst="rect">
+            <a:avLst/>
+          </a:prstGeom>
+          <a:noFill/>
+        </p:spPr>
+        <p:txBody>
+          <a:bodyPr wrap="square" lIns="0" tIns="0" rIns="0" bIns="0" anchor="t">
+            <a:spAutoFit/>
+          </a:bodyPr>
+          <a:lstStyle/>
+          <a:p>
+            <a:pPr algn="l"/>
+            <a:r>
+              <a:rPr sz="3450" b="1" i="0" u="none">
+                <a:solidFill>
+                  <a:srgbClr val="FFFFFF"/>
+                </a:solidFill>
+                <a:latin typeface="Space Grotesk"/>
+              </a:rPr>
+              <a:t>Initiative </a:t>
+            </a:r>
+            <a:r>
+              <a:rPr sz="3450" b="1" i="0" u="none">
+                <a:solidFill>
+                  <a:srgbClr val="38BDF8"/>
+                </a:solidFill>
+                <a:latin typeface="Space Grotesk"/>
+              </a:rPr>
+              <a:t>Background</a:t>
+            </a:r>
+          </a:p>
+        </p:txBody>
+      </p:sp>
+      <p:sp>
+        <p:nvSpPr>
+          <p:cNvPr id="14" name="Rectangle 13"/>
           <p:cNvSpPr/>
           <p:nvPr/>
         </p:nvSpPr>
         <p:spPr>
           <a:xfrm>
-            <a:off x="571500" y="3191916"/>
-            <a:ext cx="6905625" cy="784770"/>
-          </a:xfrm>
-          <a:prstGeom prst="rect">
-            <a:avLst/>
-          </a:prstGeom>
-          <a:noFill/>
+            <a:off x="571500" y="1266825"/>
+            <a:ext cx="11049000" cy="9525"/>
+          </a:xfrm>
+          <a:prstGeom prst="rect">
+            <a:avLst/>
+          </a:prstGeom>
+          <a:solidFill>
+            <a:srgbClr val="FFFFFF"/>
+          </a:solidFill>
           <a:ln>
             <a:noFill/>
           </a:ln>
@@ -4747,25 +5370,215 @@
           <a:lstStyle/>
           <a:p>
             <a:pPr algn="ctr"/>
-          </a:p>
-        </p:txBody>
-      </p:sp>
-      <p:sp>
-        <p:nvSpPr>
-          <p:cNvPr id="4" name="Rectangle 3"/>
+            <a:endParaRPr/>
+          </a:p>
+        </p:txBody>
+      </p:sp>
+    </p:spTree>
+  </p:cSld>
+  <p:clrMapOvr>
+    <a:masterClrMapping/>
+  </p:clrMapOvr>
+</p:sld>
+</file>
+
+<file path=ppt/slides/slide4.xml><?xml version="1.0" encoding="utf-8"?>
+<p:sld xmlns:a="http://schemas.openxmlformats.org/drawingml/2006/main" xmlns:r="http://schemas.openxmlformats.org/officeDocument/2006/relationships" xmlns:p="http://schemas.openxmlformats.org/presentationml/2006/main">
+  <p:cSld>
+    <p:spTree>
+      <p:nvGrpSpPr>
+        <p:cNvPr id="1" name=""/>
+        <p:cNvGrpSpPr/>
+        <p:nvPr/>
+      </p:nvGrpSpPr>
+      <p:grpSpPr>
+        <a:xfrm>
+          <a:off x="0" y="0"/>
+          <a:ext cx="0" cy="0"/>
+          <a:chOff x="0" y="0"/>
+          <a:chExt cx="0" cy="0"/>
+        </a:xfrm>
+      </p:grpSpPr>
+      <p:pic>
+        <p:nvPicPr>
+          <p:cNvPr id="2" name="Picture 1" descr="image.png"/>
+          <p:cNvPicPr>
+            <a:picLocks noChangeAspect="1"/>
+          </p:cNvPicPr>
+          <p:nvPr/>
+        </p:nvPicPr>
+        <p:blipFill>
+          <a:blip r:embed="rId2"/>
+          <a:stretch>
+            <a:fillRect/>
+          </a:stretch>
+        </p:blipFill>
+        <p:spPr>
+          <a:xfrm>
+            <a:off x="0" y="0"/>
+            <a:ext cx="12192000" cy="6858000"/>
+          </a:xfrm>
+          <a:prstGeom prst="rect">
+            <a:avLst/>
+          </a:prstGeom>
+        </p:spPr>
+      </p:pic>
+      <p:pic>
+        <p:nvPicPr>
+          <p:cNvPr id="3" name="Picture 2" descr="image.png"/>
+          <p:cNvPicPr>
+            <a:picLocks noChangeAspect="1"/>
+          </p:cNvPicPr>
+          <p:nvPr/>
+        </p:nvPicPr>
+        <p:blipFill>
+          <a:blip r:embed="rId3"/>
+          <a:stretch>
+            <a:fillRect/>
+          </a:stretch>
+        </p:blipFill>
+        <p:spPr>
+          <a:xfrm>
+            <a:off x="571500" y="1085850"/>
+            <a:ext cx="11049000" cy="4572000"/>
+          </a:xfrm>
+          <a:prstGeom prst="rect">
+            <a:avLst/>
+          </a:prstGeom>
+        </p:spPr>
+      </p:pic>
+      <p:sp>
+        <p:nvSpPr>
+          <p:cNvPr id="4" name="TextBox 3"/>
+          <p:cNvSpPr txBox="1"/>
+          <p:nvPr/>
+        </p:nvSpPr>
+        <p:spPr>
+          <a:xfrm>
+            <a:off x="1809750" y="5943600"/>
+            <a:ext cx="8572500" cy="914400"/>
+          </a:xfrm>
+          <a:prstGeom prst="rect">
+            <a:avLst/>
+          </a:prstGeom>
+          <a:noFill/>
+        </p:spPr>
+        <p:txBody>
+          <a:bodyPr wrap="square" lIns="0" tIns="0" rIns="0" bIns="0" anchor="t">
+            <a:spAutoFit/>
+          </a:bodyPr>
+          <a:lstStyle/>
+          <a:p>
+            <a:pPr algn="ctr">
+              <a:lnSpc>
+                <a:spcPts val="2400"/>
+              </a:lnSpc>
+            </a:pPr>
+            <a:r>
+              <a:rPr sz="1500" b="0" i="1" u="none">
+                <a:solidFill>
+                  <a:srgbClr val="9CA3AF"/>
+                </a:solidFill>
+                <a:latin typeface="Outfit"/>
+              </a:rPr>
+              <a:t>Fig 1.0: Master ER Dashboard.</a:t>
+            </a:r>
+            <a:r>
+              <a:rPr sz="1500" b="0" i="0" u="none">
+                <a:solidFill>
+                  <a:srgbClr val="9CA3AF"/>
+                </a:solidFill>
+                <a:latin typeface="Outfit"/>
+              </a:rPr>
+              <a:t> The interface aggregates key performance indicators, admission statuses, departmental referrals, and demographic distributions into a single, interactive pane of glass.</a:t>
+            </a:r>
+          </a:p>
+        </p:txBody>
+      </p:sp>
+      <p:pic>
+        <p:nvPicPr>
+          <p:cNvPr id="5" name="Picture 4" descr="image.png"/>
+          <p:cNvPicPr>
+            <a:picLocks noChangeAspect="1"/>
+          </p:cNvPicPr>
+          <p:nvPr/>
+        </p:nvPicPr>
+        <p:blipFill>
+          <a:blip r:embed="rId4"/>
+          <a:stretch>
+            <a:fillRect/>
+          </a:stretch>
+        </p:blipFill>
+        <p:spPr>
+          <a:xfrm>
+            <a:off x="97654" y="1247775"/>
+            <a:ext cx="11913833" cy="4248150"/>
+          </a:xfrm>
+          <a:prstGeom prst="rect">
+            <a:avLst/>
+          </a:prstGeom>
+        </p:spPr>
+      </p:pic>
+      <p:sp>
+        <p:nvSpPr>
+          <p:cNvPr id="6" name="TextBox 5"/>
+          <p:cNvSpPr txBox="1"/>
+          <p:nvPr/>
+        </p:nvSpPr>
+        <p:spPr>
+          <a:xfrm>
+            <a:off x="571500" y="0"/>
+            <a:ext cx="11601450" cy="561975"/>
+          </a:xfrm>
+          <a:prstGeom prst="rect">
+            <a:avLst/>
+          </a:prstGeom>
+          <a:noFill/>
+        </p:spPr>
+        <p:txBody>
+          <a:bodyPr wrap="square" lIns="0" tIns="0" rIns="0" bIns="0" anchor="t">
+            <a:spAutoFit/>
+          </a:bodyPr>
+          <a:lstStyle/>
+          <a:p>
+            <a:pPr algn="l"/>
+            <a:r>
+              <a:rPr sz="3450" b="1" i="0" u="none">
+                <a:solidFill>
+                  <a:srgbClr val="FFFFFF"/>
+                </a:solidFill>
+                <a:latin typeface="Space Grotesk"/>
+              </a:rPr>
+              <a:t>Executive </a:t>
+            </a:r>
+            <a:r>
+              <a:rPr sz="3450" b="1" i="0" u="none">
+                <a:solidFill>
+                  <a:srgbClr val="38BDF8"/>
+                </a:solidFill>
+                <a:latin typeface="Space Grotesk"/>
+              </a:rPr>
+              <a:t>Dashboard View</a:t>
+            </a:r>
+          </a:p>
+        </p:txBody>
+      </p:sp>
+      <p:sp>
+        <p:nvSpPr>
+          <p:cNvPr id="7" name="Rectangle 6"/>
           <p:cNvSpPr/>
           <p:nvPr/>
         </p:nvSpPr>
         <p:spPr>
           <a:xfrm>
-            <a:off x="571500" y="3967162"/>
-            <a:ext cx="6905625" cy="9525"/>
+            <a:off x="571500" y="695325"/>
+            <a:ext cx="11049000" cy="9525"/>
           </a:xfrm>
           <a:prstGeom prst="rect">
             <a:avLst/>
           </a:prstGeom>
           <a:solidFill>
-            <a:srgbClr val="757575"/>
+            <a:srgbClr val="FFFFFF"/>
           </a:solidFill>
           <a:ln>
             <a:noFill/>
@@ -4791,25 +5604,757 @@
           <a:lstStyle/>
           <a:p>
             <a:pPr algn="ctr"/>
-          </a:p>
-        </p:txBody>
-      </p:sp>
-      <p:sp>
-        <p:nvSpPr>
-          <p:cNvPr id="5" name="Rectangle 4"/>
+            <a:endParaRPr/>
+          </a:p>
+        </p:txBody>
+      </p:sp>
+    </p:spTree>
+  </p:cSld>
+  <p:clrMapOvr>
+    <a:masterClrMapping/>
+  </p:clrMapOvr>
+</p:sld>
+</file>
+
+<file path=ppt/slides/slide5.xml><?xml version="1.0" encoding="utf-8"?>
+<p:sld xmlns:a="http://schemas.openxmlformats.org/drawingml/2006/main" xmlns:r="http://schemas.openxmlformats.org/officeDocument/2006/relationships" xmlns:p="http://schemas.openxmlformats.org/presentationml/2006/main">
+  <p:cSld>
+    <p:spTree>
+      <p:nvGrpSpPr>
+        <p:cNvPr id="1" name=""/>
+        <p:cNvGrpSpPr/>
+        <p:nvPr/>
+      </p:nvGrpSpPr>
+      <p:grpSpPr>
+        <a:xfrm>
+          <a:off x="0" y="0"/>
+          <a:ext cx="0" cy="0"/>
+          <a:chOff x="0" y="0"/>
+          <a:chExt cx="0" cy="0"/>
+        </a:xfrm>
+      </p:grpSpPr>
+      <p:pic>
+        <p:nvPicPr>
+          <p:cNvPr id="2" name="Picture 1" descr="image.png"/>
+          <p:cNvPicPr>
+            <a:picLocks noChangeAspect="1"/>
+          </p:cNvPicPr>
+          <p:nvPr/>
+        </p:nvPicPr>
+        <p:blipFill>
+          <a:blip r:embed="rId2"/>
+          <a:stretch>
+            <a:fillRect/>
+          </a:stretch>
+        </p:blipFill>
+        <p:spPr>
+          <a:xfrm>
+            <a:off x="0" y="0"/>
+            <a:ext cx="12192000" cy="6858000"/>
+          </a:xfrm>
+          <a:prstGeom prst="rect">
+            <a:avLst/>
+          </a:prstGeom>
+        </p:spPr>
+      </p:pic>
+      <p:sp>
+        <p:nvSpPr>
+          <p:cNvPr id="3" name="TextBox 2"/>
+          <p:cNvSpPr txBox="1"/>
+          <p:nvPr/>
+        </p:nvSpPr>
+        <p:spPr>
+          <a:xfrm>
+            <a:off x="295275" y="2490787"/>
+            <a:ext cx="11601450" cy="971550"/>
+          </a:xfrm>
+          <a:prstGeom prst="rect">
+            <a:avLst/>
+          </a:prstGeom>
+          <a:noFill/>
+        </p:spPr>
+        <p:txBody>
+          <a:bodyPr wrap="square" lIns="0" tIns="0" rIns="0" bIns="0" anchor="t">
+            <a:spAutoFit/>
+          </a:bodyPr>
+          <a:lstStyle/>
+          <a:p>
+            <a:pPr algn="ctr"/>
+            <a:r>
+              <a:rPr sz="6000" b="1" i="0" u="none">
+                <a:solidFill>
+                  <a:srgbClr val="FFFFFF"/>
+                </a:solidFill>
+                <a:latin typeface="Space Grotesk"/>
+              </a:rPr>
+              <a:t>Core Performance Metrics</a:t>
+            </a:r>
+          </a:p>
+        </p:txBody>
+      </p:sp>
+      <p:sp>
+        <p:nvSpPr>
+          <p:cNvPr id="4" name="TextBox 3"/>
+          <p:cNvSpPr txBox="1"/>
+          <p:nvPr/>
+        </p:nvSpPr>
+        <p:spPr>
+          <a:xfrm>
+            <a:off x="571500" y="4062412"/>
+            <a:ext cx="11049000" cy="304800"/>
+          </a:xfrm>
+          <a:prstGeom prst="rect">
+            <a:avLst/>
+          </a:prstGeom>
+          <a:noFill/>
+        </p:spPr>
+        <p:txBody>
+          <a:bodyPr wrap="square" lIns="0" tIns="0" rIns="0" bIns="0" anchor="t">
+            <a:spAutoFit/>
+          </a:bodyPr>
+          <a:lstStyle/>
+          <a:p>
+            <a:pPr algn="ctr">
+              <a:lnSpc>
+                <a:spcPts val="2400"/>
+              </a:lnSpc>
+            </a:pPr>
+            <a:r>
+              <a:rPr sz="1500" b="0" i="0" u="none">
+                <a:solidFill>
+                  <a:srgbClr val="9CA3AF"/>
+                </a:solidFill>
+                <a:latin typeface="Outfit"/>
+              </a:rPr>
+              <a:t>Evaluating the top-level Key Performance Indicators (KPIs).</a:t>
+            </a:r>
+          </a:p>
+        </p:txBody>
+      </p:sp>
+    </p:spTree>
+  </p:cSld>
+  <p:clrMapOvr>
+    <a:masterClrMapping/>
+  </p:clrMapOvr>
+</p:sld>
+</file>
+
+<file path=ppt/slides/slide6.xml><?xml version="1.0" encoding="utf-8"?>
+<p:sld xmlns:a="http://schemas.openxmlformats.org/drawingml/2006/main" xmlns:r="http://schemas.openxmlformats.org/officeDocument/2006/relationships" xmlns:p="http://schemas.openxmlformats.org/presentationml/2006/main">
+  <p:cSld>
+    <p:spTree>
+      <p:nvGrpSpPr>
+        <p:cNvPr id="1" name=""/>
+        <p:cNvGrpSpPr/>
+        <p:nvPr/>
+      </p:nvGrpSpPr>
+      <p:grpSpPr>
+        <a:xfrm>
+          <a:off x="0" y="0"/>
+          <a:ext cx="0" cy="0"/>
+          <a:chOff x="0" y="0"/>
+          <a:chExt cx="0" cy="0"/>
+        </a:xfrm>
+      </p:grpSpPr>
+      <p:pic>
+        <p:nvPicPr>
+          <p:cNvPr id="2" name="Picture 1" descr="image.png"/>
+          <p:cNvPicPr>
+            <a:picLocks noChangeAspect="1"/>
+          </p:cNvPicPr>
+          <p:nvPr/>
+        </p:nvPicPr>
+        <p:blipFill>
+          <a:blip r:embed="rId2"/>
+          <a:stretch>
+            <a:fillRect/>
+          </a:stretch>
+        </p:blipFill>
+        <p:spPr>
+          <a:xfrm>
+            <a:off x="0" y="0"/>
+            <a:ext cx="12192000" cy="6858000"/>
+          </a:xfrm>
+          <a:prstGeom prst="rect">
+            <a:avLst/>
+          </a:prstGeom>
+        </p:spPr>
+      </p:pic>
+      <p:pic>
+        <p:nvPicPr>
+          <p:cNvPr id="3" name="Picture 2" descr="image.png"/>
+          <p:cNvPicPr>
+            <a:picLocks noChangeAspect="1"/>
+          </p:cNvPicPr>
+          <p:nvPr/>
+        </p:nvPicPr>
+        <p:blipFill>
+          <a:blip r:embed="rId3"/>
+          <a:stretch>
+            <a:fillRect/>
+          </a:stretch>
+        </p:blipFill>
+        <p:spPr>
+          <a:xfrm>
+            <a:off x="6381750" y="1576387"/>
+            <a:ext cx="5238750" cy="1438275"/>
+          </a:xfrm>
+          <a:prstGeom prst="rect">
+            <a:avLst/>
+          </a:prstGeom>
+        </p:spPr>
+      </p:pic>
+      <p:pic>
+        <p:nvPicPr>
+          <p:cNvPr id="4" name="Picture 3" descr="image.png"/>
+          <p:cNvPicPr>
+            <a:picLocks noChangeAspect="1"/>
+          </p:cNvPicPr>
+          <p:nvPr/>
+        </p:nvPicPr>
+        <p:blipFill>
+          <a:blip r:embed="rId4"/>
+          <a:stretch>
+            <a:fillRect/>
+          </a:stretch>
+        </p:blipFill>
+        <p:spPr>
+          <a:xfrm>
+            <a:off x="6381750" y="3252787"/>
+            <a:ext cx="5238750" cy="1438275"/>
+          </a:xfrm>
+          <a:prstGeom prst="rect">
+            <a:avLst/>
+          </a:prstGeom>
+        </p:spPr>
+      </p:pic>
+      <p:pic>
+        <p:nvPicPr>
+          <p:cNvPr id="5" name="Picture 4" descr="image.png"/>
+          <p:cNvPicPr>
+            <a:picLocks noChangeAspect="1"/>
+          </p:cNvPicPr>
+          <p:nvPr/>
+        </p:nvPicPr>
+        <p:blipFill>
+          <a:blip r:embed="rId5"/>
+          <a:stretch>
+            <a:fillRect/>
+          </a:stretch>
+        </p:blipFill>
+        <p:spPr>
+          <a:xfrm>
+            <a:off x="6381750" y="4929187"/>
+            <a:ext cx="5238750" cy="1438275"/>
+          </a:xfrm>
+          <a:prstGeom prst="rect">
+            <a:avLst/>
+          </a:prstGeom>
+        </p:spPr>
+      </p:pic>
+      <p:sp>
+        <p:nvSpPr>
+          <p:cNvPr id="6" name="TextBox 5"/>
+          <p:cNvSpPr txBox="1"/>
+          <p:nvPr/>
+        </p:nvSpPr>
+        <p:spPr>
+          <a:xfrm>
+            <a:off x="571500" y="1576387"/>
+            <a:ext cx="5500687" cy="342900"/>
+          </a:xfrm>
+          <a:prstGeom prst="rect">
+            <a:avLst/>
+          </a:prstGeom>
+          <a:noFill/>
+        </p:spPr>
+        <p:txBody>
+          <a:bodyPr wrap="square" lIns="0" tIns="0" rIns="0" bIns="0" anchor="t">
+            <a:spAutoFit/>
+          </a:bodyPr>
+          <a:lstStyle/>
+          <a:p>
+            <a:pPr algn="l"/>
+            <a:r>
+              <a:rPr sz="2100" b="1" i="0" u="none">
+                <a:solidFill>
+                  <a:srgbClr val="E5E7EB"/>
+                </a:solidFill>
+                <a:latin typeface="Space Grotesk"/>
+              </a:rPr>
+              <a:t>Operational Baselines</a:t>
+            </a:r>
+          </a:p>
+        </p:txBody>
+      </p:sp>
+      <p:sp>
+        <p:nvSpPr>
+          <p:cNvPr id="7" name="TextBox 6"/>
+          <p:cNvSpPr txBox="1"/>
+          <p:nvPr/>
+        </p:nvSpPr>
+        <p:spPr>
+          <a:xfrm>
+            <a:off x="571500" y="2062162"/>
+            <a:ext cx="5238750" cy="914400"/>
+          </a:xfrm>
+          <a:prstGeom prst="rect">
+            <a:avLst/>
+          </a:prstGeom>
+          <a:noFill/>
+        </p:spPr>
+        <p:txBody>
+          <a:bodyPr wrap="square" lIns="0" tIns="0" rIns="0" bIns="0" anchor="t">
+            <a:spAutoFit/>
+          </a:bodyPr>
+          <a:lstStyle/>
+          <a:p>
+            <a:pPr algn="l">
+              <a:lnSpc>
+                <a:spcPts val="2400"/>
+              </a:lnSpc>
+            </a:pPr>
+            <a:r>
+              <a:rPr sz="1500" b="0" i="0" u="none">
+                <a:solidFill>
+                  <a:srgbClr val="9CA3AF"/>
+                </a:solidFill>
+                <a:latin typeface="Outfit"/>
+              </a:rPr>
+              <a:t>The dashboard isolates three primary metrics that define the current state of our emergency room efficiency based on the filtered selection.</a:t>
+            </a:r>
+          </a:p>
+        </p:txBody>
+      </p:sp>
+      <p:sp>
+        <p:nvSpPr>
+          <p:cNvPr id="8" name="TextBox 7"/>
+          <p:cNvSpPr txBox="1"/>
+          <p:nvPr/>
+        </p:nvSpPr>
+        <p:spPr>
+          <a:xfrm>
+            <a:off x="571500" y="3167062"/>
+            <a:ext cx="5238750" cy="1524000"/>
+          </a:xfrm>
+          <a:prstGeom prst="rect">
+            <a:avLst/>
+          </a:prstGeom>
+          <a:noFill/>
+        </p:spPr>
+        <p:txBody>
+          <a:bodyPr wrap="square" lIns="0" tIns="0" rIns="0" bIns="0" anchor="t">
+            <a:spAutoFit/>
+          </a:bodyPr>
+          <a:lstStyle/>
+          <a:p>
+            <a:pPr algn="l">
+              <a:lnSpc>
+                <a:spcPts val="2400"/>
+              </a:lnSpc>
+            </a:pPr>
+            <a:r>
+              <a:rPr sz="1500" b="0" i="0" u="none">
+                <a:solidFill>
+                  <a:srgbClr val="9CA3AF"/>
+                </a:solidFill>
+                <a:latin typeface="Outfit"/>
+              </a:rPr>
+              <a:t>While patient volume remains steady, the </a:t>
+            </a:r>
+            <a:r>
+              <a:rPr sz="1500" b="1" i="0" u="none">
+                <a:solidFill>
+                  <a:srgbClr val="9CA3AF"/>
+                </a:solidFill>
+                <a:latin typeface="Outfit"/>
+              </a:rPr>
+              <a:t>Average Wait Time of nearly 35 minutes</a:t>
+            </a:r>
+            <a:r>
+              <a:rPr sz="1500" b="0" i="0" u="none">
+                <a:solidFill>
+                  <a:srgbClr val="9CA3AF"/>
+                </a:solidFill>
+                <a:latin typeface="Outfit"/>
+              </a:rPr>
+              <a:t> exceeds standard target SLAs. Furthermore, the </a:t>
+            </a:r>
+            <a:r>
+              <a:rPr sz="1500" b="1" i="0" u="none">
+                <a:solidFill>
+                  <a:srgbClr val="9CA3AF"/>
+                </a:solidFill>
+                <a:latin typeface="Outfit"/>
+              </a:rPr>
+              <a:t>Patient Satisfaction Score (5.30)</a:t>
+            </a:r>
+            <a:r>
+              <a:rPr sz="1500" b="0" i="0" u="none">
+                <a:solidFill>
+                  <a:srgbClr val="9CA3AF"/>
+                </a:solidFill>
+                <a:latin typeface="Outfit"/>
+              </a:rPr>
+              <a:t> indicates average-to-poor patient sentiment, directly correlating with extended wait times in the triage queue.</a:t>
+            </a:r>
+          </a:p>
+        </p:txBody>
+      </p:sp>
+      <p:pic>
+        <p:nvPicPr>
+          <p:cNvPr id="9" name="Picture 8" descr="image.png"/>
+          <p:cNvPicPr>
+            <a:picLocks noChangeAspect="1"/>
+          </p:cNvPicPr>
+          <p:nvPr/>
+        </p:nvPicPr>
+        <p:blipFill>
+          <a:blip r:embed="rId6"/>
+          <a:stretch>
+            <a:fillRect/>
+          </a:stretch>
+        </p:blipFill>
+        <p:spPr>
+          <a:xfrm>
+            <a:off x="10753725" y="2066925"/>
+            <a:ext cx="571500" cy="457200"/>
+          </a:xfrm>
+          <a:prstGeom prst="rect">
+            <a:avLst/>
+          </a:prstGeom>
+        </p:spPr>
+      </p:pic>
+      <p:pic>
+        <p:nvPicPr>
+          <p:cNvPr id="10" name="Picture 9" descr="image.png"/>
+          <p:cNvPicPr>
+            <a:picLocks noChangeAspect="1"/>
+          </p:cNvPicPr>
+          <p:nvPr/>
+        </p:nvPicPr>
+        <p:blipFill>
+          <a:blip r:embed="rId7"/>
+          <a:stretch>
+            <a:fillRect/>
+          </a:stretch>
+        </p:blipFill>
+        <p:spPr>
+          <a:xfrm>
+            <a:off x="10982325" y="3743325"/>
+            <a:ext cx="342900" cy="457200"/>
+          </a:xfrm>
+          <a:prstGeom prst="rect">
+            <a:avLst/>
+          </a:prstGeom>
+        </p:spPr>
+      </p:pic>
+      <p:pic>
+        <p:nvPicPr>
+          <p:cNvPr id="11" name="Picture 10" descr="image.png"/>
+          <p:cNvPicPr>
+            <a:picLocks noChangeAspect="1"/>
+          </p:cNvPicPr>
+          <p:nvPr/>
+        </p:nvPicPr>
+        <p:blipFill>
+          <a:blip r:embed="rId8"/>
+          <a:stretch>
+            <a:fillRect/>
+          </a:stretch>
+        </p:blipFill>
+        <p:spPr>
+          <a:xfrm>
+            <a:off x="10810875" y="5419725"/>
+            <a:ext cx="514350" cy="457200"/>
+          </a:xfrm>
+          <a:prstGeom prst="rect">
+            <a:avLst/>
+          </a:prstGeom>
+        </p:spPr>
+      </p:pic>
+      <p:sp>
+        <p:nvSpPr>
+          <p:cNvPr id="12" name="TextBox 11"/>
+          <p:cNvSpPr txBox="1"/>
+          <p:nvPr/>
+        </p:nvSpPr>
+        <p:spPr>
+          <a:xfrm>
+            <a:off x="6705600" y="1871662"/>
+            <a:ext cx="1452562" cy="609600"/>
+          </a:xfrm>
+          <a:prstGeom prst="rect">
+            <a:avLst/>
+          </a:prstGeom>
+          <a:noFill/>
+        </p:spPr>
+        <p:txBody>
+          <a:bodyPr wrap="square" lIns="0" tIns="0" rIns="0" bIns="0" anchor="t">
+            <a:spAutoFit/>
+          </a:bodyPr>
+          <a:lstStyle/>
+          <a:p>
+            <a:pPr algn="l">
+              <a:lnSpc>
+                <a:spcPts val="4800"/>
+              </a:lnSpc>
+            </a:pPr>
+            <a:r>
+              <a:rPr sz="4800" b="1" i="0" u="none">
+                <a:solidFill>
+                  <a:srgbClr val="FFFFFF"/>
+                </a:solidFill>
+                <a:latin typeface="Space Grotesk"/>
+              </a:rPr>
+              <a:t>479</a:t>
+            </a:r>
+          </a:p>
+        </p:txBody>
+      </p:sp>
+      <p:sp>
+        <p:nvSpPr>
+          <p:cNvPr id="13" name="TextBox 12"/>
+          <p:cNvSpPr txBox="1"/>
+          <p:nvPr/>
+        </p:nvSpPr>
+        <p:spPr>
+          <a:xfrm>
+            <a:off x="6705600" y="2528887"/>
+            <a:ext cx="1452562" cy="190500"/>
+          </a:xfrm>
+          <a:prstGeom prst="rect">
+            <a:avLst/>
+          </a:prstGeom>
+          <a:noFill/>
+        </p:spPr>
+        <p:txBody>
+          <a:bodyPr wrap="square" lIns="0" tIns="0" rIns="0" bIns="0" anchor="t">
+            <a:spAutoFit/>
+          </a:bodyPr>
+          <a:lstStyle/>
+          <a:p>
+            <a:pPr algn="l"/>
+            <a:r>
+              <a:rPr sz="1200" b="0" i="0" u="none">
+                <a:solidFill>
+                  <a:srgbClr val="9CA3AF"/>
+                </a:solidFill>
+                <a:latin typeface="Outfit SemiBold"/>
+              </a:rPr>
+              <a:t>NO. OF PATIENTS</a:t>
+            </a:r>
+          </a:p>
+        </p:txBody>
+      </p:sp>
+      <p:sp>
+        <p:nvSpPr>
+          <p:cNvPr id="14" name="TextBox 13"/>
+          <p:cNvSpPr txBox="1"/>
+          <p:nvPr/>
+        </p:nvSpPr>
+        <p:spPr>
+          <a:xfrm>
+            <a:off x="6705600" y="3548062"/>
+            <a:ext cx="1838325" cy="609600"/>
+          </a:xfrm>
+          <a:prstGeom prst="rect">
+            <a:avLst/>
+          </a:prstGeom>
+          <a:noFill/>
+        </p:spPr>
+        <p:txBody>
+          <a:bodyPr wrap="square" lIns="0" tIns="0" rIns="0" bIns="0" anchor="t">
+            <a:spAutoFit/>
+          </a:bodyPr>
+          <a:lstStyle/>
+          <a:p>
+            <a:pPr algn="l">
+              <a:lnSpc>
+                <a:spcPts val="4800"/>
+              </a:lnSpc>
+            </a:pPr>
+            <a:r>
+              <a:rPr sz="4800" b="1" i="0" u="none">
+                <a:solidFill>
+                  <a:srgbClr val="FFFFFF"/>
+                </a:solidFill>
+                <a:latin typeface="Space Grotesk"/>
+              </a:rPr>
+              <a:t>34.90</a:t>
+            </a:r>
+          </a:p>
+        </p:txBody>
+      </p:sp>
+      <p:sp>
+        <p:nvSpPr>
+          <p:cNvPr id="15" name="TextBox 14"/>
+          <p:cNvSpPr txBox="1"/>
+          <p:nvPr/>
+        </p:nvSpPr>
+        <p:spPr>
+          <a:xfrm>
+            <a:off x="6705600" y="4205287"/>
+            <a:ext cx="1838325" cy="190500"/>
+          </a:xfrm>
+          <a:prstGeom prst="rect">
+            <a:avLst/>
+          </a:prstGeom>
+          <a:noFill/>
+        </p:spPr>
+        <p:txBody>
+          <a:bodyPr wrap="square" lIns="0" tIns="0" rIns="0" bIns="0" anchor="t">
+            <a:spAutoFit/>
+          </a:bodyPr>
+          <a:lstStyle/>
+          <a:p>
+            <a:pPr algn="l"/>
+            <a:r>
+              <a:rPr sz="1200" b="0" i="0" u="none">
+                <a:solidFill>
+                  <a:srgbClr val="9CA3AF"/>
+                </a:solidFill>
+                <a:latin typeface="Outfit SemiBold"/>
+              </a:rPr>
+              <a:t>AVG. WAIT TIME (MIN)</a:t>
+            </a:r>
+          </a:p>
+        </p:txBody>
+      </p:sp>
+      <p:sp>
+        <p:nvSpPr>
+          <p:cNvPr id="16" name="TextBox 15"/>
+          <p:cNvSpPr txBox="1"/>
+          <p:nvPr/>
+        </p:nvSpPr>
+        <p:spPr>
+          <a:xfrm>
+            <a:off x="6705600" y="5224462"/>
+            <a:ext cx="2600325" cy="609600"/>
+          </a:xfrm>
+          <a:prstGeom prst="rect">
+            <a:avLst/>
+          </a:prstGeom>
+          <a:noFill/>
+        </p:spPr>
+        <p:txBody>
+          <a:bodyPr wrap="square" lIns="0" tIns="0" rIns="0" bIns="0" anchor="t">
+            <a:spAutoFit/>
+          </a:bodyPr>
+          <a:lstStyle/>
+          <a:p>
+            <a:pPr algn="l">
+              <a:lnSpc>
+                <a:spcPts val="4800"/>
+              </a:lnSpc>
+            </a:pPr>
+            <a:r>
+              <a:rPr sz="4800" b="1" i="0" u="none">
+                <a:solidFill>
+                  <a:srgbClr val="FFFFFF"/>
+                </a:solidFill>
+                <a:latin typeface="Space Grotesk"/>
+              </a:rPr>
+              <a:t>5.30</a:t>
+            </a:r>
+          </a:p>
+        </p:txBody>
+      </p:sp>
+      <p:sp>
+        <p:nvSpPr>
+          <p:cNvPr id="17" name="TextBox 16"/>
+          <p:cNvSpPr txBox="1"/>
+          <p:nvPr/>
+        </p:nvSpPr>
+        <p:spPr>
+          <a:xfrm>
+            <a:off x="6705600" y="5881687"/>
+            <a:ext cx="2600325" cy="190500"/>
+          </a:xfrm>
+          <a:prstGeom prst="rect">
+            <a:avLst/>
+          </a:prstGeom>
+          <a:noFill/>
+        </p:spPr>
+        <p:txBody>
+          <a:bodyPr wrap="square" lIns="0" tIns="0" rIns="0" bIns="0" anchor="t">
+            <a:spAutoFit/>
+          </a:bodyPr>
+          <a:lstStyle/>
+          <a:p>
+            <a:pPr algn="l"/>
+            <a:r>
+              <a:rPr sz="1200" b="0" i="0" u="none">
+                <a:solidFill>
+                  <a:srgbClr val="9CA3AF"/>
+                </a:solidFill>
+                <a:latin typeface="Outfit SemiBold"/>
+              </a:rPr>
+              <a:t>PATIENT SATISFACTION SCORE</a:t>
+            </a:r>
+          </a:p>
+        </p:txBody>
+      </p:sp>
+      <p:sp>
+        <p:nvSpPr>
+          <p:cNvPr id="18" name="TextBox 17"/>
+          <p:cNvSpPr txBox="1"/>
+          <p:nvPr/>
+        </p:nvSpPr>
+        <p:spPr>
+          <a:xfrm>
+            <a:off x="571500" y="490537"/>
+            <a:ext cx="11601450" cy="561975"/>
+          </a:xfrm>
+          <a:prstGeom prst="rect">
+            <a:avLst/>
+          </a:prstGeom>
+          <a:noFill/>
+        </p:spPr>
+        <p:txBody>
+          <a:bodyPr wrap="square" lIns="0" tIns="0" rIns="0" bIns="0" anchor="t">
+            <a:spAutoFit/>
+          </a:bodyPr>
+          <a:lstStyle/>
+          <a:p>
+            <a:pPr algn="l"/>
+            <a:r>
+              <a:rPr sz="3450" b="1" i="0" u="none">
+                <a:solidFill>
+                  <a:srgbClr val="FFFFFF"/>
+                </a:solidFill>
+                <a:latin typeface="Space Grotesk"/>
+              </a:rPr>
+              <a:t>Top-Level </a:t>
+            </a:r>
+            <a:r>
+              <a:rPr sz="3450" b="1" i="0" u="none">
+                <a:solidFill>
+                  <a:srgbClr val="38BDF8"/>
+                </a:solidFill>
+                <a:latin typeface="Space Grotesk"/>
+              </a:rPr>
+              <a:t>KPI Summary</a:t>
+            </a:r>
+          </a:p>
+        </p:txBody>
+      </p:sp>
+      <p:sp>
+        <p:nvSpPr>
+          <p:cNvPr id="19" name="Rectangle 18"/>
           <p:cNvSpPr/>
           <p:nvPr/>
         </p:nvSpPr>
         <p:spPr>
           <a:xfrm>
-            <a:off x="571500" y="3967162"/>
-            <a:ext cx="6905625" cy="9525"/>
+            <a:off x="571500" y="1185862"/>
+            <a:ext cx="11049000" cy="9525"/>
           </a:xfrm>
           <a:prstGeom prst="rect">
             <a:avLst/>
           </a:prstGeom>
           <a:solidFill>
-            <a:srgbClr val="757575"/>
+            <a:srgbClr val="FFFFFF"/>
           </a:solidFill>
           <a:ln>
             <a:noFill/>
@@ -4835,12 +6380,185 @@
           <a:lstStyle/>
           <a:p>
             <a:pPr algn="ctr"/>
-          </a:p>
-        </p:txBody>
-      </p:sp>
+            <a:endParaRPr/>
+          </a:p>
+        </p:txBody>
+      </p:sp>
+    </p:spTree>
+  </p:cSld>
+  <p:clrMapOvr>
+    <a:masterClrMapping/>
+  </p:clrMapOvr>
+</p:sld>
+</file>
+
+<file path=ppt/slides/slide7.xml><?xml version="1.0" encoding="utf-8"?>
+<p:sld xmlns:a="http://schemas.openxmlformats.org/drawingml/2006/main" xmlns:r="http://schemas.openxmlformats.org/officeDocument/2006/relationships" xmlns:p="http://schemas.openxmlformats.org/presentationml/2006/main">
+  <p:cSld>
+    <p:spTree>
+      <p:nvGrpSpPr>
+        <p:cNvPr id="1" name=""/>
+        <p:cNvGrpSpPr/>
+        <p:nvPr/>
+      </p:nvGrpSpPr>
+      <p:grpSpPr>
+        <a:xfrm>
+          <a:off x="0" y="0"/>
+          <a:ext cx="0" cy="0"/>
+          <a:chOff x="0" y="0"/>
+          <a:chExt cx="0" cy="0"/>
+        </a:xfrm>
+      </p:grpSpPr>
       <p:pic>
         <p:nvPicPr>
-          <p:cNvPr id="6" name="Picture 5" descr="image.png"/>
+          <p:cNvPr id="2" name="Picture 1" descr="image.png"/>
+          <p:cNvPicPr>
+            <a:picLocks noChangeAspect="1"/>
+          </p:cNvPicPr>
+          <p:nvPr/>
+        </p:nvPicPr>
+        <p:blipFill>
+          <a:blip r:embed="rId2"/>
+          <a:stretch>
+            <a:fillRect/>
+          </a:stretch>
+        </p:blipFill>
+        <p:spPr>
+          <a:xfrm>
+            <a:off x="0" y="0"/>
+            <a:ext cx="12192000" cy="6858000"/>
+          </a:xfrm>
+          <a:prstGeom prst="rect">
+            <a:avLst/>
+          </a:prstGeom>
+        </p:spPr>
+      </p:pic>
+      <p:sp>
+        <p:nvSpPr>
+          <p:cNvPr id="3" name="TextBox 2"/>
+          <p:cNvSpPr txBox="1"/>
+          <p:nvPr/>
+        </p:nvSpPr>
+        <p:spPr>
+          <a:xfrm>
+            <a:off x="295275" y="2490787"/>
+            <a:ext cx="11601450" cy="971550"/>
+          </a:xfrm>
+          <a:prstGeom prst="rect">
+            <a:avLst/>
+          </a:prstGeom>
+          <a:noFill/>
+        </p:spPr>
+        <p:txBody>
+          <a:bodyPr wrap="square" lIns="0" tIns="0" rIns="0" bIns="0" anchor="t">
+            <a:spAutoFit/>
+          </a:bodyPr>
+          <a:lstStyle/>
+          <a:p>
+            <a:pPr algn="ctr"/>
+            <a:r>
+              <a:rPr sz="6000" b="1" i="0" u="none">
+                <a:solidFill>
+                  <a:srgbClr val="FFFFFF"/>
+                </a:solidFill>
+                <a:latin typeface="Space Grotesk"/>
+              </a:rPr>
+              <a:t>Patient Flow &amp; Efficiency</a:t>
+            </a:r>
+          </a:p>
+        </p:txBody>
+      </p:sp>
+      <p:sp>
+        <p:nvSpPr>
+          <p:cNvPr id="4" name="TextBox 3"/>
+          <p:cNvSpPr txBox="1"/>
+          <p:nvPr/>
+        </p:nvSpPr>
+        <p:spPr>
+          <a:xfrm>
+            <a:off x="571500" y="4062412"/>
+            <a:ext cx="11049000" cy="304800"/>
+          </a:xfrm>
+          <a:prstGeom prst="rect">
+            <a:avLst/>
+          </a:prstGeom>
+          <a:noFill/>
+        </p:spPr>
+        <p:txBody>
+          <a:bodyPr wrap="square" lIns="0" tIns="0" rIns="0" bIns="0" anchor="t">
+            <a:spAutoFit/>
+          </a:bodyPr>
+          <a:lstStyle/>
+          <a:p>
+            <a:pPr algn="ctr">
+              <a:lnSpc>
+                <a:spcPts val="2400"/>
+              </a:lnSpc>
+            </a:pPr>
+            <a:r>
+              <a:rPr sz="1500" b="0" i="0" u="none">
+                <a:solidFill>
+                  <a:srgbClr val="9CA3AF"/>
+                </a:solidFill>
+                <a:latin typeface="Outfit"/>
+              </a:rPr>
+              <a:t>Analyzing SLA compliance, attendance status, and hospital admission rates.</a:t>
+            </a:r>
+          </a:p>
+        </p:txBody>
+      </p:sp>
+    </p:spTree>
+  </p:cSld>
+  <p:clrMapOvr>
+    <a:masterClrMapping/>
+  </p:clrMapOvr>
+</p:sld>
+</file>
+
+<file path=ppt/slides/slide8.xml><?xml version="1.0" encoding="utf-8"?>
+<p:sld xmlns:a="http://schemas.openxmlformats.org/drawingml/2006/main" xmlns:r="http://schemas.openxmlformats.org/officeDocument/2006/relationships" xmlns:p="http://schemas.openxmlformats.org/presentationml/2006/main">
+  <p:cSld>
+    <p:spTree>
+      <p:nvGrpSpPr>
+        <p:cNvPr id="1" name=""/>
+        <p:cNvGrpSpPr/>
+        <p:nvPr/>
+      </p:nvGrpSpPr>
+      <p:grpSpPr>
+        <a:xfrm>
+          <a:off x="0" y="0"/>
+          <a:ext cx="0" cy="0"/>
+          <a:chOff x="0" y="0"/>
+          <a:chExt cx="0" cy="0"/>
+        </a:xfrm>
+      </p:grpSpPr>
+      <p:pic>
+        <p:nvPicPr>
+          <p:cNvPr id="2" name="Picture 1" descr="image.png"/>
+          <p:cNvPicPr>
+            <a:picLocks noChangeAspect="1"/>
+          </p:cNvPicPr>
+          <p:nvPr/>
+        </p:nvPicPr>
+        <p:blipFill>
+          <a:blip r:embed="rId2"/>
+          <a:stretch>
+            <a:fillRect/>
+          </a:stretch>
+        </p:blipFill>
+        <p:spPr>
+          <a:xfrm>
+            <a:off x="0" y="0"/>
+            <a:ext cx="12192000" cy="6858000"/>
+          </a:xfrm>
+          <a:prstGeom prst="rect">
+            <a:avLst/>
+          </a:prstGeom>
+        </p:spPr>
+      </p:pic>
+      <p:pic>
+        <p:nvPicPr>
+          <p:cNvPr id="3" name="Picture 2" descr="image.png"/>
           <p:cNvPicPr>
             <a:picLocks noChangeAspect="1"/>
           </p:cNvPicPr>
@@ -4854,14 +6572,145 @@
         </p:blipFill>
         <p:spPr>
           <a:xfrm>
-            <a:off x="571500" y="3341340"/>
-            <a:ext cx="857250" cy="476250"/>
+            <a:off x="571500" y="2124075"/>
+            <a:ext cx="11049000" cy="3695700"/>
           </a:xfrm>
           <a:prstGeom prst="rect">
             <a:avLst/>
           </a:prstGeom>
         </p:spPr>
       </p:pic>
+      <p:sp>
+        <p:nvSpPr>
+          <p:cNvPr id="4" name="TextBox 3"/>
+          <p:cNvSpPr txBox="1"/>
+          <p:nvPr/>
+        </p:nvSpPr>
+        <p:spPr>
+          <a:xfrm>
+            <a:off x="6381750" y="2719387"/>
+            <a:ext cx="5500687" cy="342900"/>
+          </a:xfrm>
+          <a:prstGeom prst="rect">
+            <a:avLst/>
+          </a:prstGeom>
+          <a:noFill/>
+        </p:spPr>
+        <p:txBody>
+          <a:bodyPr wrap="square" lIns="0" tIns="0" rIns="0" bIns="0" anchor="t">
+            <a:spAutoFit/>
+          </a:bodyPr>
+          <a:lstStyle/>
+          <a:p>
+            <a:pPr algn="l"/>
+            <a:r>
+              <a:rPr sz="2100" b="1" i="0" u="none">
+                <a:solidFill>
+                  <a:srgbClr val="E5E7EB"/>
+                </a:solidFill>
+                <a:latin typeface="Space Grotesk"/>
+              </a:rPr>
+              <a:t>Critical SLA Breach Identified</a:t>
+            </a:r>
+          </a:p>
+        </p:txBody>
+      </p:sp>
+      <p:sp>
+        <p:nvSpPr>
+          <p:cNvPr id="5" name="TextBox 4"/>
+          <p:cNvSpPr txBox="1"/>
+          <p:nvPr/>
+        </p:nvSpPr>
+        <p:spPr>
+          <a:xfrm>
+            <a:off x="6381750" y="3205162"/>
+            <a:ext cx="5238750" cy="914400"/>
+          </a:xfrm>
+          <a:prstGeom prst="rect">
+            <a:avLst/>
+          </a:prstGeom>
+          <a:noFill/>
+        </p:spPr>
+        <p:txBody>
+          <a:bodyPr wrap="square" lIns="0" tIns="0" rIns="0" bIns="0" anchor="t">
+            <a:spAutoFit/>
+          </a:bodyPr>
+          <a:lstStyle/>
+          <a:p>
+            <a:pPr algn="l">
+              <a:lnSpc>
+                <a:spcPts val="2400"/>
+              </a:lnSpc>
+            </a:pPr>
+            <a:r>
+              <a:rPr sz="1500" b="0" i="0" u="none">
+                <a:solidFill>
+                  <a:srgbClr val="9CA3AF"/>
+                </a:solidFill>
+                <a:latin typeface="Outfit"/>
+              </a:rPr>
+              <a:t>The visual analysis reveals a significant operational bottleneck: </a:t>
+            </a:r>
+            <a:r>
+              <a:rPr sz="1500" b="1" i="0" u="none">
+                <a:solidFill>
+                  <a:srgbClr val="9CA3AF"/>
+                </a:solidFill>
+                <a:latin typeface="Outfit"/>
+              </a:rPr>
+              <a:t>57% of all patients (273 individuals) experienced a delay</a:t>
+            </a:r>
+            <a:r>
+              <a:rPr sz="1500" b="0" i="0" u="none">
+                <a:solidFill>
+                  <a:srgbClr val="9CA3AF"/>
+                </a:solidFill>
+                <a:latin typeface="Outfit"/>
+              </a:rPr>
+              <a:t>, failing to meet the required triage time standards.</a:t>
+            </a:r>
+          </a:p>
+        </p:txBody>
+      </p:sp>
+      <p:sp>
+        <p:nvSpPr>
+          <p:cNvPr id="6" name="TextBox 5"/>
+          <p:cNvSpPr txBox="1"/>
+          <p:nvPr/>
+        </p:nvSpPr>
+        <p:spPr>
+          <a:xfrm>
+            <a:off x="6381750" y="4310062"/>
+            <a:ext cx="5238750" cy="914400"/>
+          </a:xfrm>
+          <a:prstGeom prst="rect">
+            <a:avLst/>
+          </a:prstGeom>
+          <a:noFill/>
+        </p:spPr>
+        <p:txBody>
+          <a:bodyPr wrap="square" lIns="0" tIns="0" rIns="0" bIns="0" anchor="t">
+            <a:spAutoFit/>
+          </a:bodyPr>
+          <a:lstStyle/>
+          <a:p>
+            <a:pPr algn="l">
+              <a:lnSpc>
+                <a:spcPts val="2400"/>
+              </a:lnSpc>
+            </a:pPr>
+            <a:r>
+              <a:rPr sz="1500" b="0" i="0" u="none">
+                <a:solidFill>
+                  <a:srgbClr val="9CA3AF"/>
+                </a:solidFill>
+                <a:latin typeface="Outfit"/>
+              </a:rPr>
+              <a:t>This high volume of delayed care is the primary driver behind the low Patient Satisfaction score observed in the KPI overview. Restructuring the initial intake process is paramount.</a:t>
+            </a:r>
+          </a:p>
+        </p:txBody>
+      </p:sp>
       <p:sp>
         <p:nvSpPr>
           <p:cNvPr id="7" name="TextBox 6"/>
@@ -4870,8 +6719,8 @@
         </p:nvSpPr>
         <p:spPr>
           <a:xfrm>
-            <a:off x="1666875" y="3334791"/>
-            <a:ext cx="5810250" cy="198090"/>
+            <a:off x="571500" y="571500"/>
+            <a:ext cx="11601450" cy="561975"/>
           </a:xfrm>
           <a:prstGeom prst="rect">
             <a:avLst/>
@@ -4879,225 +6728,36 @@
           <a:noFill/>
         </p:spPr>
         <p:txBody>
-          <a:bodyPr wrap="square" lIns="0" rIns="0" tIns="0" bIns="0" anchor="t">
+          <a:bodyPr wrap="square" lIns="0" tIns="0" rIns="0" bIns="0" anchor="t">
             <a:spAutoFit/>
           </a:bodyPr>
           <a:lstStyle/>
           <a:p>
-            <a:pPr algn="l">
-              <a:lnSpc>
-                <a:spcPts val="1560"/>
-              </a:lnSpc>
-            </a:pPr>
-            <a:r>
-              <a:rPr b="0" sz="975" i="0" u="none">
-                <a:solidFill>
-                  <a:srgbClr val="9CA3AF"/>
-                </a:solidFill>
-                <a:latin typeface="Outfit"/>
-              </a:rPr>
-              <a:t>https://t3.ftcdn.net/jpg/08/94/34/96/360_F_894349605_Wq3g7yT6N5wWvSgIe7kHwPZJq0n0kXjE.jpg</a:t>
-            </a:r>
-          </a:p>
-        </p:txBody>
-      </p:sp>
-      <p:sp>
-        <p:nvSpPr>
-          <p:cNvPr id="8" name="TextBox 7"/>
-          <p:cNvSpPr txBox="1"/>
-          <p:nvPr/>
-        </p:nvSpPr>
-        <p:spPr>
-          <a:xfrm>
-            <a:off x="1666875" y="3580507"/>
-            <a:ext cx="5810250" cy="243780"/>
-          </a:xfrm>
-          <a:prstGeom prst="rect">
-            <a:avLst/>
-          </a:prstGeom>
-          <a:noFill/>
-        </p:spPr>
-        <p:txBody>
-          <a:bodyPr wrap="square" lIns="0" rIns="0" tIns="0" bIns="0" anchor="t">
-            <a:spAutoFit/>
-          </a:bodyPr>
-          <a:lstStyle/>
-          <a:p>
-            <a:pPr algn="l">
-              <a:lnSpc>
-                <a:spcPts val="1920"/>
-              </a:lnSpc>
-            </a:pPr>
-            <a:r>
-              <a:rPr b="0" sz="1200" i="0" u="none">
-                <a:solidFill>
-                  <a:srgbClr val="9CA3AF"/>
-                </a:solidFill>
-                <a:latin typeface="Outfit"/>
-              </a:rPr>
-              <a:t>Source: </a:t>
-            </a:r>
-            <a:r>
-              <a:rPr b="0" sz="1200" i="0" u="none">
-                <a:solidFill>
-                  <a:srgbClr val="4F46E5"/>
-                </a:solidFill>
-                <a:latin typeface="Outfit"/>
-              </a:rPr>
-              <a:t>stock.adobe.com</a:t>
-            </a:r>
-          </a:p>
-        </p:txBody>
-      </p:sp>
-      <p:pic>
-        <p:nvPicPr>
-          <p:cNvPr id="9" name="Picture 8" descr="image.png"/>
-          <p:cNvPicPr>
-            <a:picLocks noChangeAspect="1"/>
-          </p:cNvPicPr>
-          <p:nvPr/>
-        </p:nvPicPr>
-        <p:blipFill>
-          <a:blip r:embed="rId3"/>
-          <a:stretch>
-            <a:fillRect/>
-          </a:stretch>
-        </p:blipFill>
-        <p:spPr>
-          <a:xfrm>
-            <a:off x="571500" y="4126110"/>
-            <a:ext cx="857250" cy="476250"/>
-          </a:xfrm>
-          <a:prstGeom prst="rect">
-            <a:avLst/>
-          </a:prstGeom>
-        </p:spPr>
-      </p:pic>
-      <p:sp>
-        <p:nvSpPr>
-          <p:cNvPr id="10" name="TextBox 9"/>
-          <p:cNvSpPr txBox="1"/>
-          <p:nvPr/>
-        </p:nvSpPr>
-        <p:spPr>
-          <a:xfrm>
-            <a:off x="1666875" y="4119562"/>
-            <a:ext cx="5810250" cy="198090"/>
-          </a:xfrm>
-          <a:prstGeom prst="rect">
-            <a:avLst/>
-          </a:prstGeom>
-          <a:noFill/>
-        </p:spPr>
-        <p:txBody>
-          <a:bodyPr wrap="square" lIns="0" rIns="0" tIns="0" bIns="0" anchor="t">
-            <a:spAutoFit/>
-          </a:bodyPr>
-          <a:lstStyle/>
-          <a:p>
-            <a:pPr algn="l">
-              <a:lnSpc>
-                <a:spcPts val="1560"/>
-              </a:lnSpc>
-            </a:pPr>
-            <a:r>
-              <a:rPr b="0" sz="975" i="0" u="none">
-                <a:solidFill>
-                  <a:srgbClr val="9CA3AF"/>
-                </a:solidFill>
-                <a:latin typeface="Outfit"/>
-              </a:rPr>
-              <a:t>https://t4.ftcdn.net/jpg/08/42/10/43/360_F_842104332_H8w7n6lR05206Y2C3YvG66o1G2P709qO.jpg</a:t>
-            </a:r>
-          </a:p>
-        </p:txBody>
-      </p:sp>
-      <p:sp>
-        <p:nvSpPr>
-          <p:cNvPr id="11" name="TextBox 10"/>
-          <p:cNvSpPr txBox="1"/>
-          <p:nvPr/>
-        </p:nvSpPr>
-        <p:spPr>
-          <a:xfrm>
-            <a:off x="1666875" y="4365277"/>
-            <a:ext cx="5810250" cy="243780"/>
-          </a:xfrm>
-          <a:prstGeom prst="rect">
-            <a:avLst/>
-          </a:prstGeom>
-          <a:noFill/>
-        </p:spPr>
-        <p:txBody>
-          <a:bodyPr wrap="square" lIns="0" rIns="0" tIns="0" bIns="0" anchor="t">
-            <a:spAutoFit/>
-          </a:bodyPr>
-          <a:lstStyle/>
-          <a:p>
-            <a:pPr algn="l">
-              <a:lnSpc>
-                <a:spcPts val="1920"/>
-              </a:lnSpc>
-            </a:pPr>
-            <a:r>
-              <a:rPr b="0" sz="1200" i="0" u="none">
-                <a:solidFill>
-                  <a:srgbClr val="9CA3AF"/>
-                </a:solidFill>
-                <a:latin typeface="Outfit"/>
-              </a:rPr>
-              <a:t>Source: </a:t>
-            </a:r>
-            <a:r>
-              <a:rPr b="0" sz="1200" i="0" u="none">
-                <a:solidFill>
-                  <a:srgbClr val="4F46E5"/>
-                </a:solidFill>
-                <a:latin typeface="Outfit"/>
-              </a:rPr>
-              <a:t>stock.adobe.com</a:t>
-            </a:r>
-          </a:p>
-        </p:txBody>
-      </p:sp>
-      <p:sp>
-        <p:nvSpPr>
-          <p:cNvPr id="12" name="TextBox 11"/>
-          <p:cNvSpPr txBox="1"/>
-          <p:nvPr/>
-        </p:nvSpPr>
-        <p:spPr>
-          <a:xfrm>
-            <a:off x="571500" y="571500"/>
-            <a:ext cx="11601450" cy="561975"/>
-          </a:xfrm>
-          <a:prstGeom prst="rect">
-            <a:avLst/>
-          </a:prstGeom>
-          <a:noFill/>
-        </p:spPr>
-        <p:txBody>
-          <a:bodyPr wrap="square" lIns="0" rIns="0" tIns="0" bIns="0" anchor="t">
-            <a:spAutoFit/>
-          </a:bodyPr>
-          <a:lstStyle/>
-          <a:p>
             <a:pPr algn="l"/>
             <a:r>
-              <a:rPr b="1" sz="3450" i="0" u="none">
+              <a:rPr sz="3450" b="1" i="0" u="none">
                 <a:solidFill>
                   <a:srgbClr val="FFFFFF"/>
                 </a:solidFill>
                 <a:latin typeface="Space Grotesk"/>
               </a:rPr>
-              <a:t>Image Sources</a:t>
-            </a:r>
-          </a:p>
-        </p:txBody>
-      </p:sp>
-      <p:sp>
-        <p:nvSpPr>
-          <p:cNvPr id="13" name="Rectangle 12"/>
+              <a:t>Wait Time SLA </a:t>
+            </a:r>
+            <a:r>
+              <a:rPr sz="3450" b="1" i="0" u="none">
+                <a:solidFill>
+                  <a:srgbClr val="38BDF8"/>
+                </a:solidFill>
+                <a:latin typeface="Space Grotesk"/>
+              </a:rPr>
+              <a:t>Compliance</a:t>
+            </a:r>
+          </a:p>
+        </p:txBody>
+      </p:sp>
+      <p:sp>
+        <p:nvSpPr>
+          <p:cNvPr id="8" name="Rectangle 7"/>
           <p:cNvSpPr/>
           <p:nvPr/>
         </p:nvSpPr>
@@ -5136,6 +6796,7 @@
           <a:lstStyle/>
           <a:p>
             <a:pPr algn="ctr"/>
+            <a:endParaRPr/>
           </a:p>
         </p:txBody>
       </p:sp>
@@ -5147,8 +6808,8 @@
 </p:sld>
 </file>
 
-<file path=ppt/slides/slide17.xml><?xml version="1.0" encoding="utf-8"?>
-<p:sld xmlns:a="http://schemas.openxmlformats.org/drawingml/2006/main" xmlns:p="http://schemas.openxmlformats.org/presentationml/2006/main" xmlns:r="http://schemas.openxmlformats.org/officeDocument/2006/relationships">
+<file path=ppt/slides/slide9.xml><?xml version="1.0" encoding="utf-8"?>
+<p:sld xmlns:a="http://schemas.openxmlformats.org/drawingml/2006/main" xmlns:r="http://schemas.openxmlformats.org/officeDocument/2006/relationships" xmlns:p="http://schemas.openxmlformats.org/presentationml/2006/main">
   <p:cSld>
     <p:spTree>
       <p:nvGrpSpPr>
@@ -5156,22 +6817,245 @@
         <p:cNvGrpSpPr/>
         <p:nvPr/>
       </p:nvGrpSpPr>
-      <p:grpSpPr/>
-      <p:sp>
-        <p:nvSpPr>
-          <p:cNvPr id="2" name="Rectangle 1"/>
+      <p:grpSpPr>
+        <a:xfrm>
+          <a:off x="0" y="0"/>
+          <a:ext cx="0" cy="0"/>
+          <a:chOff x="0" y="0"/>
+          <a:chExt cx="0" cy="0"/>
+        </a:xfrm>
+      </p:grpSpPr>
+      <p:pic>
+        <p:nvPicPr>
+          <p:cNvPr id="2" name="Picture 1" descr="image.png"/>
+          <p:cNvPicPr>
+            <a:picLocks noChangeAspect="1"/>
+          </p:cNvPicPr>
+          <p:nvPr/>
+        </p:nvPicPr>
+        <p:blipFill>
+          <a:blip r:embed="rId2"/>
+          <a:stretch>
+            <a:fillRect/>
+          </a:stretch>
+        </p:blipFill>
+        <p:spPr>
+          <a:xfrm>
+            <a:off x="0" y="0"/>
+            <a:ext cx="12192000" cy="6858000"/>
+          </a:xfrm>
+          <a:prstGeom prst="rect">
+            <a:avLst/>
+          </a:prstGeom>
+        </p:spPr>
+      </p:pic>
+      <p:pic>
+        <p:nvPicPr>
+          <p:cNvPr id="3" name="Picture 2" descr="image.png"/>
+          <p:cNvPicPr>
+            <a:picLocks noChangeAspect="1"/>
+          </p:cNvPicPr>
+          <p:nvPr/>
+        </p:nvPicPr>
+        <p:blipFill>
+          <a:blip r:embed="rId3"/>
+          <a:stretch>
+            <a:fillRect/>
+          </a:stretch>
+        </p:blipFill>
+        <p:spPr>
+          <a:xfrm>
+            <a:off x="571500" y="2414587"/>
+            <a:ext cx="11049000" cy="3114675"/>
+          </a:xfrm>
+          <a:prstGeom prst="rect">
+            <a:avLst/>
+          </a:prstGeom>
+        </p:spPr>
+      </p:pic>
+      <p:sp>
+        <p:nvSpPr>
+          <p:cNvPr id="4" name="TextBox 3"/>
+          <p:cNvSpPr txBox="1"/>
+          <p:nvPr/>
+        </p:nvSpPr>
+        <p:spPr>
+          <a:xfrm>
+            <a:off x="571500" y="2414587"/>
+            <a:ext cx="5500687" cy="342900"/>
+          </a:xfrm>
+          <a:prstGeom prst="rect">
+            <a:avLst/>
+          </a:prstGeom>
+          <a:noFill/>
+        </p:spPr>
+        <p:txBody>
+          <a:bodyPr wrap="square" lIns="0" tIns="0" rIns="0" bIns="0" anchor="t">
+            <a:spAutoFit/>
+          </a:bodyPr>
+          <a:lstStyle/>
+          <a:p>
+            <a:pPr algn="l"/>
+            <a:r>
+              <a:rPr sz="2100" b="1" i="0" u="none">
+                <a:solidFill>
+                  <a:srgbClr val="E5E7EB"/>
+                </a:solidFill>
+                <a:latin typeface="Space Grotesk"/>
+              </a:rPr>
+              <a:t>High Acuity Bottlenecks</a:t>
+            </a:r>
+          </a:p>
+        </p:txBody>
+      </p:sp>
+      <p:sp>
+        <p:nvSpPr>
+          <p:cNvPr id="5" name="TextBox 4"/>
+          <p:cNvSpPr txBox="1"/>
+          <p:nvPr/>
+        </p:nvSpPr>
+        <p:spPr>
+          <a:xfrm>
+            <a:off x="571500" y="2900362"/>
+            <a:ext cx="5238750" cy="914400"/>
+          </a:xfrm>
+          <a:prstGeom prst="rect">
+            <a:avLst/>
+          </a:prstGeom>
+          <a:noFill/>
+        </p:spPr>
+        <p:txBody>
+          <a:bodyPr wrap="square" lIns="0" tIns="0" rIns="0" bIns="0" anchor="t">
+            <a:spAutoFit/>
+          </a:bodyPr>
+          <a:lstStyle/>
+          <a:p>
+            <a:pPr algn="l">
+              <a:lnSpc>
+                <a:spcPts val="2400"/>
+              </a:lnSpc>
+            </a:pPr>
+            <a:r>
+              <a:rPr sz="1500" b="0" i="0" u="none">
+                <a:solidFill>
+                  <a:srgbClr val="9CA3AF"/>
+                </a:solidFill>
+                <a:latin typeface="Outfit"/>
+              </a:rPr>
+              <a:t>The data shows an almost perfectly even split in admission outcomes, with </a:t>
+            </a:r>
+            <a:r>
+              <a:rPr sz="1500" b="1" i="0" u="none">
+                <a:solidFill>
+                  <a:srgbClr val="9CA3AF"/>
+                </a:solidFill>
+                <a:latin typeface="Outfit"/>
+              </a:rPr>
+              <a:t>49% of ER visits (237 patients) resulting in a formal hospital admission.</a:t>
+            </a:r>
+          </a:p>
+        </p:txBody>
+      </p:sp>
+      <p:sp>
+        <p:nvSpPr>
+          <p:cNvPr id="6" name="TextBox 5"/>
+          <p:cNvSpPr txBox="1"/>
+          <p:nvPr/>
+        </p:nvSpPr>
+        <p:spPr>
+          <a:xfrm>
+            <a:off x="571500" y="4005262"/>
+            <a:ext cx="5238750" cy="1524000"/>
+          </a:xfrm>
+          <a:prstGeom prst="rect">
+            <a:avLst/>
+          </a:prstGeom>
+          <a:noFill/>
+        </p:spPr>
+        <p:txBody>
+          <a:bodyPr wrap="square" lIns="0" tIns="0" rIns="0" bIns="0" anchor="t">
+            <a:spAutoFit/>
+          </a:bodyPr>
+          <a:lstStyle/>
+          <a:p>
+            <a:pPr algn="l">
+              <a:lnSpc>
+                <a:spcPts val="2400"/>
+              </a:lnSpc>
+            </a:pPr>
+            <a:r>
+              <a:rPr sz="1500" b="0" i="0" u="none">
+                <a:solidFill>
+                  <a:srgbClr val="9CA3AF"/>
+                </a:solidFill>
+                <a:latin typeface="Outfit"/>
+              </a:rPr>
+              <a:t>This extremely high acuity rate requires extensive physician resources, diagnostic testing, and inpatient bed coordination. When inpatient beds are unavailable, these admitted patients board in the ER, severely restricting front-end throughput and exacerbating the 57% delay rate.</a:t>
+            </a:r>
+          </a:p>
+        </p:txBody>
+      </p:sp>
+      <p:sp>
+        <p:nvSpPr>
+          <p:cNvPr id="7" name="TextBox 6"/>
+          <p:cNvSpPr txBox="1"/>
+          <p:nvPr/>
+        </p:nvSpPr>
+        <p:spPr>
+          <a:xfrm>
+            <a:off x="571500" y="571500"/>
+            <a:ext cx="11601450" cy="561975"/>
+          </a:xfrm>
+          <a:prstGeom prst="rect">
+            <a:avLst/>
+          </a:prstGeom>
+          <a:noFill/>
+        </p:spPr>
+        <p:txBody>
+          <a:bodyPr wrap="square" lIns="0" tIns="0" rIns="0" bIns="0" anchor="t">
+            <a:spAutoFit/>
+          </a:bodyPr>
+          <a:lstStyle/>
+          <a:p>
+            <a:pPr algn="l"/>
+            <a:r>
+              <a:rPr sz="3450" b="1" i="0" u="none">
+                <a:solidFill>
+                  <a:srgbClr val="FFFFFF"/>
+                </a:solidFill>
+                <a:latin typeface="Space Grotesk"/>
+              </a:rPr>
+              <a:t>Hospital </a:t>
+            </a:r>
+            <a:r>
+              <a:rPr sz="3450" b="1" i="0" u="none">
+                <a:solidFill>
+                  <a:srgbClr val="38BDF8"/>
+                </a:solidFill>
+                <a:latin typeface="Space Grotesk"/>
+              </a:rPr>
+              <a:t>Admission Rates</a:t>
+            </a:r>
+          </a:p>
+        </p:txBody>
+      </p:sp>
+      <p:sp>
+        <p:nvSpPr>
+          <p:cNvPr id="8" name="Rectangle 7"/>
           <p:cNvSpPr/>
           <p:nvPr/>
         </p:nvSpPr>
         <p:spPr>
           <a:xfrm>
-            <a:off x="571500" y="3191916"/>
-            <a:ext cx="7391400" cy="784770"/>
-          </a:xfrm>
-          <a:prstGeom prst="rect">
-            <a:avLst/>
-          </a:prstGeom>
-          <a:noFill/>
+            <a:off x="571500" y="1266825"/>
+            <a:ext cx="11049000" cy="9525"/>
+          </a:xfrm>
+          <a:prstGeom prst="rect">
+            <a:avLst/>
+          </a:prstGeom>
+          <a:solidFill>
+            <a:srgbClr val="FFFFFF"/>
+          </a:solidFill>
           <a:ln>
             <a:noFill/>
           </a:ln>
@@ -5196,2706 +7080,7 @@
           <a:lstStyle/>
           <a:p>
             <a:pPr algn="ctr"/>
-          </a:p>
-        </p:txBody>
-      </p:sp>
-      <p:sp>
-        <p:nvSpPr>
-          <p:cNvPr id="3" name="Rectangle 2"/>
-          <p:cNvSpPr/>
-          <p:nvPr/>
-        </p:nvSpPr>
-        <p:spPr>
-          <a:xfrm>
-            <a:off x="571500" y="3967162"/>
-            <a:ext cx="7391400" cy="9525"/>
-          </a:xfrm>
-          <a:prstGeom prst="rect">
-            <a:avLst/>
-          </a:prstGeom>
-          <a:solidFill>
-            <a:srgbClr val="757575"/>
-          </a:solidFill>
-          <a:ln>
-            <a:noFill/>
-          </a:ln>
-          <a:effectLst/>
-        </p:spPr>
-        <p:style>
-          <a:lnRef idx="1">
-            <a:schemeClr val="accent1"/>
-          </a:lnRef>
-          <a:fillRef idx="3">
-            <a:schemeClr val="accent1"/>
-          </a:fillRef>
-          <a:effectRef idx="2">
-            <a:schemeClr val="accent1"/>
-          </a:effectRef>
-          <a:fontRef idx="minor">
-            <a:schemeClr val="lt1"/>
-          </a:fontRef>
-        </p:style>
-        <p:txBody>
-          <a:bodyPr rtlCol="0" anchor="ctr"/>
-          <a:lstStyle/>
-          <a:p>
-            <a:pPr algn="ctr"/>
-          </a:p>
-        </p:txBody>
-      </p:sp>
-      <p:sp>
-        <p:nvSpPr>
-          <p:cNvPr id="4" name="Rectangle 3"/>
-          <p:cNvSpPr/>
-          <p:nvPr/>
-        </p:nvSpPr>
-        <p:spPr>
-          <a:xfrm>
-            <a:off x="571500" y="3967162"/>
-            <a:ext cx="7391400" cy="9525"/>
-          </a:xfrm>
-          <a:prstGeom prst="rect">
-            <a:avLst/>
-          </a:prstGeom>
-          <a:solidFill>
-            <a:srgbClr val="757575"/>
-          </a:solidFill>
-          <a:ln>
-            <a:noFill/>
-          </a:ln>
-          <a:effectLst/>
-        </p:spPr>
-        <p:style>
-          <a:lnRef idx="1">
-            <a:schemeClr val="accent1"/>
-          </a:lnRef>
-          <a:fillRef idx="3">
-            <a:schemeClr val="accent1"/>
-          </a:fillRef>
-          <a:effectRef idx="2">
-            <a:schemeClr val="accent1"/>
-          </a:effectRef>
-          <a:fontRef idx="minor">
-            <a:schemeClr val="lt1"/>
-          </a:fontRef>
-        </p:style>
-        <p:txBody>
-          <a:bodyPr rtlCol="0" anchor="ctr"/>
-          <a:lstStyle/>
-          <a:p>
-            <a:pPr algn="ctr"/>
-          </a:p>
-        </p:txBody>
-      </p:sp>
-      <p:pic>
-        <p:nvPicPr>
-          <p:cNvPr id="5" name="Picture 4" descr="image.png"/>
-          <p:cNvPicPr>
-            <a:picLocks noChangeAspect="1"/>
-          </p:cNvPicPr>
-          <p:nvPr/>
-        </p:nvPicPr>
-        <p:blipFill>
-          <a:blip r:embed="rId2"/>
-          <a:stretch>
-            <a:fillRect/>
-          </a:stretch>
-        </p:blipFill>
-        <p:spPr>
-          <a:xfrm>
-            <a:off x="571500" y="3341340"/>
-            <a:ext cx="857250" cy="476250"/>
-          </a:xfrm>
-          <a:prstGeom prst="rect">
-            <a:avLst/>
-          </a:prstGeom>
-        </p:spPr>
-      </p:pic>
-      <p:sp>
-        <p:nvSpPr>
-          <p:cNvPr id="6" name="TextBox 5"/>
-          <p:cNvSpPr txBox="1"/>
-          <p:nvPr/>
-        </p:nvSpPr>
-        <p:spPr>
-          <a:xfrm>
-            <a:off x="1666875" y="3334791"/>
-            <a:ext cx="6296025" cy="198090"/>
-          </a:xfrm>
-          <a:prstGeom prst="rect">
-            <a:avLst/>
-          </a:prstGeom>
-          <a:noFill/>
-        </p:spPr>
-        <p:txBody>
-          <a:bodyPr wrap="square" lIns="0" rIns="0" tIns="0" bIns="0" anchor="t">
-            <a:spAutoFit/>
-          </a:bodyPr>
-          <a:lstStyle/>
-          <a:p>
-            <a:pPr algn="l">
-              <a:lnSpc>
-                <a:spcPts val="1560"/>
-              </a:lnSpc>
-            </a:pPr>
-            <a:r>
-              <a:rPr b="0" sz="975" i="0" u="none">
-                <a:solidFill>
-                  <a:srgbClr val="9CA3AF"/>
-                </a:solidFill>
-                <a:latin typeface="Outfit"/>
-              </a:rPr>
-              <a:t>https://www.mdpi.com/sensors/sensors-25-06472/article_deploy/html/images/sensors-25-06472-g001-550.jpg</a:t>
-            </a:r>
-          </a:p>
-        </p:txBody>
-      </p:sp>
-      <p:sp>
-        <p:nvSpPr>
-          <p:cNvPr id="7" name="TextBox 6"/>
-          <p:cNvSpPr txBox="1"/>
-          <p:nvPr/>
-        </p:nvSpPr>
-        <p:spPr>
-          <a:xfrm>
-            <a:off x="1666875" y="3580507"/>
-            <a:ext cx="6296025" cy="243780"/>
-          </a:xfrm>
-          <a:prstGeom prst="rect">
-            <a:avLst/>
-          </a:prstGeom>
-          <a:noFill/>
-        </p:spPr>
-        <p:txBody>
-          <a:bodyPr wrap="square" lIns="0" rIns="0" tIns="0" bIns="0" anchor="t">
-            <a:spAutoFit/>
-          </a:bodyPr>
-          <a:lstStyle/>
-          <a:p>
-            <a:pPr algn="l">
-              <a:lnSpc>
-                <a:spcPts val="1920"/>
-              </a:lnSpc>
-            </a:pPr>
-            <a:r>
-              <a:rPr b="0" sz="1200" i="0" u="none">
-                <a:solidFill>
-                  <a:srgbClr val="9CA3AF"/>
-                </a:solidFill>
-                <a:latin typeface="Outfit"/>
-              </a:rPr>
-              <a:t>Source: </a:t>
-            </a:r>
-            <a:r>
-              <a:rPr b="0" sz="1200" i="0" u="none">
-                <a:solidFill>
-                  <a:srgbClr val="4F46E5"/>
-                </a:solidFill>
-                <a:latin typeface="Outfit"/>
-              </a:rPr>
-              <a:t>www.mdpi.com</a:t>
-            </a:r>
-          </a:p>
-        </p:txBody>
-      </p:sp>
-      <p:pic>
-        <p:nvPicPr>
-          <p:cNvPr id="8" name="Picture 7" descr="image.png"/>
-          <p:cNvPicPr>
-            <a:picLocks noChangeAspect="1"/>
-          </p:cNvPicPr>
-          <p:nvPr/>
-        </p:nvPicPr>
-        <p:blipFill>
-          <a:blip r:embed="rId3"/>
-          <a:stretch>
-            <a:fillRect/>
-          </a:stretch>
-        </p:blipFill>
-        <p:spPr>
-          <a:xfrm>
-            <a:off x="571500" y="4126110"/>
-            <a:ext cx="857250" cy="476250"/>
-          </a:xfrm>
-          <a:prstGeom prst="rect">
-            <a:avLst/>
-          </a:prstGeom>
-        </p:spPr>
-      </p:pic>
-      <p:sp>
-        <p:nvSpPr>
-          <p:cNvPr id="9" name="TextBox 8"/>
-          <p:cNvSpPr txBox="1"/>
-          <p:nvPr/>
-        </p:nvSpPr>
-        <p:spPr>
-          <a:xfrm>
-            <a:off x="1666875" y="4119562"/>
-            <a:ext cx="6296025" cy="198090"/>
-          </a:xfrm>
-          <a:prstGeom prst="rect">
-            <a:avLst/>
-          </a:prstGeom>
-          <a:noFill/>
-        </p:spPr>
-        <p:txBody>
-          <a:bodyPr wrap="square" lIns="0" rIns="0" tIns="0" bIns="0" anchor="t">
-            <a:spAutoFit/>
-          </a:bodyPr>
-          <a:lstStyle/>
-          <a:p>
-            <a:pPr algn="l">
-              <a:lnSpc>
-                <a:spcPts val="1560"/>
-              </a:lnSpc>
-            </a:pPr>
-            <a:r>
-              <a:rPr b="0" sz="975" i="0" u="none">
-                <a:solidFill>
-                  <a:srgbClr val="9CA3AF"/>
-                </a:solidFill>
-                <a:latin typeface="Outfit"/>
-              </a:rPr>
-              <a:t>https://qualify.health/wp-content/uploads/2025/09/hospital-revenue-cycle-blog-featured.jpg.webp</a:t>
-            </a:r>
-          </a:p>
-        </p:txBody>
-      </p:sp>
-      <p:sp>
-        <p:nvSpPr>
-          <p:cNvPr id="10" name="TextBox 9"/>
-          <p:cNvSpPr txBox="1"/>
-          <p:nvPr/>
-        </p:nvSpPr>
-        <p:spPr>
-          <a:xfrm>
-            <a:off x="1666875" y="4365277"/>
-            <a:ext cx="6296025" cy="243780"/>
-          </a:xfrm>
-          <a:prstGeom prst="rect">
-            <a:avLst/>
-          </a:prstGeom>
-          <a:noFill/>
-        </p:spPr>
-        <p:txBody>
-          <a:bodyPr wrap="square" lIns="0" rIns="0" tIns="0" bIns="0" anchor="t">
-            <a:spAutoFit/>
-          </a:bodyPr>
-          <a:lstStyle/>
-          <a:p>
-            <a:pPr algn="l">
-              <a:lnSpc>
-                <a:spcPts val="1920"/>
-              </a:lnSpc>
-            </a:pPr>
-            <a:r>
-              <a:rPr b="0" sz="1200" i="0" u="none">
-                <a:solidFill>
-                  <a:srgbClr val="9CA3AF"/>
-                </a:solidFill>
-                <a:latin typeface="Outfit"/>
-              </a:rPr>
-              <a:t>Source: </a:t>
-            </a:r>
-            <a:r>
-              <a:rPr b="0" sz="1200" i="0" u="none">
-                <a:solidFill>
-                  <a:srgbClr val="4F46E5"/>
-                </a:solidFill>
-                <a:latin typeface="Outfit"/>
-              </a:rPr>
-              <a:t>qualify.health</a:t>
-            </a:r>
-          </a:p>
-        </p:txBody>
-      </p:sp>
-      <p:sp>
-        <p:nvSpPr>
-          <p:cNvPr id="11" name="TextBox 10"/>
-          <p:cNvSpPr txBox="1"/>
-          <p:nvPr/>
-        </p:nvSpPr>
-        <p:spPr>
-          <a:xfrm>
-            <a:off x="571500" y="571500"/>
-            <a:ext cx="11601450" cy="561975"/>
-          </a:xfrm>
-          <a:prstGeom prst="rect">
-            <a:avLst/>
-          </a:prstGeom>
-          <a:noFill/>
-        </p:spPr>
-        <p:txBody>
-          <a:bodyPr wrap="square" lIns="0" rIns="0" tIns="0" bIns="0" anchor="t">
-            <a:spAutoFit/>
-          </a:bodyPr>
-          <a:lstStyle/>
-          <a:p>
-            <a:pPr algn="l"/>
-            <a:r>
-              <a:rPr b="1" sz="3450" i="0" u="none">
-                <a:solidFill>
-                  <a:srgbClr val="FFFFFF"/>
-                </a:solidFill>
-                <a:latin typeface="Space Grotesk"/>
-              </a:rPr>
-              <a:t>Image Sources</a:t>
-            </a:r>
-          </a:p>
-        </p:txBody>
-      </p:sp>
-      <p:sp>
-        <p:nvSpPr>
-          <p:cNvPr id="12" name="Rectangle 11"/>
-          <p:cNvSpPr/>
-          <p:nvPr/>
-        </p:nvSpPr>
-        <p:spPr>
-          <a:xfrm>
-            <a:off x="571500" y="1266825"/>
-            <a:ext cx="11049000" cy="9525"/>
-          </a:xfrm>
-          <a:prstGeom prst="rect">
-            <a:avLst/>
-          </a:prstGeom>
-          <a:solidFill>
-            <a:srgbClr val="FFFFFF"/>
-          </a:solidFill>
-          <a:ln>
-            <a:noFill/>
-          </a:ln>
-          <a:effectLst/>
-        </p:spPr>
-        <p:style>
-          <a:lnRef idx="1">
-            <a:schemeClr val="accent1"/>
-          </a:lnRef>
-          <a:fillRef idx="3">
-            <a:schemeClr val="accent1"/>
-          </a:fillRef>
-          <a:effectRef idx="2">
-            <a:schemeClr val="accent1"/>
-          </a:effectRef>
-          <a:fontRef idx="minor">
-            <a:schemeClr val="lt1"/>
-          </a:fontRef>
-        </p:style>
-        <p:txBody>
-          <a:bodyPr rtlCol="0" anchor="ctr"/>
-          <a:lstStyle/>
-          <a:p>
-            <a:pPr algn="ctr"/>
-          </a:p>
-        </p:txBody>
-      </p:sp>
-    </p:spTree>
-  </p:cSld>
-  <p:clrMapOvr>
-    <a:masterClrMapping/>
-  </p:clrMapOvr>
-</p:sld>
-</file>
-
-<file path=ppt/slides/slide2.xml><?xml version="1.0" encoding="utf-8"?>
-<p:sld xmlns:a="http://schemas.openxmlformats.org/drawingml/2006/main" xmlns:p="http://schemas.openxmlformats.org/presentationml/2006/main" xmlns:r="http://schemas.openxmlformats.org/officeDocument/2006/relationships">
-  <p:cSld>
-    <p:spTree>
-      <p:nvGrpSpPr>
-        <p:cNvPr id="1" name=""/>
-        <p:cNvGrpSpPr/>
-        <p:nvPr/>
-      </p:nvGrpSpPr>
-      <p:grpSpPr/>
-      <p:pic>
-        <p:nvPicPr>
-          <p:cNvPr id="2" name="Picture 1" descr="image.png"/>
-          <p:cNvPicPr>
-            <a:picLocks noChangeAspect="1"/>
-          </p:cNvPicPr>
-          <p:nvPr/>
-        </p:nvPicPr>
-        <p:blipFill>
-          <a:blip r:embed="rId2"/>
-          <a:stretch>
-            <a:fillRect/>
-          </a:stretch>
-        </p:blipFill>
-        <p:spPr>
-          <a:xfrm>
-            <a:off x="0" y="0"/>
-            <a:ext cx="12192000" cy="6858000"/>
-          </a:xfrm>
-          <a:prstGeom prst="rect">
-            <a:avLst/>
-          </a:prstGeom>
-        </p:spPr>
-      </p:pic>
-      <p:sp>
-        <p:nvSpPr>
-          <p:cNvPr id="3" name="TextBox 2"/>
-          <p:cNvSpPr txBox="1"/>
-          <p:nvPr/>
-        </p:nvSpPr>
-        <p:spPr>
-          <a:xfrm>
-            <a:off x="295275" y="2005012"/>
-            <a:ext cx="11601450" cy="1943100"/>
-          </a:xfrm>
-          <a:prstGeom prst="rect">
-            <a:avLst/>
-          </a:prstGeom>
-          <a:noFill/>
-        </p:spPr>
-        <p:txBody>
-          <a:bodyPr wrap="square" lIns="0" rIns="0" tIns="0" bIns="0" anchor="t">
-            <a:spAutoFit/>
-          </a:bodyPr>
-          <a:lstStyle/>
-          <a:p>
-            <a:pPr algn="ctr"/>
-            <a:r>
-              <a:rPr b="1" sz="6000" i="0" u="none">
-                <a:solidFill>
-                  <a:srgbClr val="FFFFFF"/>
-                </a:solidFill>
-                <a:latin typeface="Space Grotesk"/>
-              </a:rPr>
-              <a:t>Project Overview &amp; Methodology</a:t>
-            </a:r>
-          </a:p>
-        </p:txBody>
-      </p:sp>
-      <p:sp>
-        <p:nvSpPr>
-          <p:cNvPr id="4" name="TextBox 3"/>
-          <p:cNvSpPr txBox="1"/>
-          <p:nvPr/>
-        </p:nvSpPr>
-        <p:spPr>
-          <a:xfrm>
-            <a:off x="571500" y="4548187"/>
-            <a:ext cx="11049000" cy="304800"/>
-          </a:xfrm>
-          <a:prstGeom prst="rect">
-            <a:avLst/>
-          </a:prstGeom>
-          <a:noFill/>
-        </p:spPr>
-        <p:txBody>
-          <a:bodyPr wrap="square" lIns="0" rIns="0" tIns="0" bIns="0" anchor="t">
-            <a:spAutoFit/>
-          </a:bodyPr>
-          <a:lstStyle/>
-          <a:p>
-            <a:pPr algn="ctr">
-              <a:lnSpc>
-                <a:spcPts val="2400"/>
-              </a:lnSpc>
-            </a:pPr>
-            <a:r>
-              <a:rPr b="0" sz="1500" i="0" u="none">
-                <a:solidFill>
-                  <a:srgbClr val="9CA3AF"/>
-                </a:solidFill>
-                <a:latin typeface="Outfit"/>
-              </a:rPr>
-              <a:t>Defining the scope and objectives of our ER data analysis.</a:t>
-            </a:r>
-          </a:p>
-        </p:txBody>
-      </p:sp>
-    </p:spTree>
-  </p:cSld>
-  <p:clrMapOvr>
-    <a:masterClrMapping/>
-  </p:clrMapOvr>
-</p:sld>
-</file>
-
-<file path=ppt/slides/slide3.xml><?xml version="1.0" encoding="utf-8"?>
-<p:sld xmlns:a="http://schemas.openxmlformats.org/drawingml/2006/main" xmlns:p="http://schemas.openxmlformats.org/presentationml/2006/main" xmlns:r="http://schemas.openxmlformats.org/officeDocument/2006/relationships">
-  <p:cSld>
-    <p:spTree>
-      <p:nvGrpSpPr>
-        <p:cNvPr id="1" name=""/>
-        <p:cNvGrpSpPr/>
-        <p:nvPr/>
-      </p:nvGrpSpPr>
-      <p:grpSpPr/>
-      <p:pic>
-        <p:nvPicPr>
-          <p:cNvPr id="2" name="Picture 1" descr="image.png"/>
-          <p:cNvPicPr>
-            <a:picLocks noChangeAspect="1"/>
-          </p:cNvPicPr>
-          <p:nvPr/>
-        </p:nvPicPr>
-        <p:blipFill>
-          <a:blip r:embed="rId2"/>
-          <a:stretch>
-            <a:fillRect/>
-          </a:stretch>
-        </p:blipFill>
-        <p:spPr>
-          <a:xfrm>
-            <a:off x="0" y="0"/>
-            <a:ext cx="12192000" cy="6858000"/>
-          </a:xfrm>
-          <a:prstGeom prst="rect">
-            <a:avLst/>
-          </a:prstGeom>
-        </p:spPr>
-      </p:pic>
-      <p:pic>
-        <p:nvPicPr>
-          <p:cNvPr id="3" name="Picture 2" descr="image.png"/>
-          <p:cNvPicPr>
-            <a:picLocks noChangeAspect="1"/>
-          </p:cNvPicPr>
-          <p:nvPr/>
-        </p:nvPicPr>
-        <p:blipFill>
-          <a:blip r:embed="rId3"/>
-          <a:stretch>
-            <a:fillRect/>
-          </a:stretch>
-        </p:blipFill>
-        <p:spPr>
-          <a:xfrm>
-            <a:off x="6381750" y="2066925"/>
-            <a:ext cx="5238750" cy="3810000"/>
-          </a:xfrm>
-          <a:prstGeom prst="rect">
-            <a:avLst/>
-          </a:prstGeom>
-        </p:spPr>
-      </p:pic>
-      <p:sp>
-        <p:nvSpPr>
-          <p:cNvPr id="4" name="TextBox 3"/>
-          <p:cNvSpPr txBox="1"/>
-          <p:nvPr/>
-        </p:nvSpPr>
-        <p:spPr>
-          <a:xfrm>
-            <a:off x="571500" y="2047875"/>
-            <a:ext cx="5500687" cy="342900"/>
-          </a:xfrm>
-          <a:prstGeom prst="rect">
-            <a:avLst/>
-          </a:prstGeom>
-          <a:noFill/>
-        </p:spPr>
-        <p:txBody>
-          <a:bodyPr wrap="square" lIns="0" rIns="0" tIns="0" bIns="0" anchor="t">
-            <a:spAutoFit/>
-          </a:bodyPr>
-          <a:lstStyle/>
-          <a:p>
-            <a:pPr algn="l"/>
-            <a:r>
-              <a:rPr b="1" sz="2100" i="0" u="none">
-                <a:solidFill>
-                  <a:srgbClr val="E5E7EB"/>
-                </a:solidFill>
-                <a:latin typeface="Space Grotesk"/>
-              </a:rPr>
-              <a:t>Data-Driven Healthcare</a:t>
-            </a:r>
-          </a:p>
-        </p:txBody>
-      </p:sp>
-      <p:sp>
-        <p:nvSpPr>
-          <p:cNvPr id="5" name="TextBox 4"/>
-          <p:cNvSpPr txBox="1"/>
-          <p:nvPr/>
-        </p:nvSpPr>
-        <p:spPr>
-          <a:xfrm>
-            <a:off x="571500" y="2533650"/>
-            <a:ext cx="5238750" cy="914400"/>
-          </a:xfrm>
-          <a:prstGeom prst="rect">
-            <a:avLst/>
-          </a:prstGeom>
-          <a:noFill/>
-        </p:spPr>
-        <p:txBody>
-          <a:bodyPr wrap="square" lIns="0" rIns="0" tIns="0" bIns="0" anchor="t">
-            <a:spAutoFit/>
-          </a:bodyPr>
-          <a:lstStyle/>
-          <a:p>
-            <a:pPr algn="l">
-              <a:lnSpc>
-                <a:spcPts val="2400"/>
-              </a:lnSpc>
-            </a:pPr>
-            <a:r>
-              <a:rPr b="0" sz="1500" i="0" u="none">
-                <a:solidFill>
-                  <a:srgbClr val="9CA3AF"/>
-                </a:solidFill>
-                <a:latin typeface="Outfit"/>
-              </a:rPr>
-              <a:t>This initiative leverages a comprehensive dataset of Emergency Room records to identify critical bottlenecks in patient care and operational throughput.</a:t>
-            </a:r>
-          </a:p>
-        </p:txBody>
-      </p:sp>
-      <p:pic>
-        <p:nvPicPr>
-          <p:cNvPr id="6" name="Picture 5" descr="image.png"/>
-          <p:cNvPicPr>
-            <a:picLocks noChangeAspect="1"/>
-          </p:cNvPicPr>
-          <p:nvPr/>
-        </p:nvPicPr>
-        <p:blipFill>
-          <a:blip r:embed="rId4"/>
-          <a:stretch>
-            <a:fillRect/>
-          </a:stretch>
-        </p:blipFill>
-        <p:spPr>
-          <a:xfrm>
-            <a:off x="6391275" y="2076450"/>
-            <a:ext cx="5219700" cy="3790950"/>
-          </a:xfrm>
-          <a:prstGeom prst="rect">
-            <a:avLst/>
-          </a:prstGeom>
-        </p:spPr>
-      </p:pic>
-      <p:sp>
-        <p:nvSpPr>
-          <p:cNvPr id="7" name="TextBox 6"/>
-          <p:cNvSpPr txBox="1"/>
-          <p:nvPr/>
-        </p:nvSpPr>
-        <p:spPr>
-          <a:xfrm>
-            <a:off x="857250" y="3638550"/>
-            <a:ext cx="4953000" cy="609600"/>
-          </a:xfrm>
-          <a:prstGeom prst="rect">
-            <a:avLst/>
-          </a:prstGeom>
-          <a:noFill/>
-        </p:spPr>
-        <p:txBody>
-          <a:bodyPr wrap="square" lIns="0" rIns="0" tIns="0" bIns="0" anchor="t">
-            <a:spAutoFit/>
-          </a:bodyPr>
-          <a:lstStyle/>
-          <a:p>
-            <a:pPr algn="l">
-              <a:lnSpc>
-                <a:spcPts val="2400"/>
-              </a:lnSpc>
-            </a:pPr>
-            <a:r>
-              <a:rPr b="1" sz="1500" i="0" u="none">
-                <a:solidFill>
-                  <a:srgbClr val="9CA3AF"/>
-                </a:solidFill>
-                <a:latin typeface="Outfit"/>
-              </a:rPr>
-              <a:t>Dataset Scope:</a:t>
-            </a:r>
-            <a:r>
-              <a:rPr b="0" sz="1500" i="0" u="none">
-                <a:solidFill>
-                  <a:srgbClr val="9CA3AF"/>
-                </a:solidFill>
-                <a:latin typeface="Outfit"/>
-              </a:rPr>
-              <a:t> Analyzing 952 distinct patient interactions from 2023-2024.</a:t>
-            </a:r>
-          </a:p>
-        </p:txBody>
-      </p:sp>
-      <p:sp>
-        <p:nvSpPr>
-          <p:cNvPr id="8" name="TextBox 7"/>
-          <p:cNvSpPr txBox="1"/>
-          <p:nvPr/>
-        </p:nvSpPr>
-        <p:spPr>
-          <a:xfrm>
-            <a:off x="857250" y="4391025"/>
-            <a:ext cx="4953000" cy="609600"/>
-          </a:xfrm>
-          <a:prstGeom prst="rect">
-            <a:avLst/>
-          </a:prstGeom>
-          <a:noFill/>
-        </p:spPr>
-        <p:txBody>
-          <a:bodyPr wrap="square" lIns="0" rIns="0" tIns="0" bIns="0" anchor="t">
-            <a:spAutoFit/>
-          </a:bodyPr>
-          <a:lstStyle/>
-          <a:p>
-            <a:pPr algn="l">
-              <a:lnSpc>
-                <a:spcPts val="2400"/>
-              </a:lnSpc>
-            </a:pPr>
-            <a:r>
-              <a:rPr b="1" sz="1500" i="0" u="none">
-                <a:solidFill>
-                  <a:srgbClr val="9CA3AF"/>
-                </a:solidFill>
-                <a:latin typeface="Outfit"/>
-              </a:rPr>
-              <a:t>Dashboard Filtering:</a:t>
-            </a:r>
-            <a:r>
-              <a:rPr b="0" sz="1500" i="0" u="none">
-                <a:solidFill>
-                  <a:srgbClr val="9CA3AF"/>
-                </a:solidFill>
-                <a:latin typeface="Outfit"/>
-              </a:rPr>
-              <a:t> The current analytical view isolates </a:t>
-            </a:r>
-            <a:r>
-              <a:rPr b="1" sz="1500" i="0" u="none">
-                <a:solidFill>
-                  <a:srgbClr val="9CA3AF"/>
-                </a:solidFill>
-                <a:latin typeface="Outfit"/>
-              </a:rPr>
-              <a:t>479 specific records</a:t>
-            </a:r>
-            <a:r>
-              <a:rPr b="0" sz="1500" i="0" u="none">
-                <a:solidFill>
-                  <a:srgbClr val="9CA3AF"/>
-                </a:solidFill>
-                <a:latin typeface="Outfit"/>
-              </a:rPr>
-              <a:t> for targeted review.</a:t>
-            </a:r>
-          </a:p>
-        </p:txBody>
-      </p:sp>
-      <p:sp>
-        <p:nvSpPr>
-          <p:cNvPr id="9" name="TextBox 8"/>
-          <p:cNvSpPr txBox="1"/>
-          <p:nvPr/>
-        </p:nvSpPr>
-        <p:spPr>
-          <a:xfrm>
-            <a:off x="857250" y="5143500"/>
-            <a:ext cx="4953000" cy="609600"/>
-          </a:xfrm>
-          <a:prstGeom prst="rect">
-            <a:avLst/>
-          </a:prstGeom>
-          <a:noFill/>
-        </p:spPr>
-        <p:txBody>
-          <a:bodyPr wrap="square" lIns="0" rIns="0" tIns="0" bIns="0" anchor="t">
-            <a:spAutoFit/>
-          </a:bodyPr>
-          <a:lstStyle/>
-          <a:p>
-            <a:pPr algn="l">
-              <a:lnSpc>
-                <a:spcPts val="2400"/>
-              </a:lnSpc>
-            </a:pPr>
-            <a:r>
-              <a:rPr b="1" sz="1500" i="0" u="none">
-                <a:solidFill>
-                  <a:srgbClr val="9CA3AF"/>
-                </a:solidFill>
-                <a:latin typeface="Outfit"/>
-              </a:rPr>
-              <a:t>Primary Goal:</a:t>
-            </a:r>
-            <a:r>
-              <a:rPr b="0" sz="1500" i="0" u="none">
-                <a:solidFill>
-                  <a:srgbClr val="9CA3AF"/>
-                </a:solidFill>
-                <a:latin typeface="Outfit"/>
-              </a:rPr>
-              <a:t> Improve SLA compliance for wait times and elevate overall patient satisfaction scores.</a:t>
-            </a:r>
-          </a:p>
-        </p:txBody>
-      </p:sp>
-      <p:sp>
-        <p:nvSpPr>
-          <p:cNvPr id="10" name="TextBox 9"/>
-          <p:cNvSpPr txBox="1"/>
-          <p:nvPr/>
-        </p:nvSpPr>
-        <p:spPr>
-          <a:xfrm>
-            <a:off x="571500" y="3638550"/>
-            <a:ext cx="190500" cy="304800"/>
-          </a:xfrm>
-          <a:prstGeom prst="rect">
-            <a:avLst/>
-          </a:prstGeom>
-          <a:noFill/>
-        </p:spPr>
-        <p:txBody>
-          <a:bodyPr wrap="square" lIns="0" rIns="0" tIns="0" bIns="0" anchor="t">
-            <a:spAutoFit/>
-          </a:bodyPr>
-          <a:lstStyle/>
-          <a:p>
-            <a:pPr algn="l">
-              <a:lnSpc>
-                <a:spcPts val="2400"/>
-              </a:lnSpc>
-            </a:pPr>
-            <a:r>
-              <a:rPr b="1" sz="1500" i="0" u="none">
-                <a:solidFill>
-                  <a:srgbClr val="F59E0B"/>
-                </a:solidFill>
-                <a:latin typeface="Outfit"/>
-              </a:rPr>
-              <a:t>→</a:t>
-            </a:r>
-          </a:p>
-        </p:txBody>
-      </p:sp>
-      <p:sp>
-        <p:nvSpPr>
-          <p:cNvPr id="11" name="TextBox 10"/>
-          <p:cNvSpPr txBox="1"/>
-          <p:nvPr/>
-        </p:nvSpPr>
-        <p:spPr>
-          <a:xfrm>
-            <a:off x="571500" y="4391025"/>
-            <a:ext cx="190500" cy="304800"/>
-          </a:xfrm>
-          <a:prstGeom prst="rect">
-            <a:avLst/>
-          </a:prstGeom>
-          <a:noFill/>
-        </p:spPr>
-        <p:txBody>
-          <a:bodyPr wrap="square" lIns="0" rIns="0" tIns="0" bIns="0" anchor="t">
-            <a:spAutoFit/>
-          </a:bodyPr>
-          <a:lstStyle/>
-          <a:p>
-            <a:pPr algn="l">
-              <a:lnSpc>
-                <a:spcPts val="2400"/>
-              </a:lnSpc>
-            </a:pPr>
-            <a:r>
-              <a:rPr b="1" sz="1500" i="0" u="none">
-                <a:solidFill>
-                  <a:srgbClr val="F59E0B"/>
-                </a:solidFill>
-                <a:latin typeface="Outfit"/>
-              </a:rPr>
-              <a:t>→</a:t>
-            </a:r>
-          </a:p>
-        </p:txBody>
-      </p:sp>
-      <p:sp>
-        <p:nvSpPr>
-          <p:cNvPr id="12" name="TextBox 11"/>
-          <p:cNvSpPr txBox="1"/>
-          <p:nvPr/>
-        </p:nvSpPr>
-        <p:spPr>
-          <a:xfrm>
-            <a:off x="571500" y="5143500"/>
-            <a:ext cx="190500" cy="304800"/>
-          </a:xfrm>
-          <a:prstGeom prst="rect">
-            <a:avLst/>
-          </a:prstGeom>
-          <a:noFill/>
-        </p:spPr>
-        <p:txBody>
-          <a:bodyPr wrap="square" lIns="0" rIns="0" tIns="0" bIns="0" anchor="t">
-            <a:spAutoFit/>
-          </a:bodyPr>
-          <a:lstStyle/>
-          <a:p>
-            <a:pPr algn="l">
-              <a:lnSpc>
-                <a:spcPts val="2400"/>
-              </a:lnSpc>
-            </a:pPr>
-            <a:r>
-              <a:rPr b="1" sz="1500" i="0" u="none">
-                <a:solidFill>
-                  <a:srgbClr val="F59E0B"/>
-                </a:solidFill>
-                <a:latin typeface="Outfit"/>
-              </a:rPr>
-              <a:t>→</a:t>
-            </a:r>
-          </a:p>
-        </p:txBody>
-      </p:sp>
-      <p:sp>
-        <p:nvSpPr>
-          <p:cNvPr id="13" name="TextBox 12"/>
-          <p:cNvSpPr txBox="1"/>
-          <p:nvPr/>
-        </p:nvSpPr>
-        <p:spPr>
-          <a:xfrm>
-            <a:off x="571500" y="571500"/>
-            <a:ext cx="11601450" cy="561975"/>
-          </a:xfrm>
-          <a:prstGeom prst="rect">
-            <a:avLst/>
-          </a:prstGeom>
-          <a:noFill/>
-        </p:spPr>
-        <p:txBody>
-          <a:bodyPr wrap="square" lIns="0" rIns="0" tIns="0" bIns="0" anchor="t">
-            <a:spAutoFit/>
-          </a:bodyPr>
-          <a:lstStyle/>
-          <a:p>
-            <a:pPr algn="l"/>
-            <a:r>
-              <a:rPr b="1" sz="3450" i="0" u="none">
-                <a:solidFill>
-                  <a:srgbClr val="FFFFFF"/>
-                </a:solidFill>
-                <a:latin typeface="Space Grotesk"/>
-              </a:rPr>
-              <a:t>Initiative </a:t>
-            </a:r>
-            <a:r>
-              <a:rPr b="1" sz="3450" i="0" u="none">
-                <a:solidFill>
-                  <a:srgbClr val="38BDF8"/>
-                </a:solidFill>
-                <a:latin typeface="Space Grotesk"/>
-              </a:rPr>
-              <a:t>Background</a:t>
-            </a:r>
-          </a:p>
-        </p:txBody>
-      </p:sp>
-      <p:sp>
-        <p:nvSpPr>
-          <p:cNvPr id="14" name="Rectangle 13"/>
-          <p:cNvSpPr/>
-          <p:nvPr/>
-        </p:nvSpPr>
-        <p:spPr>
-          <a:xfrm>
-            <a:off x="571500" y="1266825"/>
-            <a:ext cx="11049000" cy="9525"/>
-          </a:xfrm>
-          <a:prstGeom prst="rect">
-            <a:avLst/>
-          </a:prstGeom>
-          <a:solidFill>
-            <a:srgbClr val="FFFFFF"/>
-          </a:solidFill>
-          <a:ln>
-            <a:noFill/>
-          </a:ln>
-          <a:effectLst/>
-        </p:spPr>
-        <p:style>
-          <a:lnRef idx="1">
-            <a:schemeClr val="accent1"/>
-          </a:lnRef>
-          <a:fillRef idx="3">
-            <a:schemeClr val="accent1"/>
-          </a:fillRef>
-          <a:effectRef idx="2">
-            <a:schemeClr val="accent1"/>
-          </a:effectRef>
-          <a:fontRef idx="minor">
-            <a:schemeClr val="lt1"/>
-          </a:fontRef>
-        </p:style>
-        <p:txBody>
-          <a:bodyPr rtlCol="0" anchor="ctr"/>
-          <a:lstStyle/>
-          <a:p>
-            <a:pPr algn="ctr"/>
-          </a:p>
-        </p:txBody>
-      </p:sp>
-    </p:spTree>
-  </p:cSld>
-  <p:clrMapOvr>
-    <a:masterClrMapping/>
-  </p:clrMapOvr>
-</p:sld>
-</file>
-
-<file path=ppt/slides/slide4.xml><?xml version="1.0" encoding="utf-8"?>
-<p:sld xmlns:a="http://schemas.openxmlformats.org/drawingml/2006/main" xmlns:p="http://schemas.openxmlformats.org/presentationml/2006/main" xmlns:r="http://schemas.openxmlformats.org/officeDocument/2006/relationships">
-  <p:cSld>
-    <p:spTree>
-      <p:nvGrpSpPr>
-        <p:cNvPr id="1" name=""/>
-        <p:cNvGrpSpPr/>
-        <p:nvPr/>
-      </p:nvGrpSpPr>
-      <p:grpSpPr/>
-      <p:pic>
-        <p:nvPicPr>
-          <p:cNvPr id="2" name="Picture 1" descr="image.png"/>
-          <p:cNvPicPr>
-            <a:picLocks noChangeAspect="1"/>
-          </p:cNvPicPr>
-          <p:nvPr/>
-        </p:nvPicPr>
-        <p:blipFill>
-          <a:blip r:embed="rId2"/>
-          <a:stretch>
-            <a:fillRect/>
-          </a:stretch>
-        </p:blipFill>
-        <p:spPr>
-          <a:xfrm>
-            <a:off x="0" y="0"/>
-            <a:ext cx="12192000" cy="6858000"/>
-          </a:xfrm>
-          <a:prstGeom prst="rect">
-            <a:avLst/>
-          </a:prstGeom>
-        </p:spPr>
-      </p:pic>
-      <p:pic>
-        <p:nvPicPr>
-          <p:cNvPr id="3" name="Picture 2" descr="image.png"/>
-          <p:cNvPicPr>
-            <a:picLocks noChangeAspect="1"/>
-          </p:cNvPicPr>
-          <p:nvPr/>
-        </p:nvPicPr>
-        <p:blipFill>
-          <a:blip r:embed="rId3"/>
-          <a:stretch>
-            <a:fillRect/>
-          </a:stretch>
-        </p:blipFill>
-        <p:spPr>
-          <a:xfrm>
-            <a:off x="571500" y="1085850"/>
-            <a:ext cx="11049000" cy="4572000"/>
-          </a:xfrm>
-          <a:prstGeom prst="rect">
-            <a:avLst/>
-          </a:prstGeom>
-        </p:spPr>
-      </p:pic>
-      <p:sp>
-        <p:nvSpPr>
-          <p:cNvPr id="4" name="TextBox 3"/>
-          <p:cNvSpPr txBox="1"/>
-          <p:nvPr/>
-        </p:nvSpPr>
-        <p:spPr>
-          <a:xfrm>
-            <a:off x="1809750" y="5943600"/>
-            <a:ext cx="8572500" cy="914400"/>
-          </a:xfrm>
-          <a:prstGeom prst="rect">
-            <a:avLst/>
-          </a:prstGeom>
-          <a:noFill/>
-        </p:spPr>
-        <p:txBody>
-          <a:bodyPr wrap="square" lIns="0" rIns="0" tIns="0" bIns="0" anchor="t">
-            <a:spAutoFit/>
-          </a:bodyPr>
-          <a:lstStyle/>
-          <a:p>
-            <a:pPr algn="ctr">
-              <a:lnSpc>
-                <a:spcPts val="2400"/>
-              </a:lnSpc>
-            </a:pPr>
-            <a:r>
-              <a:rPr b="0" sz="1500" i="1" u="none">
-                <a:solidFill>
-                  <a:srgbClr val="9CA3AF"/>
-                </a:solidFill>
-                <a:latin typeface="Outfit"/>
-              </a:rPr>
-              <a:t>Fig 1.0: Master ER Dashboard.</a:t>
-            </a:r>
-            <a:r>
-              <a:rPr b="0" sz="1500" i="0" u="none">
-                <a:solidFill>
-                  <a:srgbClr val="9CA3AF"/>
-                </a:solidFill>
-                <a:latin typeface="Outfit"/>
-              </a:rPr>
-              <a:t> The interface aggregates key performance indicators, admission statuses, departmental referrals, and demographic distributions into a single, interactive pane of glass.</a:t>
-            </a:r>
-          </a:p>
-        </p:txBody>
-      </p:sp>
-      <p:pic>
-        <p:nvPicPr>
-          <p:cNvPr id="5" name="Picture 4" descr="image.png"/>
-          <p:cNvPicPr>
-            <a:picLocks noChangeAspect="1"/>
-          </p:cNvPicPr>
-          <p:nvPr/>
-        </p:nvPicPr>
-        <p:blipFill>
-          <a:blip r:embed="rId4"/>
-          <a:stretch>
-            <a:fillRect/>
-          </a:stretch>
-        </p:blipFill>
-        <p:spPr>
-          <a:xfrm>
-            <a:off x="733425" y="1247775"/>
-            <a:ext cx="10725150" cy="4248150"/>
-          </a:xfrm>
-          <a:prstGeom prst="rect">
-            <a:avLst/>
-          </a:prstGeom>
-        </p:spPr>
-      </p:pic>
-      <p:sp>
-        <p:nvSpPr>
-          <p:cNvPr id="6" name="TextBox 5"/>
-          <p:cNvSpPr txBox="1"/>
-          <p:nvPr/>
-        </p:nvSpPr>
-        <p:spPr>
-          <a:xfrm>
-            <a:off x="571500" y="0"/>
-            <a:ext cx="11601450" cy="561975"/>
-          </a:xfrm>
-          <a:prstGeom prst="rect">
-            <a:avLst/>
-          </a:prstGeom>
-          <a:noFill/>
-        </p:spPr>
-        <p:txBody>
-          <a:bodyPr wrap="square" lIns="0" rIns="0" tIns="0" bIns="0" anchor="t">
-            <a:spAutoFit/>
-          </a:bodyPr>
-          <a:lstStyle/>
-          <a:p>
-            <a:pPr algn="l"/>
-            <a:r>
-              <a:rPr b="1" sz="3450" i="0" u="none">
-                <a:solidFill>
-                  <a:srgbClr val="FFFFFF"/>
-                </a:solidFill>
-                <a:latin typeface="Space Grotesk"/>
-              </a:rPr>
-              <a:t>Executive </a:t>
-            </a:r>
-            <a:r>
-              <a:rPr b="1" sz="3450" i="0" u="none">
-                <a:solidFill>
-                  <a:srgbClr val="38BDF8"/>
-                </a:solidFill>
-                <a:latin typeface="Space Grotesk"/>
-              </a:rPr>
-              <a:t>Dashboard View</a:t>
-            </a:r>
-          </a:p>
-        </p:txBody>
-      </p:sp>
-      <p:sp>
-        <p:nvSpPr>
-          <p:cNvPr id="7" name="Rectangle 6"/>
-          <p:cNvSpPr/>
-          <p:nvPr/>
-        </p:nvSpPr>
-        <p:spPr>
-          <a:xfrm>
-            <a:off x="571500" y="695325"/>
-            <a:ext cx="11049000" cy="9525"/>
-          </a:xfrm>
-          <a:prstGeom prst="rect">
-            <a:avLst/>
-          </a:prstGeom>
-          <a:solidFill>
-            <a:srgbClr val="FFFFFF"/>
-          </a:solidFill>
-          <a:ln>
-            <a:noFill/>
-          </a:ln>
-          <a:effectLst/>
-        </p:spPr>
-        <p:style>
-          <a:lnRef idx="1">
-            <a:schemeClr val="accent1"/>
-          </a:lnRef>
-          <a:fillRef idx="3">
-            <a:schemeClr val="accent1"/>
-          </a:fillRef>
-          <a:effectRef idx="2">
-            <a:schemeClr val="accent1"/>
-          </a:effectRef>
-          <a:fontRef idx="minor">
-            <a:schemeClr val="lt1"/>
-          </a:fontRef>
-        </p:style>
-        <p:txBody>
-          <a:bodyPr rtlCol="0" anchor="ctr"/>
-          <a:lstStyle/>
-          <a:p>
-            <a:pPr algn="ctr"/>
-          </a:p>
-        </p:txBody>
-      </p:sp>
-    </p:spTree>
-  </p:cSld>
-  <p:clrMapOvr>
-    <a:masterClrMapping/>
-  </p:clrMapOvr>
-</p:sld>
-</file>
-
-<file path=ppt/slides/slide5.xml><?xml version="1.0" encoding="utf-8"?>
-<p:sld xmlns:a="http://schemas.openxmlformats.org/drawingml/2006/main" xmlns:p="http://schemas.openxmlformats.org/presentationml/2006/main" xmlns:r="http://schemas.openxmlformats.org/officeDocument/2006/relationships">
-  <p:cSld>
-    <p:spTree>
-      <p:nvGrpSpPr>
-        <p:cNvPr id="1" name=""/>
-        <p:cNvGrpSpPr/>
-        <p:nvPr/>
-      </p:nvGrpSpPr>
-      <p:grpSpPr/>
-      <p:pic>
-        <p:nvPicPr>
-          <p:cNvPr id="2" name="Picture 1" descr="image.png"/>
-          <p:cNvPicPr>
-            <a:picLocks noChangeAspect="1"/>
-          </p:cNvPicPr>
-          <p:nvPr/>
-        </p:nvPicPr>
-        <p:blipFill>
-          <a:blip r:embed="rId2"/>
-          <a:stretch>
-            <a:fillRect/>
-          </a:stretch>
-        </p:blipFill>
-        <p:spPr>
-          <a:xfrm>
-            <a:off x="0" y="0"/>
-            <a:ext cx="12192000" cy="6858000"/>
-          </a:xfrm>
-          <a:prstGeom prst="rect">
-            <a:avLst/>
-          </a:prstGeom>
-        </p:spPr>
-      </p:pic>
-      <p:sp>
-        <p:nvSpPr>
-          <p:cNvPr id="3" name="TextBox 2"/>
-          <p:cNvSpPr txBox="1"/>
-          <p:nvPr/>
-        </p:nvSpPr>
-        <p:spPr>
-          <a:xfrm>
-            <a:off x="295275" y="2490787"/>
-            <a:ext cx="11601450" cy="971550"/>
-          </a:xfrm>
-          <a:prstGeom prst="rect">
-            <a:avLst/>
-          </a:prstGeom>
-          <a:noFill/>
-        </p:spPr>
-        <p:txBody>
-          <a:bodyPr wrap="square" lIns="0" rIns="0" tIns="0" bIns="0" anchor="t">
-            <a:spAutoFit/>
-          </a:bodyPr>
-          <a:lstStyle/>
-          <a:p>
-            <a:pPr algn="ctr"/>
-            <a:r>
-              <a:rPr b="1" sz="6000" i="0" u="none">
-                <a:solidFill>
-                  <a:srgbClr val="FFFFFF"/>
-                </a:solidFill>
-                <a:latin typeface="Space Grotesk"/>
-              </a:rPr>
-              <a:t>Core Performance Metrics</a:t>
-            </a:r>
-          </a:p>
-        </p:txBody>
-      </p:sp>
-      <p:sp>
-        <p:nvSpPr>
-          <p:cNvPr id="4" name="TextBox 3"/>
-          <p:cNvSpPr txBox="1"/>
-          <p:nvPr/>
-        </p:nvSpPr>
-        <p:spPr>
-          <a:xfrm>
-            <a:off x="571500" y="4062412"/>
-            <a:ext cx="11049000" cy="304800"/>
-          </a:xfrm>
-          <a:prstGeom prst="rect">
-            <a:avLst/>
-          </a:prstGeom>
-          <a:noFill/>
-        </p:spPr>
-        <p:txBody>
-          <a:bodyPr wrap="square" lIns="0" rIns="0" tIns="0" bIns="0" anchor="t">
-            <a:spAutoFit/>
-          </a:bodyPr>
-          <a:lstStyle/>
-          <a:p>
-            <a:pPr algn="ctr">
-              <a:lnSpc>
-                <a:spcPts val="2400"/>
-              </a:lnSpc>
-            </a:pPr>
-            <a:r>
-              <a:rPr b="0" sz="1500" i="0" u="none">
-                <a:solidFill>
-                  <a:srgbClr val="9CA3AF"/>
-                </a:solidFill>
-                <a:latin typeface="Outfit"/>
-              </a:rPr>
-              <a:t>Evaluating the top-level Key Performance Indicators (KPIs).</a:t>
-            </a:r>
-          </a:p>
-        </p:txBody>
-      </p:sp>
-    </p:spTree>
-  </p:cSld>
-  <p:clrMapOvr>
-    <a:masterClrMapping/>
-  </p:clrMapOvr>
-</p:sld>
-</file>
-
-<file path=ppt/slides/slide6.xml><?xml version="1.0" encoding="utf-8"?>
-<p:sld xmlns:a="http://schemas.openxmlformats.org/drawingml/2006/main" xmlns:p="http://schemas.openxmlformats.org/presentationml/2006/main" xmlns:r="http://schemas.openxmlformats.org/officeDocument/2006/relationships">
-  <p:cSld>
-    <p:spTree>
-      <p:nvGrpSpPr>
-        <p:cNvPr id="1" name=""/>
-        <p:cNvGrpSpPr/>
-        <p:nvPr/>
-      </p:nvGrpSpPr>
-      <p:grpSpPr/>
-      <p:pic>
-        <p:nvPicPr>
-          <p:cNvPr id="2" name="Picture 1" descr="image.png"/>
-          <p:cNvPicPr>
-            <a:picLocks noChangeAspect="1"/>
-          </p:cNvPicPr>
-          <p:nvPr/>
-        </p:nvPicPr>
-        <p:blipFill>
-          <a:blip r:embed="rId2"/>
-          <a:stretch>
-            <a:fillRect/>
-          </a:stretch>
-        </p:blipFill>
-        <p:spPr>
-          <a:xfrm>
-            <a:off x="0" y="0"/>
-            <a:ext cx="12192000" cy="6858000"/>
-          </a:xfrm>
-          <a:prstGeom prst="rect">
-            <a:avLst/>
-          </a:prstGeom>
-        </p:spPr>
-      </p:pic>
-      <p:pic>
-        <p:nvPicPr>
-          <p:cNvPr id="3" name="Picture 2" descr="image.png"/>
-          <p:cNvPicPr>
-            <a:picLocks noChangeAspect="1"/>
-          </p:cNvPicPr>
-          <p:nvPr/>
-        </p:nvPicPr>
-        <p:blipFill>
-          <a:blip r:embed="rId3"/>
-          <a:stretch>
-            <a:fillRect/>
-          </a:stretch>
-        </p:blipFill>
-        <p:spPr>
-          <a:xfrm>
-            <a:off x="6381750" y="1576387"/>
-            <a:ext cx="5238750" cy="1438275"/>
-          </a:xfrm>
-          <a:prstGeom prst="rect">
-            <a:avLst/>
-          </a:prstGeom>
-        </p:spPr>
-      </p:pic>
-      <p:pic>
-        <p:nvPicPr>
-          <p:cNvPr id="4" name="Picture 3" descr="image.png"/>
-          <p:cNvPicPr>
-            <a:picLocks noChangeAspect="1"/>
-          </p:cNvPicPr>
-          <p:nvPr/>
-        </p:nvPicPr>
-        <p:blipFill>
-          <a:blip r:embed="rId4"/>
-          <a:stretch>
-            <a:fillRect/>
-          </a:stretch>
-        </p:blipFill>
-        <p:spPr>
-          <a:xfrm>
-            <a:off x="6381750" y="3252787"/>
-            <a:ext cx="5238750" cy="1438275"/>
-          </a:xfrm>
-          <a:prstGeom prst="rect">
-            <a:avLst/>
-          </a:prstGeom>
-        </p:spPr>
-      </p:pic>
-      <p:pic>
-        <p:nvPicPr>
-          <p:cNvPr id="5" name="Picture 4" descr="image.png"/>
-          <p:cNvPicPr>
-            <a:picLocks noChangeAspect="1"/>
-          </p:cNvPicPr>
-          <p:nvPr/>
-        </p:nvPicPr>
-        <p:blipFill>
-          <a:blip r:embed="rId5"/>
-          <a:stretch>
-            <a:fillRect/>
-          </a:stretch>
-        </p:blipFill>
-        <p:spPr>
-          <a:xfrm>
-            <a:off x="6381750" y="4929187"/>
-            <a:ext cx="5238750" cy="1438275"/>
-          </a:xfrm>
-          <a:prstGeom prst="rect">
-            <a:avLst/>
-          </a:prstGeom>
-        </p:spPr>
-      </p:pic>
-      <p:sp>
-        <p:nvSpPr>
-          <p:cNvPr id="6" name="TextBox 5"/>
-          <p:cNvSpPr txBox="1"/>
-          <p:nvPr/>
-        </p:nvSpPr>
-        <p:spPr>
-          <a:xfrm>
-            <a:off x="571500" y="1576387"/>
-            <a:ext cx="5500687" cy="342900"/>
-          </a:xfrm>
-          <a:prstGeom prst="rect">
-            <a:avLst/>
-          </a:prstGeom>
-          <a:noFill/>
-        </p:spPr>
-        <p:txBody>
-          <a:bodyPr wrap="square" lIns="0" rIns="0" tIns="0" bIns="0" anchor="t">
-            <a:spAutoFit/>
-          </a:bodyPr>
-          <a:lstStyle/>
-          <a:p>
-            <a:pPr algn="l"/>
-            <a:r>
-              <a:rPr b="1" sz="2100" i="0" u="none">
-                <a:solidFill>
-                  <a:srgbClr val="E5E7EB"/>
-                </a:solidFill>
-                <a:latin typeface="Space Grotesk"/>
-              </a:rPr>
-              <a:t>Operational Baselines</a:t>
-            </a:r>
-          </a:p>
-        </p:txBody>
-      </p:sp>
-      <p:sp>
-        <p:nvSpPr>
-          <p:cNvPr id="7" name="TextBox 6"/>
-          <p:cNvSpPr txBox="1"/>
-          <p:nvPr/>
-        </p:nvSpPr>
-        <p:spPr>
-          <a:xfrm>
-            <a:off x="571500" y="2062162"/>
-            <a:ext cx="5238750" cy="914400"/>
-          </a:xfrm>
-          <a:prstGeom prst="rect">
-            <a:avLst/>
-          </a:prstGeom>
-          <a:noFill/>
-        </p:spPr>
-        <p:txBody>
-          <a:bodyPr wrap="square" lIns="0" rIns="0" tIns="0" bIns="0" anchor="t">
-            <a:spAutoFit/>
-          </a:bodyPr>
-          <a:lstStyle/>
-          <a:p>
-            <a:pPr algn="l">
-              <a:lnSpc>
-                <a:spcPts val="2400"/>
-              </a:lnSpc>
-            </a:pPr>
-            <a:r>
-              <a:rPr b="0" sz="1500" i="0" u="none">
-                <a:solidFill>
-                  <a:srgbClr val="9CA3AF"/>
-                </a:solidFill>
-                <a:latin typeface="Outfit"/>
-              </a:rPr>
-              <a:t>The dashboard isolates three primary metrics that define the current state of our emergency room efficiency based on the filtered selection.</a:t>
-            </a:r>
-          </a:p>
-        </p:txBody>
-      </p:sp>
-      <p:sp>
-        <p:nvSpPr>
-          <p:cNvPr id="8" name="TextBox 7"/>
-          <p:cNvSpPr txBox="1"/>
-          <p:nvPr/>
-        </p:nvSpPr>
-        <p:spPr>
-          <a:xfrm>
-            <a:off x="571500" y="3167062"/>
-            <a:ext cx="5238750" cy="1524000"/>
-          </a:xfrm>
-          <a:prstGeom prst="rect">
-            <a:avLst/>
-          </a:prstGeom>
-          <a:noFill/>
-        </p:spPr>
-        <p:txBody>
-          <a:bodyPr wrap="square" lIns="0" rIns="0" tIns="0" bIns="0" anchor="t">
-            <a:spAutoFit/>
-          </a:bodyPr>
-          <a:lstStyle/>
-          <a:p>
-            <a:pPr algn="l">
-              <a:lnSpc>
-                <a:spcPts val="2400"/>
-              </a:lnSpc>
-            </a:pPr>
-            <a:r>
-              <a:rPr b="0" sz="1500" i="0" u="none">
-                <a:solidFill>
-                  <a:srgbClr val="9CA3AF"/>
-                </a:solidFill>
-                <a:latin typeface="Outfit"/>
-              </a:rPr>
-              <a:t>While patient volume remains steady, the </a:t>
-            </a:r>
-            <a:r>
-              <a:rPr b="1" sz="1500" i="0" u="none">
-                <a:solidFill>
-                  <a:srgbClr val="9CA3AF"/>
-                </a:solidFill>
-                <a:latin typeface="Outfit"/>
-              </a:rPr>
-              <a:t>Average Wait Time of nearly 35 minutes</a:t>
-            </a:r>
-            <a:r>
-              <a:rPr b="0" sz="1500" i="0" u="none">
-                <a:solidFill>
-                  <a:srgbClr val="9CA3AF"/>
-                </a:solidFill>
-                <a:latin typeface="Outfit"/>
-              </a:rPr>
-              <a:t> exceeds standard target SLAs. Furthermore, the </a:t>
-            </a:r>
-            <a:r>
-              <a:rPr b="1" sz="1500" i="0" u="none">
-                <a:solidFill>
-                  <a:srgbClr val="9CA3AF"/>
-                </a:solidFill>
-                <a:latin typeface="Outfit"/>
-              </a:rPr>
-              <a:t>Patient Satisfaction Score (5.30)</a:t>
-            </a:r>
-            <a:r>
-              <a:rPr b="0" sz="1500" i="0" u="none">
-                <a:solidFill>
-                  <a:srgbClr val="9CA3AF"/>
-                </a:solidFill>
-                <a:latin typeface="Outfit"/>
-              </a:rPr>
-              <a:t> indicates average-to-poor patient sentiment, directly correlating with extended wait times in the triage queue.</a:t>
-            </a:r>
-          </a:p>
-        </p:txBody>
-      </p:sp>
-      <p:pic>
-        <p:nvPicPr>
-          <p:cNvPr id="9" name="Picture 8" descr="image.png"/>
-          <p:cNvPicPr>
-            <a:picLocks noChangeAspect="1"/>
-          </p:cNvPicPr>
-          <p:nvPr/>
-        </p:nvPicPr>
-        <p:blipFill>
-          <a:blip r:embed="rId6"/>
-          <a:stretch>
-            <a:fillRect/>
-          </a:stretch>
-        </p:blipFill>
-        <p:spPr>
-          <a:xfrm>
-            <a:off x="10753725" y="2066925"/>
-            <a:ext cx="571500" cy="457200"/>
-          </a:xfrm>
-          <a:prstGeom prst="rect">
-            <a:avLst/>
-          </a:prstGeom>
-        </p:spPr>
-      </p:pic>
-      <p:pic>
-        <p:nvPicPr>
-          <p:cNvPr id="10" name="Picture 9" descr="image.png"/>
-          <p:cNvPicPr>
-            <a:picLocks noChangeAspect="1"/>
-          </p:cNvPicPr>
-          <p:nvPr/>
-        </p:nvPicPr>
-        <p:blipFill>
-          <a:blip r:embed="rId7"/>
-          <a:stretch>
-            <a:fillRect/>
-          </a:stretch>
-        </p:blipFill>
-        <p:spPr>
-          <a:xfrm>
-            <a:off x="10982325" y="3743325"/>
-            <a:ext cx="342900" cy="457200"/>
-          </a:xfrm>
-          <a:prstGeom prst="rect">
-            <a:avLst/>
-          </a:prstGeom>
-        </p:spPr>
-      </p:pic>
-      <p:pic>
-        <p:nvPicPr>
-          <p:cNvPr id="11" name="Picture 10" descr="image.png"/>
-          <p:cNvPicPr>
-            <a:picLocks noChangeAspect="1"/>
-          </p:cNvPicPr>
-          <p:nvPr/>
-        </p:nvPicPr>
-        <p:blipFill>
-          <a:blip r:embed="rId8"/>
-          <a:stretch>
-            <a:fillRect/>
-          </a:stretch>
-        </p:blipFill>
-        <p:spPr>
-          <a:xfrm>
-            <a:off x="10810875" y="5419725"/>
-            <a:ext cx="514350" cy="457200"/>
-          </a:xfrm>
-          <a:prstGeom prst="rect">
-            <a:avLst/>
-          </a:prstGeom>
-        </p:spPr>
-      </p:pic>
-      <p:sp>
-        <p:nvSpPr>
-          <p:cNvPr id="12" name="TextBox 11"/>
-          <p:cNvSpPr txBox="1"/>
-          <p:nvPr/>
-        </p:nvSpPr>
-        <p:spPr>
-          <a:xfrm>
-            <a:off x="6705600" y="1871662"/>
-            <a:ext cx="1452562" cy="609600"/>
-          </a:xfrm>
-          <a:prstGeom prst="rect">
-            <a:avLst/>
-          </a:prstGeom>
-          <a:noFill/>
-        </p:spPr>
-        <p:txBody>
-          <a:bodyPr wrap="square" lIns="0" rIns="0" tIns="0" bIns="0" anchor="t">
-            <a:spAutoFit/>
-          </a:bodyPr>
-          <a:lstStyle/>
-          <a:p>
-            <a:pPr algn="l">
-              <a:lnSpc>
-                <a:spcPts val="4800"/>
-              </a:lnSpc>
-            </a:pPr>
-            <a:r>
-              <a:rPr b="1" sz="4800" i="0" u="none">
-                <a:solidFill>
-                  <a:srgbClr val="FFFFFF"/>
-                </a:solidFill>
-                <a:latin typeface="Space Grotesk"/>
-              </a:rPr>
-              <a:t>479</a:t>
-            </a:r>
-          </a:p>
-        </p:txBody>
-      </p:sp>
-      <p:sp>
-        <p:nvSpPr>
-          <p:cNvPr id="13" name="TextBox 12"/>
-          <p:cNvSpPr txBox="1"/>
-          <p:nvPr/>
-        </p:nvSpPr>
-        <p:spPr>
-          <a:xfrm>
-            <a:off x="6705600" y="2528887"/>
-            <a:ext cx="1452562" cy="190500"/>
-          </a:xfrm>
-          <a:prstGeom prst="rect">
-            <a:avLst/>
-          </a:prstGeom>
-          <a:noFill/>
-        </p:spPr>
-        <p:txBody>
-          <a:bodyPr wrap="square" lIns="0" rIns="0" tIns="0" bIns="0" anchor="t">
-            <a:spAutoFit/>
-          </a:bodyPr>
-          <a:lstStyle/>
-          <a:p>
-            <a:pPr algn="l"/>
-            <a:r>
-              <a:rPr b="0" sz="1200" i="0" u="none">
-                <a:solidFill>
-                  <a:srgbClr val="9CA3AF"/>
-                </a:solidFill>
-                <a:latin typeface="Outfit SemiBold"/>
-              </a:rPr>
-              <a:t>NO. OF PATIENTS</a:t>
-            </a:r>
-          </a:p>
-        </p:txBody>
-      </p:sp>
-      <p:sp>
-        <p:nvSpPr>
-          <p:cNvPr id="14" name="TextBox 13"/>
-          <p:cNvSpPr txBox="1"/>
-          <p:nvPr/>
-        </p:nvSpPr>
-        <p:spPr>
-          <a:xfrm>
-            <a:off x="6705600" y="3548062"/>
-            <a:ext cx="1838325" cy="609600"/>
-          </a:xfrm>
-          <a:prstGeom prst="rect">
-            <a:avLst/>
-          </a:prstGeom>
-          <a:noFill/>
-        </p:spPr>
-        <p:txBody>
-          <a:bodyPr wrap="square" lIns="0" rIns="0" tIns="0" bIns="0" anchor="t">
-            <a:spAutoFit/>
-          </a:bodyPr>
-          <a:lstStyle/>
-          <a:p>
-            <a:pPr algn="l">
-              <a:lnSpc>
-                <a:spcPts val="4800"/>
-              </a:lnSpc>
-            </a:pPr>
-            <a:r>
-              <a:rPr b="1" sz="4800" i="0" u="none">
-                <a:solidFill>
-                  <a:srgbClr val="FFFFFF"/>
-                </a:solidFill>
-                <a:latin typeface="Space Grotesk"/>
-              </a:rPr>
-              <a:t>34.90</a:t>
-            </a:r>
-          </a:p>
-        </p:txBody>
-      </p:sp>
-      <p:sp>
-        <p:nvSpPr>
-          <p:cNvPr id="15" name="TextBox 14"/>
-          <p:cNvSpPr txBox="1"/>
-          <p:nvPr/>
-        </p:nvSpPr>
-        <p:spPr>
-          <a:xfrm>
-            <a:off x="6705600" y="4205287"/>
-            <a:ext cx="1838325" cy="190500"/>
-          </a:xfrm>
-          <a:prstGeom prst="rect">
-            <a:avLst/>
-          </a:prstGeom>
-          <a:noFill/>
-        </p:spPr>
-        <p:txBody>
-          <a:bodyPr wrap="square" lIns="0" rIns="0" tIns="0" bIns="0" anchor="t">
-            <a:spAutoFit/>
-          </a:bodyPr>
-          <a:lstStyle/>
-          <a:p>
-            <a:pPr algn="l"/>
-            <a:r>
-              <a:rPr b="0" sz="1200" i="0" u="none">
-                <a:solidFill>
-                  <a:srgbClr val="9CA3AF"/>
-                </a:solidFill>
-                <a:latin typeface="Outfit SemiBold"/>
-              </a:rPr>
-              <a:t>AVG. WAIT TIME (MIN)</a:t>
-            </a:r>
-          </a:p>
-        </p:txBody>
-      </p:sp>
-      <p:sp>
-        <p:nvSpPr>
-          <p:cNvPr id="16" name="TextBox 15"/>
-          <p:cNvSpPr txBox="1"/>
-          <p:nvPr/>
-        </p:nvSpPr>
-        <p:spPr>
-          <a:xfrm>
-            <a:off x="6705600" y="5224462"/>
-            <a:ext cx="2600325" cy="609600"/>
-          </a:xfrm>
-          <a:prstGeom prst="rect">
-            <a:avLst/>
-          </a:prstGeom>
-          <a:noFill/>
-        </p:spPr>
-        <p:txBody>
-          <a:bodyPr wrap="square" lIns="0" rIns="0" tIns="0" bIns="0" anchor="t">
-            <a:spAutoFit/>
-          </a:bodyPr>
-          <a:lstStyle/>
-          <a:p>
-            <a:pPr algn="l">
-              <a:lnSpc>
-                <a:spcPts val="4800"/>
-              </a:lnSpc>
-            </a:pPr>
-            <a:r>
-              <a:rPr b="1" sz="4800" i="0" u="none">
-                <a:solidFill>
-                  <a:srgbClr val="FFFFFF"/>
-                </a:solidFill>
-                <a:latin typeface="Space Grotesk"/>
-              </a:rPr>
-              <a:t>5.30</a:t>
-            </a:r>
-          </a:p>
-        </p:txBody>
-      </p:sp>
-      <p:sp>
-        <p:nvSpPr>
-          <p:cNvPr id="17" name="TextBox 16"/>
-          <p:cNvSpPr txBox="1"/>
-          <p:nvPr/>
-        </p:nvSpPr>
-        <p:spPr>
-          <a:xfrm>
-            <a:off x="6705600" y="5881687"/>
-            <a:ext cx="2600325" cy="190500"/>
-          </a:xfrm>
-          <a:prstGeom prst="rect">
-            <a:avLst/>
-          </a:prstGeom>
-          <a:noFill/>
-        </p:spPr>
-        <p:txBody>
-          <a:bodyPr wrap="square" lIns="0" rIns="0" tIns="0" bIns="0" anchor="t">
-            <a:spAutoFit/>
-          </a:bodyPr>
-          <a:lstStyle/>
-          <a:p>
-            <a:pPr algn="l"/>
-            <a:r>
-              <a:rPr b="0" sz="1200" i="0" u="none">
-                <a:solidFill>
-                  <a:srgbClr val="9CA3AF"/>
-                </a:solidFill>
-                <a:latin typeface="Outfit SemiBold"/>
-              </a:rPr>
-              <a:t>PATIENT SATISFACTION SCORE</a:t>
-            </a:r>
-          </a:p>
-        </p:txBody>
-      </p:sp>
-      <p:sp>
-        <p:nvSpPr>
-          <p:cNvPr id="18" name="TextBox 17"/>
-          <p:cNvSpPr txBox="1"/>
-          <p:nvPr/>
-        </p:nvSpPr>
-        <p:spPr>
-          <a:xfrm>
-            <a:off x="571500" y="490537"/>
-            <a:ext cx="11601450" cy="561975"/>
-          </a:xfrm>
-          <a:prstGeom prst="rect">
-            <a:avLst/>
-          </a:prstGeom>
-          <a:noFill/>
-        </p:spPr>
-        <p:txBody>
-          <a:bodyPr wrap="square" lIns="0" rIns="0" tIns="0" bIns="0" anchor="t">
-            <a:spAutoFit/>
-          </a:bodyPr>
-          <a:lstStyle/>
-          <a:p>
-            <a:pPr algn="l"/>
-            <a:r>
-              <a:rPr b="1" sz="3450" i="0" u="none">
-                <a:solidFill>
-                  <a:srgbClr val="FFFFFF"/>
-                </a:solidFill>
-                <a:latin typeface="Space Grotesk"/>
-              </a:rPr>
-              <a:t>Top-Level </a:t>
-            </a:r>
-            <a:r>
-              <a:rPr b="1" sz="3450" i="0" u="none">
-                <a:solidFill>
-                  <a:srgbClr val="38BDF8"/>
-                </a:solidFill>
-                <a:latin typeface="Space Grotesk"/>
-              </a:rPr>
-              <a:t>KPI Summary</a:t>
-            </a:r>
-          </a:p>
-        </p:txBody>
-      </p:sp>
-      <p:sp>
-        <p:nvSpPr>
-          <p:cNvPr id="19" name="Rectangle 18"/>
-          <p:cNvSpPr/>
-          <p:nvPr/>
-        </p:nvSpPr>
-        <p:spPr>
-          <a:xfrm>
-            <a:off x="571500" y="1185862"/>
-            <a:ext cx="11049000" cy="9525"/>
-          </a:xfrm>
-          <a:prstGeom prst="rect">
-            <a:avLst/>
-          </a:prstGeom>
-          <a:solidFill>
-            <a:srgbClr val="FFFFFF"/>
-          </a:solidFill>
-          <a:ln>
-            <a:noFill/>
-          </a:ln>
-          <a:effectLst/>
-        </p:spPr>
-        <p:style>
-          <a:lnRef idx="1">
-            <a:schemeClr val="accent1"/>
-          </a:lnRef>
-          <a:fillRef idx="3">
-            <a:schemeClr val="accent1"/>
-          </a:fillRef>
-          <a:effectRef idx="2">
-            <a:schemeClr val="accent1"/>
-          </a:effectRef>
-          <a:fontRef idx="minor">
-            <a:schemeClr val="lt1"/>
-          </a:fontRef>
-        </p:style>
-        <p:txBody>
-          <a:bodyPr rtlCol="0" anchor="ctr"/>
-          <a:lstStyle/>
-          <a:p>
-            <a:pPr algn="ctr"/>
-          </a:p>
-        </p:txBody>
-      </p:sp>
-    </p:spTree>
-  </p:cSld>
-  <p:clrMapOvr>
-    <a:masterClrMapping/>
-  </p:clrMapOvr>
-</p:sld>
-</file>
-
-<file path=ppt/slides/slide7.xml><?xml version="1.0" encoding="utf-8"?>
-<p:sld xmlns:a="http://schemas.openxmlformats.org/drawingml/2006/main" xmlns:p="http://schemas.openxmlformats.org/presentationml/2006/main" xmlns:r="http://schemas.openxmlformats.org/officeDocument/2006/relationships">
-  <p:cSld>
-    <p:spTree>
-      <p:nvGrpSpPr>
-        <p:cNvPr id="1" name=""/>
-        <p:cNvGrpSpPr/>
-        <p:nvPr/>
-      </p:nvGrpSpPr>
-      <p:grpSpPr/>
-      <p:pic>
-        <p:nvPicPr>
-          <p:cNvPr id="2" name="Picture 1" descr="image.png"/>
-          <p:cNvPicPr>
-            <a:picLocks noChangeAspect="1"/>
-          </p:cNvPicPr>
-          <p:nvPr/>
-        </p:nvPicPr>
-        <p:blipFill>
-          <a:blip r:embed="rId2"/>
-          <a:stretch>
-            <a:fillRect/>
-          </a:stretch>
-        </p:blipFill>
-        <p:spPr>
-          <a:xfrm>
-            <a:off x="0" y="0"/>
-            <a:ext cx="12192000" cy="6858000"/>
-          </a:xfrm>
-          <a:prstGeom prst="rect">
-            <a:avLst/>
-          </a:prstGeom>
-        </p:spPr>
-      </p:pic>
-      <p:sp>
-        <p:nvSpPr>
-          <p:cNvPr id="3" name="TextBox 2"/>
-          <p:cNvSpPr txBox="1"/>
-          <p:nvPr/>
-        </p:nvSpPr>
-        <p:spPr>
-          <a:xfrm>
-            <a:off x="295275" y="2490787"/>
-            <a:ext cx="11601450" cy="971550"/>
-          </a:xfrm>
-          <a:prstGeom prst="rect">
-            <a:avLst/>
-          </a:prstGeom>
-          <a:noFill/>
-        </p:spPr>
-        <p:txBody>
-          <a:bodyPr wrap="square" lIns="0" rIns="0" tIns="0" bIns="0" anchor="t">
-            <a:spAutoFit/>
-          </a:bodyPr>
-          <a:lstStyle/>
-          <a:p>
-            <a:pPr algn="ctr"/>
-            <a:r>
-              <a:rPr b="1" sz="6000" i="0" u="none">
-                <a:solidFill>
-                  <a:srgbClr val="FFFFFF"/>
-                </a:solidFill>
-                <a:latin typeface="Space Grotesk"/>
-              </a:rPr>
-              <a:t>Patient Flow &amp; Efficiency</a:t>
-            </a:r>
-          </a:p>
-        </p:txBody>
-      </p:sp>
-      <p:sp>
-        <p:nvSpPr>
-          <p:cNvPr id="4" name="TextBox 3"/>
-          <p:cNvSpPr txBox="1"/>
-          <p:nvPr/>
-        </p:nvSpPr>
-        <p:spPr>
-          <a:xfrm>
-            <a:off x="571500" y="4062412"/>
-            <a:ext cx="11049000" cy="304800"/>
-          </a:xfrm>
-          <a:prstGeom prst="rect">
-            <a:avLst/>
-          </a:prstGeom>
-          <a:noFill/>
-        </p:spPr>
-        <p:txBody>
-          <a:bodyPr wrap="square" lIns="0" rIns="0" tIns="0" bIns="0" anchor="t">
-            <a:spAutoFit/>
-          </a:bodyPr>
-          <a:lstStyle/>
-          <a:p>
-            <a:pPr algn="ctr">
-              <a:lnSpc>
-                <a:spcPts val="2400"/>
-              </a:lnSpc>
-            </a:pPr>
-            <a:r>
-              <a:rPr b="0" sz="1500" i="0" u="none">
-                <a:solidFill>
-                  <a:srgbClr val="9CA3AF"/>
-                </a:solidFill>
-                <a:latin typeface="Outfit"/>
-              </a:rPr>
-              <a:t>Analyzing SLA compliance, attendance status, and hospital admission rates.</a:t>
-            </a:r>
-          </a:p>
-        </p:txBody>
-      </p:sp>
-    </p:spTree>
-  </p:cSld>
-  <p:clrMapOvr>
-    <a:masterClrMapping/>
-  </p:clrMapOvr>
-</p:sld>
-</file>
-
-<file path=ppt/slides/slide8.xml><?xml version="1.0" encoding="utf-8"?>
-<p:sld xmlns:a="http://schemas.openxmlformats.org/drawingml/2006/main" xmlns:p="http://schemas.openxmlformats.org/presentationml/2006/main" xmlns:r="http://schemas.openxmlformats.org/officeDocument/2006/relationships">
-  <p:cSld>
-    <p:spTree>
-      <p:nvGrpSpPr>
-        <p:cNvPr id="1" name=""/>
-        <p:cNvGrpSpPr/>
-        <p:nvPr/>
-      </p:nvGrpSpPr>
-      <p:grpSpPr/>
-      <p:pic>
-        <p:nvPicPr>
-          <p:cNvPr id="2" name="Picture 1" descr="image.png"/>
-          <p:cNvPicPr>
-            <a:picLocks noChangeAspect="1"/>
-          </p:cNvPicPr>
-          <p:nvPr/>
-        </p:nvPicPr>
-        <p:blipFill>
-          <a:blip r:embed="rId2"/>
-          <a:stretch>
-            <a:fillRect/>
-          </a:stretch>
-        </p:blipFill>
-        <p:spPr>
-          <a:xfrm>
-            <a:off x="0" y="0"/>
-            <a:ext cx="12192000" cy="6858000"/>
-          </a:xfrm>
-          <a:prstGeom prst="rect">
-            <a:avLst/>
-          </a:prstGeom>
-        </p:spPr>
-      </p:pic>
-      <p:pic>
-        <p:nvPicPr>
-          <p:cNvPr id="3" name="Picture 2" descr="image.png"/>
-          <p:cNvPicPr>
-            <a:picLocks noChangeAspect="1"/>
-          </p:cNvPicPr>
-          <p:nvPr/>
-        </p:nvPicPr>
-        <p:blipFill>
-          <a:blip r:embed="rId3"/>
-          <a:stretch>
-            <a:fillRect/>
-          </a:stretch>
-        </p:blipFill>
-        <p:spPr>
-          <a:xfrm>
-            <a:off x="571500" y="2124075"/>
-            <a:ext cx="11049000" cy="3695700"/>
-          </a:xfrm>
-          <a:prstGeom prst="rect">
-            <a:avLst/>
-          </a:prstGeom>
-        </p:spPr>
-      </p:pic>
-      <p:sp>
-        <p:nvSpPr>
-          <p:cNvPr id="4" name="TextBox 3"/>
-          <p:cNvSpPr txBox="1"/>
-          <p:nvPr/>
-        </p:nvSpPr>
-        <p:spPr>
-          <a:xfrm>
-            <a:off x="6381750" y="2719387"/>
-            <a:ext cx="5500687" cy="342900"/>
-          </a:xfrm>
-          <a:prstGeom prst="rect">
-            <a:avLst/>
-          </a:prstGeom>
-          <a:noFill/>
-        </p:spPr>
-        <p:txBody>
-          <a:bodyPr wrap="square" lIns="0" rIns="0" tIns="0" bIns="0" anchor="t">
-            <a:spAutoFit/>
-          </a:bodyPr>
-          <a:lstStyle/>
-          <a:p>
-            <a:pPr algn="l"/>
-            <a:r>
-              <a:rPr b="1" sz="2100" i="0" u="none">
-                <a:solidFill>
-                  <a:srgbClr val="E5E7EB"/>
-                </a:solidFill>
-                <a:latin typeface="Space Grotesk"/>
-              </a:rPr>
-              <a:t>Critical SLA Breach Identified</a:t>
-            </a:r>
-          </a:p>
-        </p:txBody>
-      </p:sp>
-      <p:sp>
-        <p:nvSpPr>
-          <p:cNvPr id="5" name="TextBox 4"/>
-          <p:cNvSpPr txBox="1"/>
-          <p:nvPr/>
-        </p:nvSpPr>
-        <p:spPr>
-          <a:xfrm>
-            <a:off x="6381750" y="3205162"/>
-            <a:ext cx="5238750" cy="914400"/>
-          </a:xfrm>
-          <a:prstGeom prst="rect">
-            <a:avLst/>
-          </a:prstGeom>
-          <a:noFill/>
-        </p:spPr>
-        <p:txBody>
-          <a:bodyPr wrap="square" lIns="0" rIns="0" tIns="0" bIns="0" anchor="t">
-            <a:spAutoFit/>
-          </a:bodyPr>
-          <a:lstStyle/>
-          <a:p>
-            <a:pPr algn="l">
-              <a:lnSpc>
-                <a:spcPts val="2400"/>
-              </a:lnSpc>
-            </a:pPr>
-            <a:r>
-              <a:rPr b="0" sz="1500" i="0" u="none">
-                <a:solidFill>
-                  <a:srgbClr val="9CA3AF"/>
-                </a:solidFill>
-                <a:latin typeface="Outfit"/>
-              </a:rPr>
-              <a:t>The visual analysis reveals a significant operational bottleneck: </a:t>
-            </a:r>
-            <a:r>
-              <a:rPr b="1" sz="1500" i="0" u="none">
-                <a:solidFill>
-                  <a:srgbClr val="9CA3AF"/>
-                </a:solidFill>
-                <a:latin typeface="Outfit"/>
-              </a:rPr>
-              <a:t>57% of all patients (273 individuals) experienced a delay</a:t>
-            </a:r>
-            <a:r>
-              <a:rPr b="0" sz="1500" i="0" u="none">
-                <a:solidFill>
-                  <a:srgbClr val="9CA3AF"/>
-                </a:solidFill>
-                <a:latin typeface="Outfit"/>
-              </a:rPr>
-              <a:t>, failing to meet the required triage time standards.</a:t>
-            </a:r>
-          </a:p>
-        </p:txBody>
-      </p:sp>
-      <p:sp>
-        <p:nvSpPr>
-          <p:cNvPr id="6" name="TextBox 5"/>
-          <p:cNvSpPr txBox="1"/>
-          <p:nvPr/>
-        </p:nvSpPr>
-        <p:spPr>
-          <a:xfrm>
-            <a:off x="6381750" y="4310062"/>
-            <a:ext cx="5238750" cy="914400"/>
-          </a:xfrm>
-          <a:prstGeom prst="rect">
-            <a:avLst/>
-          </a:prstGeom>
-          <a:noFill/>
-        </p:spPr>
-        <p:txBody>
-          <a:bodyPr wrap="square" lIns="0" rIns="0" tIns="0" bIns="0" anchor="t">
-            <a:spAutoFit/>
-          </a:bodyPr>
-          <a:lstStyle/>
-          <a:p>
-            <a:pPr algn="l">
-              <a:lnSpc>
-                <a:spcPts val="2400"/>
-              </a:lnSpc>
-            </a:pPr>
-            <a:r>
-              <a:rPr b="0" sz="1500" i="0" u="none">
-                <a:solidFill>
-                  <a:srgbClr val="9CA3AF"/>
-                </a:solidFill>
-                <a:latin typeface="Outfit"/>
-              </a:rPr>
-              <a:t>This high volume of delayed care is the primary driver behind the low Patient Satisfaction score observed in the KPI overview. Restructuring the initial intake process is paramount.</a:t>
-            </a:r>
-          </a:p>
-        </p:txBody>
-      </p:sp>
-      <p:sp>
-        <p:nvSpPr>
-          <p:cNvPr id="7" name="TextBox 6"/>
-          <p:cNvSpPr txBox="1"/>
-          <p:nvPr/>
-        </p:nvSpPr>
-        <p:spPr>
-          <a:xfrm>
-            <a:off x="571500" y="571500"/>
-            <a:ext cx="11601450" cy="561975"/>
-          </a:xfrm>
-          <a:prstGeom prst="rect">
-            <a:avLst/>
-          </a:prstGeom>
-          <a:noFill/>
-        </p:spPr>
-        <p:txBody>
-          <a:bodyPr wrap="square" lIns="0" rIns="0" tIns="0" bIns="0" anchor="t">
-            <a:spAutoFit/>
-          </a:bodyPr>
-          <a:lstStyle/>
-          <a:p>
-            <a:pPr algn="l"/>
-            <a:r>
-              <a:rPr b="1" sz="3450" i="0" u="none">
-                <a:solidFill>
-                  <a:srgbClr val="FFFFFF"/>
-                </a:solidFill>
-                <a:latin typeface="Space Grotesk"/>
-              </a:rPr>
-              <a:t>Wait Time SLA </a:t>
-            </a:r>
-            <a:r>
-              <a:rPr b="1" sz="3450" i="0" u="none">
-                <a:solidFill>
-                  <a:srgbClr val="38BDF8"/>
-                </a:solidFill>
-                <a:latin typeface="Space Grotesk"/>
-              </a:rPr>
-              <a:t>Compliance</a:t>
-            </a:r>
-          </a:p>
-        </p:txBody>
-      </p:sp>
-      <p:sp>
-        <p:nvSpPr>
-          <p:cNvPr id="8" name="Rectangle 7"/>
-          <p:cNvSpPr/>
-          <p:nvPr/>
-        </p:nvSpPr>
-        <p:spPr>
-          <a:xfrm>
-            <a:off x="571500" y="1266825"/>
-            <a:ext cx="11049000" cy="9525"/>
-          </a:xfrm>
-          <a:prstGeom prst="rect">
-            <a:avLst/>
-          </a:prstGeom>
-          <a:solidFill>
-            <a:srgbClr val="FFFFFF"/>
-          </a:solidFill>
-          <a:ln>
-            <a:noFill/>
-          </a:ln>
-          <a:effectLst/>
-        </p:spPr>
-        <p:style>
-          <a:lnRef idx="1">
-            <a:schemeClr val="accent1"/>
-          </a:lnRef>
-          <a:fillRef idx="3">
-            <a:schemeClr val="accent1"/>
-          </a:fillRef>
-          <a:effectRef idx="2">
-            <a:schemeClr val="accent1"/>
-          </a:effectRef>
-          <a:fontRef idx="minor">
-            <a:schemeClr val="lt1"/>
-          </a:fontRef>
-        </p:style>
-        <p:txBody>
-          <a:bodyPr rtlCol="0" anchor="ctr"/>
-          <a:lstStyle/>
-          <a:p>
-            <a:pPr algn="ctr"/>
-          </a:p>
-        </p:txBody>
-      </p:sp>
-    </p:spTree>
-  </p:cSld>
-  <p:clrMapOvr>
-    <a:masterClrMapping/>
-  </p:clrMapOvr>
-</p:sld>
-</file>
-
-<file path=ppt/slides/slide9.xml><?xml version="1.0" encoding="utf-8"?>
-<p:sld xmlns:a="http://schemas.openxmlformats.org/drawingml/2006/main" xmlns:p="http://schemas.openxmlformats.org/presentationml/2006/main" xmlns:r="http://schemas.openxmlformats.org/officeDocument/2006/relationships">
-  <p:cSld>
-    <p:spTree>
-      <p:nvGrpSpPr>
-        <p:cNvPr id="1" name=""/>
-        <p:cNvGrpSpPr/>
-        <p:nvPr/>
-      </p:nvGrpSpPr>
-      <p:grpSpPr/>
-      <p:pic>
-        <p:nvPicPr>
-          <p:cNvPr id="2" name="Picture 1" descr="image.png"/>
-          <p:cNvPicPr>
-            <a:picLocks noChangeAspect="1"/>
-          </p:cNvPicPr>
-          <p:nvPr/>
-        </p:nvPicPr>
-        <p:blipFill>
-          <a:blip r:embed="rId2"/>
-          <a:stretch>
-            <a:fillRect/>
-          </a:stretch>
-        </p:blipFill>
-        <p:spPr>
-          <a:xfrm>
-            <a:off x="0" y="0"/>
-            <a:ext cx="12192000" cy="6858000"/>
-          </a:xfrm>
-          <a:prstGeom prst="rect">
-            <a:avLst/>
-          </a:prstGeom>
-        </p:spPr>
-      </p:pic>
-      <p:pic>
-        <p:nvPicPr>
-          <p:cNvPr id="3" name="Picture 2" descr="image.png"/>
-          <p:cNvPicPr>
-            <a:picLocks noChangeAspect="1"/>
-          </p:cNvPicPr>
-          <p:nvPr/>
-        </p:nvPicPr>
-        <p:blipFill>
-          <a:blip r:embed="rId3"/>
-          <a:stretch>
-            <a:fillRect/>
-          </a:stretch>
-        </p:blipFill>
-        <p:spPr>
-          <a:xfrm>
-            <a:off x="571500" y="2414587"/>
-            <a:ext cx="11049000" cy="3114675"/>
-          </a:xfrm>
-          <a:prstGeom prst="rect">
-            <a:avLst/>
-          </a:prstGeom>
-        </p:spPr>
-      </p:pic>
-      <p:sp>
-        <p:nvSpPr>
-          <p:cNvPr id="4" name="TextBox 3"/>
-          <p:cNvSpPr txBox="1"/>
-          <p:nvPr/>
-        </p:nvSpPr>
-        <p:spPr>
-          <a:xfrm>
-            <a:off x="571500" y="2414587"/>
-            <a:ext cx="5500687" cy="342900"/>
-          </a:xfrm>
-          <a:prstGeom prst="rect">
-            <a:avLst/>
-          </a:prstGeom>
-          <a:noFill/>
-        </p:spPr>
-        <p:txBody>
-          <a:bodyPr wrap="square" lIns="0" rIns="0" tIns="0" bIns="0" anchor="t">
-            <a:spAutoFit/>
-          </a:bodyPr>
-          <a:lstStyle/>
-          <a:p>
-            <a:pPr algn="l"/>
-            <a:r>
-              <a:rPr b="1" sz="2100" i="0" u="none">
-                <a:solidFill>
-                  <a:srgbClr val="E5E7EB"/>
-                </a:solidFill>
-                <a:latin typeface="Space Grotesk"/>
-              </a:rPr>
-              <a:t>High Acuity Bottlenecks</a:t>
-            </a:r>
-          </a:p>
-        </p:txBody>
-      </p:sp>
-      <p:sp>
-        <p:nvSpPr>
-          <p:cNvPr id="5" name="TextBox 4"/>
-          <p:cNvSpPr txBox="1"/>
-          <p:nvPr/>
-        </p:nvSpPr>
-        <p:spPr>
-          <a:xfrm>
-            <a:off x="571500" y="2900362"/>
-            <a:ext cx="5238750" cy="914400"/>
-          </a:xfrm>
-          <a:prstGeom prst="rect">
-            <a:avLst/>
-          </a:prstGeom>
-          <a:noFill/>
-        </p:spPr>
-        <p:txBody>
-          <a:bodyPr wrap="square" lIns="0" rIns="0" tIns="0" bIns="0" anchor="t">
-            <a:spAutoFit/>
-          </a:bodyPr>
-          <a:lstStyle/>
-          <a:p>
-            <a:pPr algn="l">
-              <a:lnSpc>
-                <a:spcPts val="2400"/>
-              </a:lnSpc>
-            </a:pPr>
-            <a:r>
-              <a:rPr b="0" sz="1500" i="0" u="none">
-                <a:solidFill>
-                  <a:srgbClr val="9CA3AF"/>
-                </a:solidFill>
-                <a:latin typeface="Outfit"/>
-              </a:rPr>
-              <a:t>The data shows an almost perfectly even split in admission outcomes, with </a:t>
-            </a:r>
-            <a:r>
-              <a:rPr b="1" sz="1500" i="0" u="none">
-                <a:solidFill>
-                  <a:srgbClr val="9CA3AF"/>
-                </a:solidFill>
-                <a:latin typeface="Outfit"/>
-              </a:rPr>
-              <a:t>49% of ER visits (237 patients) resulting in a formal hospital admission.</a:t>
-            </a:r>
-          </a:p>
-        </p:txBody>
-      </p:sp>
-      <p:sp>
-        <p:nvSpPr>
-          <p:cNvPr id="6" name="TextBox 5"/>
-          <p:cNvSpPr txBox="1"/>
-          <p:nvPr/>
-        </p:nvSpPr>
-        <p:spPr>
-          <a:xfrm>
-            <a:off x="571500" y="4005262"/>
-            <a:ext cx="5238750" cy="1524000"/>
-          </a:xfrm>
-          <a:prstGeom prst="rect">
-            <a:avLst/>
-          </a:prstGeom>
-          <a:noFill/>
-        </p:spPr>
-        <p:txBody>
-          <a:bodyPr wrap="square" lIns="0" rIns="0" tIns="0" bIns="0" anchor="t">
-            <a:spAutoFit/>
-          </a:bodyPr>
-          <a:lstStyle/>
-          <a:p>
-            <a:pPr algn="l">
-              <a:lnSpc>
-                <a:spcPts val="2400"/>
-              </a:lnSpc>
-            </a:pPr>
-            <a:r>
-              <a:rPr b="0" sz="1500" i="0" u="none">
-                <a:solidFill>
-                  <a:srgbClr val="9CA3AF"/>
-                </a:solidFill>
-                <a:latin typeface="Outfit"/>
-              </a:rPr>
-              <a:t>This extremely high acuity rate requires extensive physician resources, diagnostic testing, and inpatient bed coordination. When inpatient beds are unavailable, these admitted patients board in the ER, severely restricting front-end throughput and exacerbating the 57% delay rate.</a:t>
-            </a:r>
-          </a:p>
-        </p:txBody>
-      </p:sp>
-      <p:sp>
-        <p:nvSpPr>
-          <p:cNvPr id="7" name="TextBox 6"/>
-          <p:cNvSpPr txBox="1"/>
-          <p:nvPr/>
-        </p:nvSpPr>
-        <p:spPr>
-          <a:xfrm>
-            <a:off x="571500" y="571500"/>
-            <a:ext cx="11601450" cy="561975"/>
-          </a:xfrm>
-          <a:prstGeom prst="rect">
-            <a:avLst/>
-          </a:prstGeom>
-          <a:noFill/>
-        </p:spPr>
-        <p:txBody>
-          <a:bodyPr wrap="square" lIns="0" rIns="0" tIns="0" bIns="0" anchor="t">
-            <a:spAutoFit/>
-          </a:bodyPr>
-          <a:lstStyle/>
-          <a:p>
-            <a:pPr algn="l"/>
-            <a:r>
-              <a:rPr b="1" sz="3450" i="0" u="none">
-                <a:solidFill>
-                  <a:srgbClr val="FFFFFF"/>
-                </a:solidFill>
-                <a:latin typeface="Space Grotesk"/>
-              </a:rPr>
-              <a:t>Hospital </a:t>
-            </a:r>
-            <a:r>
-              <a:rPr b="1" sz="3450" i="0" u="none">
-                <a:solidFill>
-                  <a:srgbClr val="38BDF8"/>
-                </a:solidFill>
-                <a:latin typeface="Space Grotesk"/>
-              </a:rPr>
-              <a:t>Admission Rates</a:t>
-            </a:r>
-          </a:p>
-        </p:txBody>
-      </p:sp>
-      <p:sp>
-        <p:nvSpPr>
-          <p:cNvPr id="8" name="Rectangle 7"/>
-          <p:cNvSpPr/>
-          <p:nvPr/>
-        </p:nvSpPr>
-        <p:spPr>
-          <a:xfrm>
-            <a:off x="571500" y="1266825"/>
-            <a:ext cx="11049000" cy="9525"/>
-          </a:xfrm>
-          <a:prstGeom prst="rect">
-            <a:avLst/>
-          </a:prstGeom>
-          <a:solidFill>
-            <a:srgbClr val="FFFFFF"/>
-          </a:solidFill>
-          <a:ln>
-            <a:noFill/>
-          </a:ln>
-          <a:effectLst/>
-        </p:spPr>
-        <p:style>
-          <a:lnRef idx="1">
-            <a:schemeClr val="accent1"/>
-          </a:lnRef>
-          <a:fillRef idx="3">
-            <a:schemeClr val="accent1"/>
-          </a:fillRef>
-          <a:effectRef idx="2">
-            <a:schemeClr val="accent1"/>
-          </a:effectRef>
-          <a:fontRef idx="minor">
-            <a:schemeClr val="lt1"/>
-          </a:fontRef>
-        </p:style>
-        <p:txBody>
-          <a:bodyPr rtlCol="0" anchor="ctr"/>
-          <a:lstStyle/>
-          <a:p>
-            <a:pPr algn="ctr"/>
+            <a:endParaRPr/>
           </a:p>
         </p:txBody>
       </p:sp>
